--- a/report/output/ELE_IDSA_Project1_Slides.pptx
+++ b/report/output/ELE_IDSA_Project1_Slides.pptx
@@ -15,6 +15,13 @@
     <p:sldId id="263" r:id="rId14"/>
     <p:sldId id="264" r:id="rId15"/>
     <p:sldId id="265" r:id="rId16"/>
+    <p:sldId id="266" r:id="rId17"/>
+    <p:sldId id="267" r:id="rId18"/>
+    <p:sldId id="268" r:id="rId19"/>
+    <p:sldId id="269" r:id="rId20"/>
+    <p:sldId id="270" r:id="rId21"/>
+    <p:sldId id="271" r:id="rId22"/>
+    <p:sldId id="272" r:id="rId23"/>
   </p:sldIdLst>
   <p:sldSz cx="12191695" cy="6858000" type="screen4x3"/>
   <p:notesSz cx="6858000" cy="9144000"/>
@@ -3343,7 +3350,7 @@
                 </a:solidFill>
                 <a:latin typeface="Calibri"/>
               </a:rPr>
-              <a:t>CONCLUSION</a:t>
+              <a:t>RESULTS AND DISCUSSION</a:t>
             </a:r>
           </a:p>
         </p:txBody>
@@ -3377,7 +3384,7 @@
                 </a:solidFill>
                 <a:latin typeface="Calibri"/>
               </a:rPr>
-              <a:t>Conclusion</a:t>
+              <a:t>H1: Passengers on board by headway group</a:t>
             </a:r>
           </a:p>
         </p:txBody>
@@ -3451,16 +3458,74 @@
           </a:p>
         </p:txBody>
       </p:sp>
-      <p:sp>
-        <p:nvSpPr>
-          <p:cNvPr id="7" name="TextBox 6"/>
+      <p:pic>
+        <p:nvPicPr>
+          <p:cNvPr id="7" name="Picture 6" descr="fig06_h1_load_vs_headway.png"/>
+          <p:cNvPicPr>
+            <a:picLocks noChangeAspect="1"/>
+          </p:cNvPicPr>
+          <p:nvPr/>
+        </p:nvPicPr>
+        <p:blipFill>
+          <a:blip r:embed="rId2"/>
+          <a:stretch>
+            <a:fillRect/>
+          </a:stretch>
+        </p:blipFill>
+        <p:spPr>
+          <a:xfrm>
+            <a:off x="548640" y="1463040"/>
+            <a:ext cx="6781838" cy="4526280"/>
+          </a:xfrm>
+          <a:prstGeom prst="rect">
+            <a:avLst/>
+          </a:prstGeom>
+        </p:spPr>
+      </p:pic>
+      <p:sp>
+        <p:nvSpPr>
+          <p:cNvPr id="8" name="TextBox 7"/>
           <p:cNvSpPr txBox="1"/>
           <p:nvPr/>
         </p:nvSpPr>
         <p:spPr>
           <a:xfrm>
-            <a:off x="548640" y="1508760"/>
-            <a:ext cx="11094415" cy="4663440"/>
+            <a:off x="548640" y="6035040"/>
+            <a:ext cx="7498079" cy="274320"/>
+          </a:xfrm>
+          <a:prstGeom prst="rect">
+            <a:avLst/>
+          </a:prstGeom>
+          <a:noFill/>
+        </p:spPr>
+        <p:txBody>
+          <a:bodyPr wrap="square" anchor="t" lIns="45720" rIns="45720">
+            <a:spAutoFit/>
+          </a:bodyPr>
+          <a:lstStyle/>
+          <a:p>
+            <a:r>
+              <a:rPr sz="1100">
+                <a:solidFill>
+                  <a:srgbClr val="52514E"/>
+                </a:solidFill>
+                <a:latin typeface="Calibri"/>
+              </a:rPr>
+              <a:t>Figure 3. H1: Passengers on board by headway group</a:t>
+            </a:r>
+          </a:p>
+        </p:txBody>
+      </p:sp>
+      <p:sp>
+        <p:nvSpPr>
+          <p:cNvPr id="9" name="TextBox 8"/>
+          <p:cNvSpPr txBox="1"/>
+          <p:nvPr/>
+        </p:nvSpPr>
+        <p:spPr>
+          <a:xfrm>
+            <a:off x="8366759" y="1554480"/>
+            <a:ext cx="3276295" cy="4572000"/>
           </a:xfrm>
           <a:prstGeom prst="rect">
             <a:avLst/>
@@ -3479,13 +3544,2917 @@
               </a:spcAft>
             </a:pPr>
             <a:r>
+              <a:rPr sz="1400">
+                <a:solidFill>
+                  <a:srgbClr val="0B0B0B"/>
+                </a:solidFill>
+                <a:latin typeface="Calibri"/>
+              </a:rPr>
+              <a:t>•  Mean load doubles as the gap grows: </a:t>
+            </a:r>
+            <a:r>
+              <a:rPr sz="1400" b="1">
+                <a:solidFill>
+                  <a:srgbClr val="0B0B0B"/>
+                </a:solidFill>
+                <a:latin typeface="Calibri"/>
+              </a:rPr>
+              <a:t>9.1 passengers</a:t>
+            </a:r>
+            <a:r>
+              <a:rPr sz="1400">
+                <a:solidFill>
+                  <a:srgbClr val="0B0B0B"/>
+                </a:solidFill>
+                <a:latin typeface="Calibri"/>
+              </a:rPr>
+              <a:t> (0–5 min) → 11.0 → 13.4 → 15.8 → </a:t>
+            </a:r>
+            <a:r>
+              <a:rPr sz="1400" b="1">
+                <a:solidFill>
+                  <a:srgbClr val="0B0B0B"/>
+                </a:solidFill>
+                <a:latin typeface="Calibri"/>
+              </a:rPr>
+              <a:t>17.9</a:t>
+            </a:r>
+            <a:r>
+              <a:rPr sz="1400">
+                <a:solidFill>
+                  <a:srgbClr val="0B0B0B"/>
+                </a:solidFill>
+                <a:latin typeface="Calibri"/>
+              </a:rPr>
+              <a:t> (20+ min)</a:t>
+            </a:r>
+          </a:p>
+          <a:p>
+            <a:pPr>
+              <a:spcAft>
+                <a:spcPts val="800"/>
+              </a:spcAft>
+            </a:pPr>
+            <a:r>
+              <a:rPr sz="1400">
+                <a:solidFill>
+                  <a:srgbClr val="0B0B0B"/>
+                </a:solidFill>
+                <a:latin typeface="Calibri"/>
+              </a:rPr>
+              <a:t>•  Medians move the same way (8 → 17), so a few crowded buses are not driving it</a:t>
+            </a:r>
+          </a:p>
+          <a:p>
+            <a:pPr>
+              <a:spcAft>
+                <a:spcPts val="800"/>
+              </a:spcAft>
+            </a:pPr>
+            <a:r>
+              <a:rPr sz="1400">
+                <a:solidFill>
+                  <a:srgbClr val="0B0B0B"/>
+                </a:solidFill>
+                <a:latin typeface="Calibri"/>
+              </a:rPr>
+              <a:t>•  </a:t>
+            </a:r>
+            <a:r>
+              <a:rPr sz="1400" b="1">
+                <a:solidFill>
+                  <a:srgbClr val="0B0B0B"/>
+                </a:solidFill>
+                <a:latin typeface="Calibri"/>
+              </a:rPr>
+              <a:t>Spearman:</a:t>
+            </a:r>
+            <a:r>
+              <a:rPr sz="1400">
+                <a:solidFill>
+                  <a:srgbClr val="0B0B0B"/>
+                </a:solidFill>
+                <a:latin typeface="Calibri"/>
+              </a:rPr>
+              <a:t> rho = </a:t>
+            </a:r>
+            <a:r>
+              <a:rPr sz="1400" b="1">
+                <a:solidFill>
+                  <a:srgbClr val="0B0B0B"/>
+                </a:solidFill>
+                <a:latin typeface="Calibri"/>
+              </a:rPr>
+              <a:t>0.349</a:t>
+            </a:r>
+            <a:r>
+              <a:rPr sz="1400">
+                <a:solidFill>
+                  <a:srgbClr val="0B0B0B"/>
+                </a:solidFill>
+                <a:latin typeface="Calibri"/>
+              </a:rPr>
+              <a:t>, p &lt; 0.001 (n = 51,437)</a:t>
+            </a:r>
+          </a:p>
+          <a:p>
+            <a:pPr>
+              <a:spcAft>
+                <a:spcPts val="800"/>
+              </a:spcAft>
+            </a:pPr>
+            <a:r>
+              <a:rPr sz="1400">
+                <a:solidFill>
+                  <a:srgbClr val="0B0B0B"/>
+                </a:solidFill>
+                <a:latin typeface="Calibri"/>
+              </a:rPr>
+              <a:t>•  </a:t>
+            </a:r>
+            <a:r>
+              <a:rPr sz="1400" b="1">
+                <a:solidFill>
+                  <a:srgbClr val="0B0B0B"/>
+                </a:solidFill>
+                <a:latin typeface="Calibri"/>
+              </a:rPr>
+              <a:t>Kruskal-Wallis:</a:t>
+            </a:r>
+            <a:r>
+              <a:rPr sz="1400">
+                <a:solidFill>
+                  <a:srgbClr val="0B0B0B"/>
+                </a:solidFill>
+                <a:latin typeface="Calibri"/>
+              </a:rPr>
+              <a:t> H = </a:t>
+            </a:r>
+            <a:r>
+              <a:rPr sz="1400" b="1">
+                <a:solidFill>
+                  <a:srgbClr val="0B0B0B"/>
+                </a:solidFill>
+                <a:latin typeface="Calibri"/>
+              </a:rPr>
+              <a:t>5,883.4</a:t>
+            </a:r>
+            <a:r>
+              <a:rPr sz="1400">
+                <a:solidFill>
+                  <a:srgbClr val="0B0B0B"/>
+                </a:solidFill>
+                <a:latin typeface="Calibri"/>
+              </a:rPr>
+              <a:t>, df = 4, p &lt; 0.001 → </a:t>
+            </a:r>
+            <a:r>
+              <a:rPr sz="1400" b="1">
+                <a:solidFill>
+                  <a:srgbClr val="0B0B0B"/>
+                </a:solidFill>
+                <a:latin typeface="Calibri"/>
+              </a:rPr>
+              <a:t>reject H₀</a:t>
+            </a:r>
+          </a:p>
+        </p:txBody>
+      </p:sp>
+    </p:spTree>
+  </p:cSld>
+  <p:clrMapOvr>
+    <a:masterClrMapping/>
+  </p:clrMapOvr>
+</p:sld>
+</file>
+
+<file path=ppt/slides/slide11.xml><?xml version="1.0" encoding="utf-8"?>
+<p:sld xmlns:a="http://schemas.openxmlformats.org/drawingml/2006/main" xmlns:p="http://schemas.openxmlformats.org/presentationml/2006/main" xmlns:r="http://schemas.openxmlformats.org/officeDocument/2006/relationships">
+  <p:cSld>
+    <p:spTree>
+      <p:nvGrpSpPr>
+        <p:cNvPr id="1" name=""/>
+        <p:cNvGrpSpPr/>
+        <p:nvPr/>
+      </p:nvGrpSpPr>
+      <p:grpSpPr/>
+      <p:sp>
+        <p:nvSpPr>
+          <p:cNvPr id="2" name="Rectangle 1"/>
+          <p:cNvSpPr/>
+          <p:nvPr/>
+        </p:nvSpPr>
+        <p:spPr>
+          <a:xfrm>
+            <a:off x="0" y="0"/>
+            <a:ext cx="12191695" cy="109728"/>
+          </a:xfrm>
+          <a:prstGeom prst="rect">
+            <a:avLst/>
+          </a:prstGeom>
+          <a:solidFill>
+            <a:srgbClr val="2A78D6"/>
+          </a:solidFill>
+          <a:ln>
+            <a:noFill/>
+          </a:ln>
+        </p:spPr>
+        <p:style>
+          <a:lnRef idx="1">
+            <a:schemeClr val="accent1"/>
+          </a:lnRef>
+          <a:fillRef idx="3">
+            <a:schemeClr val="accent1"/>
+          </a:fillRef>
+          <a:effectRef idx="2">
+            <a:schemeClr val="accent1"/>
+          </a:effectRef>
+          <a:fontRef idx="minor">
+            <a:schemeClr val="lt1"/>
+          </a:fontRef>
+        </p:style>
+        <p:txBody>
+          <a:bodyPr rtlCol="0" anchor="ctr"/>
+          <a:lstStyle/>
+          <a:p>
+            <a:pPr algn="ctr"/>
+          </a:p>
+        </p:txBody>
+      </p:sp>
+      <p:sp>
+        <p:nvSpPr>
+          <p:cNvPr id="3" name="TextBox 2"/>
+          <p:cNvSpPr txBox="1"/>
+          <p:nvPr/>
+        </p:nvSpPr>
+        <p:spPr>
+          <a:xfrm>
+            <a:off x="548640" y="292608"/>
+            <a:ext cx="11094415" cy="320040"/>
+          </a:xfrm>
+          <a:prstGeom prst="rect">
+            <a:avLst/>
+          </a:prstGeom>
+          <a:noFill/>
+        </p:spPr>
+        <p:txBody>
+          <a:bodyPr wrap="square" anchor="t" lIns="45720" rIns="45720">
+            <a:spAutoFit/>
+          </a:bodyPr>
+          <a:lstStyle/>
+          <a:p>
+            <a:r>
+              <a:rPr sz="1200" b="1">
+                <a:solidFill>
+                  <a:srgbClr val="2A78D6"/>
+                </a:solidFill>
+                <a:latin typeface="Calibri"/>
+              </a:rPr>
+              <a:t>RESULTS AND DISCUSSION</a:t>
+            </a:r>
+          </a:p>
+        </p:txBody>
+      </p:sp>
+      <p:sp>
+        <p:nvSpPr>
+          <p:cNvPr id="4" name="TextBox 3"/>
+          <p:cNvSpPr txBox="1"/>
+          <p:nvPr/>
+        </p:nvSpPr>
+        <p:spPr>
+          <a:xfrm>
+            <a:off x="548640" y="566928"/>
+            <a:ext cx="11094415" cy="731520"/>
+          </a:xfrm>
+          <a:prstGeom prst="rect">
+            <a:avLst/>
+          </a:prstGeom>
+          <a:noFill/>
+        </p:spPr>
+        <p:txBody>
+          <a:bodyPr wrap="square" anchor="t" lIns="45720" rIns="45720">
+            <a:spAutoFit/>
+          </a:bodyPr>
+          <a:lstStyle/>
+          <a:p>
+            <a:r>
+              <a:rPr sz="2800" b="1">
+                <a:solidFill>
+                  <a:srgbClr val="0B0B0B"/>
+                </a:solidFill>
+                <a:latin typeface="Calibri"/>
+              </a:rPr>
+              <a:t>H2: Dwell time vs passengers boarding</a:t>
+            </a:r>
+          </a:p>
+        </p:txBody>
+      </p:sp>
+      <p:sp>
+        <p:nvSpPr>
+          <p:cNvPr id="5" name="TextBox 4"/>
+          <p:cNvSpPr txBox="1"/>
+          <p:nvPr/>
+        </p:nvSpPr>
+        <p:spPr>
+          <a:xfrm>
+            <a:off x="548640" y="6446520"/>
+            <a:ext cx="11094415" cy="274320"/>
+          </a:xfrm>
+          <a:prstGeom prst="rect">
+            <a:avLst/>
+          </a:prstGeom>
+          <a:noFill/>
+        </p:spPr>
+        <p:txBody>
+          <a:bodyPr wrap="square" anchor="t" lIns="45720" rIns="45720">
+            <a:spAutoFit/>
+          </a:bodyPr>
+          <a:lstStyle/>
+          <a:p>
+            <a:r>
+              <a:rPr sz="1000">
+                <a:solidFill>
+                  <a:srgbClr val="52514E"/>
+                </a:solidFill>
+                <a:latin typeface="Calibri"/>
+              </a:rPr>
+              <a:t>ELE IDSA Project 1 · GEC2B</a:t>
+            </a:r>
+          </a:p>
+        </p:txBody>
+      </p:sp>
+      <p:sp>
+        <p:nvSpPr>
+          <p:cNvPr id="6" name="TextBox 5"/>
+          <p:cNvSpPr txBox="1"/>
+          <p:nvPr/>
+        </p:nvSpPr>
+        <p:spPr>
+          <a:xfrm>
+            <a:off x="10728655" y="6446520"/>
+            <a:ext cx="914400" cy="274320"/>
+          </a:xfrm>
+          <a:prstGeom prst="rect">
+            <a:avLst/>
+          </a:prstGeom>
+          <a:noFill/>
+        </p:spPr>
+        <p:txBody>
+          <a:bodyPr wrap="square" anchor="t" lIns="45720" rIns="45720">
+            <a:spAutoFit/>
+          </a:bodyPr>
+          <a:lstStyle/>
+          <a:p>
+            <a:pPr algn="r"/>
+            <a:r>
+              <a:rPr sz="1000">
+                <a:solidFill>
+                  <a:srgbClr val="52514E"/>
+                </a:solidFill>
+                <a:latin typeface="Calibri"/>
+              </a:rPr>
+              <a:t>11</a:t>
+            </a:r>
+          </a:p>
+        </p:txBody>
+      </p:sp>
+      <p:pic>
+        <p:nvPicPr>
+          <p:cNvPr id="7" name="Picture 6" descr="fig07_h2_dwell_vs_boardings.png"/>
+          <p:cNvPicPr>
+            <a:picLocks noChangeAspect="1"/>
+          </p:cNvPicPr>
+          <p:nvPr/>
+        </p:nvPicPr>
+        <p:blipFill>
+          <a:blip r:embed="rId2"/>
+          <a:stretch>
+            <a:fillRect/>
+          </a:stretch>
+        </p:blipFill>
+        <p:spPr>
+          <a:xfrm>
+            <a:off x="548640" y="1463040"/>
+            <a:ext cx="7297792" cy="4526280"/>
+          </a:xfrm>
+          <a:prstGeom prst="rect">
+            <a:avLst/>
+          </a:prstGeom>
+        </p:spPr>
+      </p:pic>
+      <p:sp>
+        <p:nvSpPr>
+          <p:cNvPr id="8" name="TextBox 7"/>
+          <p:cNvSpPr txBox="1"/>
+          <p:nvPr/>
+        </p:nvSpPr>
+        <p:spPr>
+          <a:xfrm>
+            <a:off x="548640" y="6035040"/>
+            <a:ext cx="7498079" cy="274320"/>
+          </a:xfrm>
+          <a:prstGeom prst="rect">
+            <a:avLst/>
+          </a:prstGeom>
+          <a:noFill/>
+        </p:spPr>
+        <p:txBody>
+          <a:bodyPr wrap="square" anchor="t" lIns="45720" rIns="45720">
+            <a:spAutoFit/>
+          </a:bodyPr>
+          <a:lstStyle/>
+          <a:p>
+            <a:r>
+              <a:rPr sz="1100">
+                <a:solidFill>
+                  <a:srgbClr val="52514E"/>
+                </a:solidFill>
+                <a:latin typeface="Calibri"/>
+              </a:rPr>
+              <a:t>Figure 4. H2: Dwell time vs passengers boarding</a:t>
+            </a:r>
+          </a:p>
+        </p:txBody>
+      </p:sp>
+      <p:sp>
+        <p:nvSpPr>
+          <p:cNvPr id="9" name="TextBox 8"/>
+          <p:cNvSpPr txBox="1"/>
+          <p:nvPr/>
+        </p:nvSpPr>
+        <p:spPr>
+          <a:xfrm>
+            <a:off x="8366759" y="1554480"/>
+            <a:ext cx="3276295" cy="4572000"/>
+          </a:xfrm>
+          <a:prstGeom prst="rect">
+            <a:avLst/>
+          </a:prstGeom>
+          <a:noFill/>
+        </p:spPr>
+        <p:txBody>
+          <a:bodyPr wrap="square" anchor="t" lIns="45720" rIns="45720">
+            <a:spAutoFit/>
+          </a:bodyPr>
+          <a:lstStyle/>
+          <a:p>
+            <a:pPr>
+              <a:spcAft>
+                <a:spcPts val="800"/>
+              </a:spcAft>
+            </a:pPr>
+            <a:r>
+              <a:rPr sz="1400">
+                <a:solidFill>
+                  <a:srgbClr val="0B0B0B"/>
+                </a:solidFill>
+                <a:latin typeface="Calibri"/>
+              </a:rPr>
+              <a:t>•  OLS (n = 116,697): </a:t>
+            </a:r>
+            <a:r>
+              <a:rPr sz="1400" b="1">
+                <a:solidFill>
+                  <a:srgbClr val="0B0B0B"/>
+                </a:solidFill>
+                <a:latin typeface="Calibri"/>
+              </a:rPr>
+              <a:t>dwell = 12.79 + 6.91 × ons + 3.65 × offs</a:t>
+            </a:r>
+            <a:r>
+              <a:rPr sz="1400">
+                <a:solidFill>
+                  <a:srgbClr val="0B0B0B"/>
+                </a:solidFill>
+                <a:latin typeface="Calibri"/>
+              </a:rPr>
+              <a:t> seconds</a:t>
+            </a:r>
+          </a:p>
+          <a:p>
+            <a:pPr>
+              <a:spcAft>
+                <a:spcPts val="800"/>
+              </a:spcAft>
+            </a:pPr>
+            <a:r>
+              <a:rPr sz="1400">
+                <a:solidFill>
+                  <a:srgbClr val="0B0B0B"/>
+                </a:solidFill>
+                <a:latin typeface="Calibri"/>
+              </a:rPr>
+              <a:t>•  Each </a:t>
+            </a:r>
+            <a:r>
+              <a:rPr sz="1400" b="1">
+                <a:solidFill>
+                  <a:srgbClr val="0B0B0B"/>
+                </a:solidFill>
+                <a:latin typeface="Calibri"/>
+              </a:rPr>
+              <a:t>boarding adds ~6.9 s</a:t>
+            </a:r>
+            <a:r>
+              <a:rPr sz="1400">
+                <a:solidFill>
+                  <a:srgbClr val="0B0B0B"/>
+                </a:solidFill>
+                <a:latin typeface="Calibri"/>
+              </a:rPr>
+              <a:t>, each alighting ~3.7 s — boarding costs </a:t>
+            </a:r>
+            <a:r>
+              <a:rPr sz="1400" b="1">
+                <a:solidFill>
+                  <a:srgbClr val="0B0B0B"/>
+                </a:solidFill>
+                <a:latin typeface="Calibri"/>
+              </a:rPr>
+              <a:t>1.9×</a:t>
+            </a:r>
+            <a:r>
+              <a:rPr sz="1400">
+                <a:solidFill>
+                  <a:srgbClr val="0B0B0B"/>
+                </a:solidFill>
+                <a:latin typeface="Calibri"/>
+              </a:rPr>
+              <a:t> more</a:t>
+            </a:r>
+          </a:p>
+          <a:p>
+            <a:pPr>
+              <a:spcAft>
+                <a:spcPts val="800"/>
+              </a:spcAft>
+            </a:pPr>
+            <a:r>
+              <a:rPr sz="1400">
+                <a:solidFill>
+                  <a:srgbClr val="0B0B0B"/>
+                </a:solidFill>
+                <a:latin typeface="Calibri"/>
+              </a:rPr>
+              <a:t>•  Mean dwell climbs from </a:t>
+            </a:r>
+            <a:r>
+              <a:rPr sz="1400" b="1">
+                <a:solidFill>
+                  <a:srgbClr val="0B0B0B"/>
+                </a:solidFill>
+                <a:latin typeface="Calibri"/>
+              </a:rPr>
+              <a:t>16.9 s</a:t>
+            </a:r>
+            <a:r>
+              <a:rPr sz="1400">
+                <a:solidFill>
+                  <a:srgbClr val="0B0B0B"/>
+                </a:solidFill>
+                <a:latin typeface="Calibri"/>
+              </a:rPr>
+              <a:t> at no boardings to </a:t>
+            </a:r>
+            <a:r>
+              <a:rPr sz="1400" b="1">
+                <a:solidFill>
+                  <a:srgbClr val="0B0B0B"/>
+                </a:solidFill>
+                <a:latin typeface="Calibri"/>
+              </a:rPr>
+              <a:t>111.8 s</a:t>
+            </a:r>
+            <a:r>
+              <a:rPr sz="1400">
+                <a:solidFill>
+                  <a:srgbClr val="0B0B0B"/>
+                </a:solidFill>
+                <a:latin typeface="Calibri"/>
+              </a:rPr>
+              <a:t> at 20 boardings</a:t>
+            </a:r>
+          </a:p>
+          <a:p>
+            <a:pPr>
+              <a:spcAft>
+                <a:spcPts val="800"/>
+              </a:spcAft>
+            </a:pPr>
+            <a:r>
+              <a:rPr sz="1400">
+                <a:solidFill>
+                  <a:srgbClr val="0B0B0B"/>
+                </a:solidFill>
+                <a:latin typeface="Calibri"/>
+              </a:rPr>
+              <a:t>•  Both p &lt; 0.001 → </a:t>
+            </a:r>
+            <a:r>
+              <a:rPr sz="1400" b="1">
+                <a:solidFill>
+                  <a:srgbClr val="0B0B0B"/>
+                </a:solidFill>
+                <a:latin typeface="Calibri"/>
+              </a:rPr>
+              <a:t>reject H₀</a:t>
+            </a:r>
+            <a:r>
+              <a:rPr sz="1400">
+                <a:solidFill>
+                  <a:srgbClr val="0B0B0B"/>
+                </a:solidFill>
+                <a:latin typeface="Calibri"/>
+              </a:rPr>
+              <a:t>; R² = 0.180 (traffic and ramps explain the rest)</a:t>
+            </a:r>
+          </a:p>
+        </p:txBody>
+      </p:sp>
+    </p:spTree>
+  </p:cSld>
+  <p:clrMapOvr>
+    <a:masterClrMapping/>
+  </p:clrMapOvr>
+</p:sld>
+</file>
+
+<file path=ppt/slides/slide12.xml><?xml version="1.0" encoding="utf-8"?>
+<p:sld xmlns:a="http://schemas.openxmlformats.org/drawingml/2006/main" xmlns:p="http://schemas.openxmlformats.org/presentationml/2006/main" xmlns:r="http://schemas.openxmlformats.org/officeDocument/2006/relationships">
+  <p:cSld>
+    <p:spTree>
+      <p:nvGrpSpPr>
+        <p:cNvPr id="1" name=""/>
+        <p:cNvGrpSpPr/>
+        <p:nvPr/>
+      </p:nvGrpSpPr>
+      <p:grpSpPr/>
+      <p:sp>
+        <p:nvSpPr>
+          <p:cNvPr id="2" name="Rectangle 1"/>
+          <p:cNvSpPr/>
+          <p:nvPr/>
+        </p:nvSpPr>
+        <p:spPr>
+          <a:xfrm>
+            <a:off x="0" y="0"/>
+            <a:ext cx="12191695" cy="109728"/>
+          </a:xfrm>
+          <a:prstGeom prst="rect">
+            <a:avLst/>
+          </a:prstGeom>
+          <a:solidFill>
+            <a:srgbClr val="2A78D6"/>
+          </a:solidFill>
+          <a:ln>
+            <a:noFill/>
+          </a:ln>
+        </p:spPr>
+        <p:style>
+          <a:lnRef idx="1">
+            <a:schemeClr val="accent1"/>
+          </a:lnRef>
+          <a:fillRef idx="3">
+            <a:schemeClr val="accent1"/>
+          </a:fillRef>
+          <a:effectRef idx="2">
+            <a:schemeClr val="accent1"/>
+          </a:effectRef>
+          <a:fontRef idx="minor">
+            <a:schemeClr val="lt1"/>
+          </a:fontRef>
+        </p:style>
+        <p:txBody>
+          <a:bodyPr rtlCol="0" anchor="ctr"/>
+          <a:lstStyle/>
+          <a:p>
+            <a:pPr algn="ctr"/>
+          </a:p>
+        </p:txBody>
+      </p:sp>
+      <p:sp>
+        <p:nvSpPr>
+          <p:cNvPr id="3" name="TextBox 2"/>
+          <p:cNvSpPr txBox="1"/>
+          <p:nvPr/>
+        </p:nvSpPr>
+        <p:spPr>
+          <a:xfrm>
+            <a:off x="548640" y="292608"/>
+            <a:ext cx="11094415" cy="320040"/>
+          </a:xfrm>
+          <a:prstGeom prst="rect">
+            <a:avLst/>
+          </a:prstGeom>
+          <a:noFill/>
+        </p:spPr>
+        <p:txBody>
+          <a:bodyPr wrap="square" anchor="t" lIns="45720" rIns="45720">
+            <a:spAutoFit/>
+          </a:bodyPr>
+          <a:lstStyle/>
+          <a:p>
+            <a:r>
+              <a:rPr sz="1200" b="1">
+                <a:solidFill>
+                  <a:srgbClr val="2A78D6"/>
+                </a:solidFill>
+                <a:latin typeface="Calibri"/>
+              </a:rPr>
+              <a:t>RESULTS AND DISCUSSION</a:t>
+            </a:r>
+          </a:p>
+        </p:txBody>
+      </p:sp>
+      <p:sp>
+        <p:nvSpPr>
+          <p:cNvPr id="4" name="TextBox 3"/>
+          <p:cNvSpPr txBox="1"/>
+          <p:nvPr/>
+        </p:nvSpPr>
+        <p:spPr>
+          <a:xfrm>
+            <a:off x="548640" y="566928"/>
+            <a:ext cx="11094415" cy="731520"/>
+          </a:xfrm>
+          <a:prstGeom prst="rect">
+            <a:avLst/>
+          </a:prstGeom>
+          <a:noFill/>
+        </p:spPr>
+        <p:txBody>
+          <a:bodyPr wrap="square" anchor="t" lIns="45720" rIns="45720">
+            <a:spAutoFit/>
+          </a:bodyPr>
+          <a:lstStyle/>
+          <a:p>
+            <a:r>
+              <a:rPr sz="2800" b="1">
+                <a:solidFill>
+                  <a:srgbClr val="0B0B0B"/>
+                </a:solidFill>
+                <a:latin typeface="Calibri"/>
+              </a:rPr>
+              <a:t>H3: Headway irregularity along the route</a:t>
+            </a:r>
+          </a:p>
+        </p:txBody>
+      </p:sp>
+      <p:sp>
+        <p:nvSpPr>
+          <p:cNvPr id="5" name="TextBox 4"/>
+          <p:cNvSpPr txBox="1"/>
+          <p:nvPr/>
+        </p:nvSpPr>
+        <p:spPr>
+          <a:xfrm>
+            <a:off x="548640" y="6446520"/>
+            <a:ext cx="11094415" cy="274320"/>
+          </a:xfrm>
+          <a:prstGeom prst="rect">
+            <a:avLst/>
+          </a:prstGeom>
+          <a:noFill/>
+        </p:spPr>
+        <p:txBody>
+          <a:bodyPr wrap="square" anchor="t" lIns="45720" rIns="45720">
+            <a:spAutoFit/>
+          </a:bodyPr>
+          <a:lstStyle/>
+          <a:p>
+            <a:r>
+              <a:rPr sz="1000">
+                <a:solidFill>
+                  <a:srgbClr val="52514E"/>
+                </a:solidFill>
+                <a:latin typeface="Calibri"/>
+              </a:rPr>
+              <a:t>ELE IDSA Project 1 · GEC2B</a:t>
+            </a:r>
+          </a:p>
+        </p:txBody>
+      </p:sp>
+      <p:sp>
+        <p:nvSpPr>
+          <p:cNvPr id="6" name="TextBox 5"/>
+          <p:cNvSpPr txBox="1"/>
+          <p:nvPr/>
+        </p:nvSpPr>
+        <p:spPr>
+          <a:xfrm>
+            <a:off x="10728655" y="6446520"/>
+            <a:ext cx="914400" cy="274320"/>
+          </a:xfrm>
+          <a:prstGeom prst="rect">
+            <a:avLst/>
+          </a:prstGeom>
+          <a:noFill/>
+        </p:spPr>
+        <p:txBody>
+          <a:bodyPr wrap="square" anchor="t" lIns="45720" rIns="45720">
+            <a:spAutoFit/>
+          </a:bodyPr>
+          <a:lstStyle/>
+          <a:p>
+            <a:pPr algn="r"/>
+            <a:r>
+              <a:rPr sz="1000">
+                <a:solidFill>
+                  <a:srgbClr val="52514E"/>
+                </a:solidFill>
+                <a:latin typeface="Calibri"/>
+              </a:rPr>
+              <a:t>12</a:t>
+            </a:r>
+          </a:p>
+        </p:txBody>
+      </p:sp>
+      <p:pic>
+        <p:nvPicPr>
+          <p:cNvPr id="7" name="Picture 6" descr="fig08_h3_headway_cv_by_stop.png"/>
+          <p:cNvPicPr>
+            <a:picLocks noChangeAspect="1"/>
+          </p:cNvPicPr>
+          <p:nvPr/>
+        </p:nvPicPr>
+        <p:blipFill>
+          <a:blip r:embed="rId2"/>
+          <a:stretch>
+            <a:fillRect/>
+          </a:stretch>
+        </p:blipFill>
+        <p:spPr>
+          <a:xfrm>
+            <a:off x="548640" y="1463040"/>
+            <a:ext cx="6705018" cy="4526280"/>
+          </a:xfrm>
+          <a:prstGeom prst="rect">
+            <a:avLst/>
+          </a:prstGeom>
+        </p:spPr>
+      </p:pic>
+      <p:sp>
+        <p:nvSpPr>
+          <p:cNvPr id="8" name="TextBox 7"/>
+          <p:cNvSpPr txBox="1"/>
+          <p:nvPr/>
+        </p:nvSpPr>
+        <p:spPr>
+          <a:xfrm>
+            <a:off x="548640" y="6035040"/>
+            <a:ext cx="7498079" cy="274320"/>
+          </a:xfrm>
+          <a:prstGeom prst="rect">
+            <a:avLst/>
+          </a:prstGeom>
+          <a:noFill/>
+        </p:spPr>
+        <p:txBody>
+          <a:bodyPr wrap="square" anchor="t" lIns="45720" rIns="45720">
+            <a:spAutoFit/>
+          </a:bodyPr>
+          <a:lstStyle/>
+          <a:p>
+            <a:r>
+              <a:rPr sz="1100">
+                <a:solidFill>
+                  <a:srgbClr val="52514E"/>
+                </a:solidFill>
+                <a:latin typeface="Calibri"/>
+              </a:rPr>
+              <a:t>Figure 5. H3: Headway irregularity along the route</a:t>
+            </a:r>
+          </a:p>
+        </p:txBody>
+      </p:sp>
+      <p:sp>
+        <p:nvSpPr>
+          <p:cNvPr id="9" name="TextBox 8"/>
+          <p:cNvSpPr txBox="1"/>
+          <p:nvPr/>
+        </p:nvSpPr>
+        <p:spPr>
+          <a:xfrm>
+            <a:off x="8366759" y="1554480"/>
+            <a:ext cx="3276295" cy="4572000"/>
+          </a:xfrm>
+          <a:prstGeom prst="rect">
+            <a:avLst/>
+          </a:prstGeom>
+          <a:noFill/>
+        </p:spPr>
+        <p:txBody>
+          <a:bodyPr wrap="square" anchor="t" lIns="45720" rIns="45720">
+            <a:spAutoFit/>
+          </a:bodyPr>
+          <a:lstStyle/>
+          <a:p>
+            <a:pPr>
+              <a:spcAft>
+                <a:spcPts val="800"/>
+              </a:spcAft>
+            </a:pPr>
+            <a:r>
+              <a:rPr sz="1400">
+                <a:solidFill>
+                  <a:srgbClr val="0B0B0B"/>
+                </a:solidFill>
+                <a:latin typeface="Calibri"/>
+              </a:rPr>
+              <a:t>•  Irregularity = CV (std ÷ mean of headways) per day and stop; 3,382 day × stop cells</a:t>
+            </a:r>
+          </a:p>
+          <a:p>
+            <a:pPr>
+              <a:spcAft>
+                <a:spcPts val="800"/>
+              </a:spcAft>
+            </a:pPr>
+            <a:r>
+              <a:rPr sz="1400">
+                <a:solidFill>
+                  <a:srgbClr val="0B0B0B"/>
+                </a:solidFill>
+                <a:latin typeface="Calibri"/>
+              </a:rPr>
+              <a:t>•  Mean CV rises from </a:t>
+            </a:r>
+            <a:r>
+              <a:rPr sz="1400" b="1">
+                <a:solidFill>
+                  <a:srgbClr val="0B0B0B"/>
+                </a:solidFill>
+                <a:latin typeface="Calibri"/>
+              </a:rPr>
+              <a:t>0.39 at stop 2 to 0.58 at stop 28 (+51%)</a:t>
+            </a:r>
+            <a:r>
+              <a:rPr sz="1400">
+                <a:solidFill>
+                  <a:srgbClr val="0B0B0B"/>
+                </a:solidFill>
+                <a:latin typeface="Calibri"/>
+              </a:rPr>
+              <a:t>, peak 0.62 at stop 27</a:t>
+            </a:r>
+          </a:p>
+          <a:p>
+            <a:pPr>
+              <a:spcAft>
+                <a:spcPts val="800"/>
+              </a:spcAft>
+            </a:pPr>
+            <a:r>
+              <a:rPr sz="1400">
+                <a:solidFill>
+                  <a:srgbClr val="0B0B0B"/>
+                </a:solidFill>
+                <a:latin typeface="Calibri"/>
+              </a:rPr>
+              <a:t>•  </a:t>
+            </a:r>
+            <a:r>
+              <a:rPr sz="1400" b="1">
+                <a:solidFill>
+                  <a:srgbClr val="0B0B0B"/>
+                </a:solidFill>
+                <a:latin typeface="Calibri"/>
+              </a:rPr>
+              <a:t>Spearman:</a:t>
+            </a:r>
+            <a:r>
+              <a:rPr sz="1400">
+                <a:solidFill>
+                  <a:srgbClr val="0B0B0B"/>
+                </a:solidFill>
+                <a:latin typeface="Calibri"/>
+              </a:rPr>
+              <a:t> rho = </a:t>
+            </a:r>
+            <a:r>
+              <a:rPr sz="1400" b="1">
+                <a:solidFill>
+                  <a:srgbClr val="0B0B0B"/>
+                </a:solidFill>
+                <a:latin typeface="Calibri"/>
+              </a:rPr>
+              <a:t>0.955</a:t>
+            </a:r>
+            <a:r>
+              <a:rPr sz="1400">
+                <a:solidFill>
+                  <a:srgbClr val="0B0B0B"/>
+                </a:solidFill>
+                <a:latin typeface="Calibri"/>
+              </a:rPr>
+              <a:t>, p &lt; 0.001 (n = 27 stops) → </a:t>
+            </a:r>
+            <a:r>
+              <a:rPr sz="1400" b="1">
+                <a:solidFill>
+                  <a:srgbClr val="0B0B0B"/>
+                </a:solidFill>
+                <a:latin typeface="Calibri"/>
+              </a:rPr>
+              <a:t>reject H₀</a:t>
+            </a:r>
+          </a:p>
+          <a:p>
+            <a:pPr>
+              <a:spcAft>
+                <a:spcPts val="800"/>
+              </a:spcAft>
+            </a:pPr>
+            <a:r>
+              <a:rPr sz="1400">
+                <a:solidFill>
+                  <a:srgbClr val="0B0B0B"/>
+                </a:solidFill>
+                <a:latin typeface="Calibri"/>
+              </a:rPr>
+              <a:t>•  The 25th–75th band widens too: bad days get worse further down the line</a:t>
+            </a:r>
+          </a:p>
+        </p:txBody>
+      </p:sp>
+    </p:spTree>
+  </p:cSld>
+  <p:clrMapOvr>
+    <a:masterClrMapping/>
+  </p:clrMapOvr>
+</p:sld>
+</file>
+
+<file path=ppt/slides/slide13.xml><?xml version="1.0" encoding="utf-8"?>
+<p:sld xmlns:a="http://schemas.openxmlformats.org/drawingml/2006/main" xmlns:p="http://schemas.openxmlformats.org/presentationml/2006/main" xmlns:r="http://schemas.openxmlformats.org/officeDocument/2006/relationships">
+  <p:cSld>
+    <p:spTree>
+      <p:nvGrpSpPr>
+        <p:cNvPr id="1" name=""/>
+        <p:cNvGrpSpPr/>
+        <p:nvPr/>
+      </p:nvGrpSpPr>
+      <p:grpSpPr/>
+      <p:sp>
+        <p:nvSpPr>
+          <p:cNvPr id="2" name="Rectangle 1"/>
+          <p:cNvSpPr/>
+          <p:nvPr/>
+        </p:nvSpPr>
+        <p:spPr>
+          <a:xfrm>
+            <a:off x="0" y="0"/>
+            <a:ext cx="12191695" cy="109728"/>
+          </a:xfrm>
+          <a:prstGeom prst="rect">
+            <a:avLst/>
+          </a:prstGeom>
+          <a:solidFill>
+            <a:srgbClr val="2A78D6"/>
+          </a:solidFill>
+          <a:ln>
+            <a:noFill/>
+          </a:ln>
+        </p:spPr>
+        <p:style>
+          <a:lnRef idx="1">
+            <a:schemeClr val="accent1"/>
+          </a:lnRef>
+          <a:fillRef idx="3">
+            <a:schemeClr val="accent1"/>
+          </a:fillRef>
+          <a:effectRef idx="2">
+            <a:schemeClr val="accent1"/>
+          </a:effectRef>
+          <a:fontRef idx="minor">
+            <a:schemeClr val="lt1"/>
+          </a:fontRef>
+        </p:style>
+        <p:txBody>
+          <a:bodyPr rtlCol="0" anchor="ctr"/>
+          <a:lstStyle/>
+          <a:p>
+            <a:pPr algn="ctr"/>
+          </a:p>
+        </p:txBody>
+      </p:sp>
+      <p:sp>
+        <p:nvSpPr>
+          <p:cNvPr id="3" name="TextBox 2"/>
+          <p:cNvSpPr txBox="1"/>
+          <p:nvPr/>
+        </p:nvSpPr>
+        <p:spPr>
+          <a:xfrm>
+            <a:off x="548640" y="292608"/>
+            <a:ext cx="11094415" cy="320040"/>
+          </a:xfrm>
+          <a:prstGeom prst="rect">
+            <a:avLst/>
+          </a:prstGeom>
+          <a:noFill/>
+        </p:spPr>
+        <p:txBody>
+          <a:bodyPr wrap="square" anchor="t" lIns="45720" rIns="45720">
+            <a:spAutoFit/>
+          </a:bodyPr>
+          <a:lstStyle/>
+          <a:p>
+            <a:r>
+              <a:rPr sz="1200" b="1">
+                <a:solidFill>
+                  <a:srgbClr val="2A78D6"/>
+                </a:solidFill>
+                <a:latin typeface="Calibri"/>
+              </a:rPr>
+              <a:t>RESULTS AND DISCUSSION</a:t>
+            </a:r>
+          </a:p>
+        </p:txBody>
+      </p:sp>
+      <p:sp>
+        <p:nvSpPr>
+          <p:cNvPr id="4" name="TextBox 3"/>
+          <p:cNvSpPr txBox="1"/>
+          <p:nvPr/>
+        </p:nvSpPr>
+        <p:spPr>
+          <a:xfrm>
+            <a:off x="548640" y="566928"/>
+            <a:ext cx="11094415" cy="731520"/>
+          </a:xfrm>
+          <a:prstGeom prst="rect">
+            <a:avLst/>
+          </a:prstGeom>
+          <a:noFill/>
+        </p:spPr>
+        <p:txBody>
+          <a:bodyPr wrap="square" anchor="t" lIns="45720" rIns="45720">
+            <a:spAutoFit/>
+          </a:bodyPr>
+          <a:lstStyle/>
+          <a:p>
+            <a:r>
+              <a:rPr sz="2800" b="1">
+                <a:solidFill>
+                  <a:srgbClr val="0B0B0B"/>
+                </a:solidFill>
+                <a:latin typeface="Calibri"/>
+              </a:rPr>
+              <a:t>Discussion: one self-reinforcing cycle</a:t>
+            </a:r>
+          </a:p>
+        </p:txBody>
+      </p:sp>
+      <p:sp>
+        <p:nvSpPr>
+          <p:cNvPr id="5" name="TextBox 4"/>
+          <p:cNvSpPr txBox="1"/>
+          <p:nvPr/>
+        </p:nvSpPr>
+        <p:spPr>
+          <a:xfrm>
+            <a:off x="548640" y="6446520"/>
+            <a:ext cx="11094415" cy="274320"/>
+          </a:xfrm>
+          <a:prstGeom prst="rect">
+            <a:avLst/>
+          </a:prstGeom>
+          <a:noFill/>
+        </p:spPr>
+        <p:txBody>
+          <a:bodyPr wrap="square" anchor="t" lIns="45720" rIns="45720">
+            <a:spAutoFit/>
+          </a:bodyPr>
+          <a:lstStyle/>
+          <a:p>
+            <a:r>
+              <a:rPr sz="1000">
+                <a:solidFill>
+                  <a:srgbClr val="52514E"/>
+                </a:solidFill>
+                <a:latin typeface="Calibri"/>
+              </a:rPr>
+              <a:t>ELE IDSA Project 1 · GEC2B</a:t>
+            </a:r>
+          </a:p>
+        </p:txBody>
+      </p:sp>
+      <p:sp>
+        <p:nvSpPr>
+          <p:cNvPr id="6" name="TextBox 5"/>
+          <p:cNvSpPr txBox="1"/>
+          <p:nvPr/>
+        </p:nvSpPr>
+        <p:spPr>
+          <a:xfrm>
+            <a:off x="10728655" y="6446520"/>
+            <a:ext cx="914400" cy="274320"/>
+          </a:xfrm>
+          <a:prstGeom prst="rect">
+            <a:avLst/>
+          </a:prstGeom>
+          <a:noFill/>
+        </p:spPr>
+        <p:txBody>
+          <a:bodyPr wrap="square" anchor="t" lIns="45720" rIns="45720">
+            <a:spAutoFit/>
+          </a:bodyPr>
+          <a:lstStyle/>
+          <a:p>
+            <a:pPr algn="r"/>
+            <a:r>
+              <a:rPr sz="1000">
+                <a:solidFill>
+                  <a:srgbClr val="52514E"/>
+                </a:solidFill>
+                <a:latin typeface="Calibri"/>
+              </a:rPr>
+              <a:t>13</a:t>
+            </a:r>
+          </a:p>
+        </p:txBody>
+      </p:sp>
+      <p:sp>
+        <p:nvSpPr>
+          <p:cNvPr id="7" name="TextBox 6"/>
+          <p:cNvSpPr txBox="1"/>
+          <p:nvPr/>
+        </p:nvSpPr>
+        <p:spPr>
+          <a:xfrm>
+            <a:off x="548640" y="1508760"/>
+            <a:ext cx="11094415" cy="4663440"/>
+          </a:xfrm>
+          <a:prstGeom prst="rect">
+            <a:avLst/>
+          </a:prstGeom>
+          <a:noFill/>
+        </p:spPr>
+        <p:txBody>
+          <a:bodyPr wrap="square" anchor="t" lIns="45720" rIns="45720">
+            <a:spAutoFit/>
+          </a:bodyPr>
+          <a:lstStyle/>
+          <a:p>
+            <a:pPr>
+              <a:spcAft>
+                <a:spcPts val="800"/>
+              </a:spcAft>
+            </a:pPr>
+            <a:r>
               <a:rPr sz="2000">
                 <a:solidFill>
                   <a:srgbClr val="0B0B0B"/>
                 </a:solidFill>
                 <a:latin typeface="Calibri"/>
               </a:rPr>
-              <a:t>•  [Section pending: Khalil]</a:t>
+              <a:t>•  </a:t>
+            </a:r>
+            <a:r>
+              <a:rPr sz="2000" b="1">
+                <a:solidFill>
+                  <a:srgbClr val="0B0B0B"/>
+                </a:solidFill>
+                <a:latin typeface="Calibri"/>
+              </a:rPr>
+              <a:t>H2 → H1:</a:t>
+            </a:r>
+            <a:r>
+              <a:rPr sz="2000">
+                <a:solidFill>
+                  <a:srgbClr val="0B0B0B"/>
+                </a:solidFill>
+                <a:latin typeface="Calibri"/>
+              </a:rPr>
+              <a:t> more passengers → longer stops (+6.9 s each) → the bus falls behind</a:t>
+            </a:r>
+          </a:p>
+          <a:p>
+            <a:pPr>
+              <a:spcAft>
+                <a:spcPts val="800"/>
+              </a:spcAft>
+            </a:pPr>
+            <a:r>
+              <a:rPr sz="2000">
+                <a:solidFill>
+                  <a:srgbClr val="0B0B0B"/>
+                </a:solidFill>
+                <a:latin typeface="Calibri"/>
+              </a:rPr>
+              <a:t>•  </a:t>
+            </a:r>
+            <a:r>
+              <a:rPr sz="2000" b="1">
+                <a:solidFill>
+                  <a:srgbClr val="0B0B0B"/>
+                </a:solidFill>
+                <a:latin typeface="Calibri"/>
+              </a:rPr>
+              <a:t>H1 → H2:</a:t>
+            </a:r>
+            <a:r>
+              <a:rPr sz="2000">
+                <a:solidFill>
+                  <a:srgbClr val="0B0B0B"/>
+                </a:solidFill>
+                <a:latin typeface="Calibri"/>
+              </a:rPr>
+              <a:t> a bigger gap → more passengers waiting (9.1 → 17.9) → longer stops again</a:t>
+            </a:r>
+          </a:p>
+          <a:p>
+            <a:pPr>
+              <a:spcAft>
+                <a:spcPts val="800"/>
+              </a:spcAft>
+            </a:pPr>
+            <a:r>
+              <a:rPr sz="2000">
+                <a:solidFill>
+                  <a:srgbClr val="0B0B0B"/>
+                </a:solidFill>
+                <a:latin typeface="Calibri"/>
+              </a:rPr>
+              <a:t>•  </a:t>
+            </a:r>
+            <a:r>
+              <a:rPr sz="2000" b="1">
+                <a:solidFill>
+                  <a:srgbClr val="0B0B0B"/>
+                </a:solidFill>
+                <a:latin typeface="Calibri"/>
+              </a:rPr>
+              <a:t>→ H3:</a:t>
+            </a:r>
+            <a:r>
+              <a:rPr sz="2000">
+                <a:solidFill>
+                  <a:srgbClr val="0B0B0B"/>
+                </a:solidFill>
+                <a:latin typeface="Calibri"/>
+              </a:rPr>
+              <a:t> each turn amplifies the last, so spacing gets more uneven downstream (CV 0.39 → 0.58)</a:t>
+            </a:r>
+          </a:p>
+          <a:p>
+            <a:pPr>
+              <a:spcAft>
+                <a:spcPts val="800"/>
+              </a:spcAft>
+            </a:pPr>
+            <a:r>
+              <a:rPr sz="2000">
+                <a:solidFill>
+                  <a:srgbClr val="0B0B0B"/>
+                </a:solidFill>
+                <a:latin typeface="Calibri"/>
+              </a:rPr>
+              <a:t>•  Meanwhile the bus behind finds empty stops and catches up — </a:t>
+            </a:r>
+            <a:r>
+              <a:rPr sz="2000" b="1">
+                <a:solidFill>
+                  <a:srgbClr val="0B0B0B"/>
+                </a:solidFill>
+                <a:latin typeface="Calibri"/>
+              </a:rPr>
+              <a:t>that is bunching</a:t>
+            </a:r>
+          </a:p>
+        </p:txBody>
+      </p:sp>
+    </p:spTree>
+  </p:cSld>
+  <p:clrMapOvr>
+    <a:masterClrMapping/>
+  </p:clrMapOvr>
+</p:sld>
+</file>
+
+<file path=ppt/slides/slide14.xml><?xml version="1.0" encoding="utf-8"?>
+<p:sld xmlns:a="http://schemas.openxmlformats.org/drawingml/2006/main" xmlns:p="http://schemas.openxmlformats.org/presentationml/2006/main" xmlns:r="http://schemas.openxmlformats.org/officeDocument/2006/relationships">
+  <p:cSld>
+    <p:spTree>
+      <p:nvGrpSpPr>
+        <p:cNvPr id="1" name=""/>
+        <p:cNvGrpSpPr/>
+        <p:nvPr/>
+      </p:nvGrpSpPr>
+      <p:grpSpPr/>
+      <p:sp>
+        <p:nvSpPr>
+          <p:cNvPr id="2" name="Rectangle 1"/>
+          <p:cNvSpPr/>
+          <p:nvPr/>
+        </p:nvSpPr>
+        <p:spPr>
+          <a:xfrm>
+            <a:off x="0" y="0"/>
+            <a:ext cx="12191695" cy="109728"/>
+          </a:xfrm>
+          <a:prstGeom prst="rect">
+            <a:avLst/>
+          </a:prstGeom>
+          <a:solidFill>
+            <a:srgbClr val="2A78D6"/>
+          </a:solidFill>
+          <a:ln>
+            <a:noFill/>
+          </a:ln>
+        </p:spPr>
+        <p:style>
+          <a:lnRef idx="1">
+            <a:schemeClr val="accent1"/>
+          </a:lnRef>
+          <a:fillRef idx="3">
+            <a:schemeClr val="accent1"/>
+          </a:fillRef>
+          <a:effectRef idx="2">
+            <a:schemeClr val="accent1"/>
+          </a:effectRef>
+          <a:fontRef idx="minor">
+            <a:schemeClr val="lt1"/>
+          </a:fontRef>
+        </p:style>
+        <p:txBody>
+          <a:bodyPr rtlCol="0" anchor="ctr"/>
+          <a:lstStyle/>
+          <a:p>
+            <a:pPr algn="ctr"/>
+          </a:p>
+        </p:txBody>
+      </p:sp>
+      <p:sp>
+        <p:nvSpPr>
+          <p:cNvPr id="3" name="TextBox 2"/>
+          <p:cNvSpPr txBox="1"/>
+          <p:nvPr/>
+        </p:nvSpPr>
+        <p:spPr>
+          <a:xfrm>
+            <a:off x="548640" y="292608"/>
+            <a:ext cx="11094415" cy="320040"/>
+          </a:xfrm>
+          <a:prstGeom prst="rect">
+            <a:avLst/>
+          </a:prstGeom>
+          <a:noFill/>
+        </p:spPr>
+        <p:txBody>
+          <a:bodyPr wrap="square" anchor="t" lIns="45720" rIns="45720">
+            <a:spAutoFit/>
+          </a:bodyPr>
+          <a:lstStyle/>
+          <a:p>
+            <a:r>
+              <a:rPr sz="1200" b="1">
+                <a:solidFill>
+                  <a:srgbClr val="2A78D6"/>
+                </a:solidFill>
+                <a:latin typeface="Calibri"/>
+              </a:rPr>
+              <a:t>RESULTS AND DISCUSSION</a:t>
+            </a:r>
+          </a:p>
+        </p:txBody>
+      </p:sp>
+      <p:sp>
+        <p:nvSpPr>
+          <p:cNvPr id="4" name="TextBox 3"/>
+          <p:cNvSpPr txBox="1"/>
+          <p:nvPr/>
+        </p:nvSpPr>
+        <p:spPr>
+          <a:xfrm>
+            <a:off x="548640" y="566928"/>
+            <a:ext cx="11094415" cy="731520"/>
+          </a:xfrm>
+          <a:prstGeom prst="rect">
+            <a:avLst/>
+          </a:prstGeom>
+          <a:noFill/>
+        </p:spPr>
+        <p:txBody>
+          <a:bodyPr wrap="square" anchor="t" lIns="45720" rIns="45720">
+            <a:spAutoFit/>
+          </a:bodyPr>
+          <a:lstStyle/>
+          <a:p>
+            <a:r>
+              <a:rPr sz="2800" b="1">
+                <a:solidFill>
+                  <a:srgbClr val="0B0B0B"/>
+                </a:solidFill>
+                <a:latin typeface="Calibri"/>
+              </a:rPr>
+              <a:t>Limitations</a:t>
+            </a:r>
+          </a:p>
+        </p:txBody>
+      </p:sp>
+      <p:sp>
+        <p:nvSpPr>
+          <p:cNvPr id="5" name="TextBox 4"/>
+          <p:cNvSpPr txBox="1"/>
+          <p:nvPr/>
+        </p:nvSpPr>
+        <p:spPr>
+          <a:xfrm>
+            <a:off x="548640" y="6446520"/>
+            <a:ext cx="11094415" cy="274320"/>
+          </a:xfrm>
+          <a:prstGeom prst="rect">
+            <a:avLst/>
+          </a:prstGeom>
+          <a:noFill/>
+        </p:spPr>
+        <p:txBody>
+          <a:bodyPr wrap="square" anchor="t" lIns="45720" rIns="45720">
+            <a:spAutoFit/>
+          </a:bodyPr>
+          <a:lstStyle/>
+          <a:p>
+            <a:r>
+              <a:rPr sz="1000">
+                <a:solidFill>
+                  <a:srgbClr val="52514E"/>
+                </a:solidFill>
+                <a:latin typeface="Calibri"/>
+              </a:rPr>
+              <a:t>ELE IDSA Project 1 · GEC2B</a:t>
+            </a:r>
+          </a:p>
+        </p:txBody>
+      </p:sp>
+      <p:sp>
+        <p:nvSpPr>
+          <p:cNvPr id="6" name="TextBox 5"/>
+          <p:cNvSpPr txBox="1"/>
+          <p:nvPr/>
+        </p:nvSpPr>
+        <p:spPr>
+          <a:xfrm>
+            <a:off x="10728655" y="6446520"/>
+            <a:ext cx="914400" cy="274320"/>
+          </a:xfrm>
+          <a:prstGeom prst="rect">
+            <a:avLst/>
+          </a:prstGeom>
+          <a:noFill/>
+        </p:spPr>
+        <p:txBody>
+          <a:bodyPr wrap="square" anchor="t" lIns="45720" rIns="45720">
+            <a:spAutoFit/>
+          </a:bodyPr>
+          <a:lstStyle/>
+          <a:p>
+            <a:pPr algn="r"/>
+            <a:r>
+              <a:rPr sz="1000">
+                <a:solidFill>
+                  <a:srgbClr val="52514E"/>
+                </a:solidFill>
+                <a:latin typeface="Calibri"/>
+              </a:rPr>
+              <a:t>14</a:t>
+            </a:r>
+          </a:p>
+        </p:txBody>
+      </p:sp>
+      <p:sp>
+        <p:nvSpPr>
+          <p:cNvPr id="7" name="TextBox 6"/>
+          <p:cNvSpPr txBox="1"/>
+          <p:nvPr/>
+        </p:nvSpPr>
+        <p:spPr>
+          <a:xfrm>
+            <a:off x="548640" y="1508760"/>
+            <a:ext cx="11094415" cy="4663440"/>
+          </a:xfrm>
+          <a:prstGeom prst="rect">
+            <a:avLst/>
+          </a:prstGeom>
+          <a:noFill/>
+        </p:spPr>
+        <p:txBody>
+          <a:bodyPr wrap="square" anchor="t" lIns="45720" rIns="45720">
+            <a:spAutoFit/>
+          </a:bodyPr>
+          <a:lstStyle/>
+          <a:p>
+            <a:pPr>
+              <a:spcAft>
+                <a:spcPts val="800"/>
+              </a:spcAft>
+            </a:pPr>
+            <a:r>
+              <a:rPr sz="2000">
+                <a:solidFill>
+                  <a:srgbClr val="0B0B0B"/>
+                </a:solidFill>
+                <a:latin typeface="Calibri"/>
+              </a:rPr>
+              <a:t>•  </a:t>
+            </a:r>
+            <a:r>
+              <a:rPr sz="2000" b="1">
+                <a:solidFill>
+                  <a:srgbClr val="0B0B0B"/>
+                </a:solidFill>
+                <a:latin typeface="Calibri"/>
+              </a:rPr>
+              <a:t>Association, not proof of cause</a:t>
+            </a:r>
+          </a:p>
+          <a:p>
+            <a:pPr>
+              <a:spcAft>
+                <a:spcPts val="800"/>
+              </a:spcAft>
+            </a:pPr>
+            <a:r>
+              <a:rPr sz="2000">
+                <a:solidFill>
+                  <a:srgbClr val="0B0B0B"/>
+                </a:solidFill>
+                <a:latin typeface="Calibri"/>
+              </a:rPr>
+              <a:t>•  </a:t>
+            </a:r>
+            <a:r>
+              <a:rPr sz="2000" b="1">
+                <a:solidFill>
+                  <a:srgbClr val="0B0B0B"/>
+                </a:solidFill>
+                <a:latin typeface="Calibri"/>
+              </a:rPr>
+              <a:t>One route, one direction:</a:t>
+            </a:r>
+            <a:r>
+              <a:rPr sz="2000">
+                <a:solidFill>
+                  <a:srgbClr val="0B0B0B"/>
+                </a:solidFill>
+                <a:latin typeface="Calibri"/>
+              </a:rPr>
+              <a:t> 801 southbound, weekdays 7:00–17:59, Jul–Dec 2021</a:t>
+            </a:r>
+          </a:p>
+          <a:p>
+            <a:pPr>
+              <a:spcAft>
+                <a:spcPts val="800"/>
+              </a:spcAft>
+            </a:pPr>
+            <a:r>
+              <a:rPr sz="2000">
+                <a:solidFill>
+                  <a:srgbClr val="0B0B0B"/>
+                </a:solidFill>
+                <a:latin typeface="Calibri"/>
+              </a:rPr>
+              <a:t>•  </a:t>
+            </a:r>
+            <a:r>
+              <a:rPr sz="2000" b="1">
+                <a:solidFill>
+                  <a:srgbClr val="0B0B0B"/>
+                </a:solidFill>
+                <a:latin typeface="Calibri"/>
+              </a:rPr>
+              <a:t>APC counting errors:</a:t>
+            </a:r>
+            <a:r>
+              <a:rPr sz="2000">
+                <a:solidFill>
+                  <a:srgbClr val="0B0B0B"/>
+                </a:solidFill>
+                <a:latin typeface="Calibri"/>
+              </a:rPr>
+              <a:t> sensors miscount at crowded doors</a:t>
+            </a:r>
+          </a:p>
+          <a:p>
+            <a:pPr>
+              <a:spcAft>
+                <a:spcPts val="800"/>
+              </a:spcAft>
+            </a:pPr>
+            <a:r>
+              <a:rPr sz="2000">
+                <a:solidFill>
+                  <a:srgbClr val="0B0B0B"/>
+                </a:solidFill>
+                <a:latin typeface="Calibri"/>
+              </a:rPr>
+              <a:t>•  </a:t>
+            </a:r>
+            <a:r>
+              <a:rPr sz="2000" b="1">
+                <a:solidFill>
+                  <a:srgbClr val="0B0B0B"/>
+                </a:solidFill>
+                <a:latin typeface="Calibri"/>
+              </a:rPr>
+              <a:t>Missing trips:</a:t>
+            </a:r>
+            <a:r>
+              <a:rPr sz="2000">
+                <a:solidFill>
+                  <a:srgbClr val="0B0B0B"/>
+                </a:solidFill>
+                <a:latin typeface="Calibri"/>
+              </a:rPr>
+              <a:t> only headways between buses scheduled 10 min apart were kept (51,437)</a:t>
+            </a:r>
+          </a:p>
+        </p:txBody>
+      </p:sp>
+    </p:spTree>
+  </p:cSld>
+  <p:clrMapOvr>
+    <a:masterClrMapping/>
+  </p:clrMapOvr>
+</p:sld>
+</file>
+
+<file path=ppt/slides/slide15.xml><?xml version="1.0" encoding="utf-8"?>
+<p:sld xmlns:a="http://schemas.openxmlformats.org/drawingml/2006/main" xmlns:p="http://schemas.openxmlformats.org/presentationml/2006/main" xmlns:r="http://schemas.openxmlformats.org/officeDocument/2006/relationships">
+  <p:cSld>
+    <p:spTree>
+      <p:nvGrpSpPr>
+        <p:cNvPr id="1" name=""/>
+        <p:cNvGrpSpPr/>
+        <p:nvPr/>
+      </p:nvGrpSpPr>
+      <p:grpSpPr/>
+      <p:sp>
+        <p:nvSpPr>
+          <p:cNvPr id="2" name="Rectangle 1"/>
+          <p:cNvSpPr/>
+          <p:nvPr/>
+        </p:nvSpPr>
+        <p:spPr>
+          <a:xfrm>
+            <a:off x="0" y="0"/>
+            <a:ext cx="12191695" cy="109728"/>
+          </a:xfrm>
+          <a:prstGeom prst="rect">
+            <a:avLst/>
+          </a:prstGeom>
+          <a:solidFill>
+            <a:srgbClr val="2A78D6"/>
+          </a:solidFill>
+          <a:ln>
+            <a:noFill/>
+          </a:ln>
+        </p:spPr>
+        <p:style>
+          <a:lnRef idx="1">
+            <a:schemeClr val="accent1"/>
+          </a:lnRef>
+          <a:fillRef idx="3">
+            <a:schemeClr val="accent1"/>
+          </a:fillRef>
+          <a:effectRef idx="2">
+            <a:schemeClr val="accent1"/>
+          </a:effectRef>
+          <a:fontRef idx="minor">
+            <a:schemeClr val="lt1"/>
+          </a:fontRef>
+        </p:style>
+        <p:txBody>
+          <a:bodyPr rtlCol="0" anchor="ctr"/>
+          <a:lstStyle/>
+          <a:p>
+            <a:pPr algn="ctr"/>
+          </a:p>
+        </p:txBody>
+      </p:sp>
+      <p:sp>
+        <p:nvSpPr>
+          <p:cNvPr id="3" name="TextBox 2"/>
+          <p:cNvSpPr txBox="1"/>
+          <p:nvPr/>
+        </p:nvSpPr>
+        <p:spPr>
+          <a:xfrm>
+            <a:off x="548640" y="292608"/>
+            <a:ext cx="11094415" cy="320040"/>
+          </a:xfrm>
+          <a:prstGeom prst="rect">
+            <a:avLst/>
+          </a:prstGeom>
+          <a:noFill/>
+        </p:spPr>
+        <p:txBody>
+          <a:bodyPr wrap="square" anchor="t" lIns="45720" rIns="45720">
+            <a:spAutoFit/>
+          </a:bodyPr>
+          <a:lstStyle/>
+          <a:p>
+            <a:r>
+              <a:rPr sz="1200" b="1">
+                <a:solidFill>
+                  <a:srgbClr val="2A78D6"/>
+                </a:solidFill>
+                <a:latin typeface="Calibri"/>
+              </a:rPr>
+              <a:t>CONCLUSION</a:t>
+            </a:r>
+          </a:p>
+        </p:txBody>
+      </p:sp>
+      <p:sp>
+        <p:nvSpPr>
+          <p:cNvPr id="4" name="TextBox 3"/>
+          <p:cNvSpPr txBox="1"/>
+          <p:nvPr/>
+        </p:nvSpPr>
+        <p:spPr>
+          <a:xfrm>
+            <a:off x="548640" y="566928"/>
+            <a:ext cx="11094415" cy="731520"/>
+          </a:xfrm>
+          <a:prstGeom prst="rect">
+            <a:avLst/>
+          </a:prstGeom>
+          <a:noFill/>
+        </p:spPr>
+        <p:txBody>
+          <a:bodyPr wrap="square" anchor="t" lIns="45720" rIns="45720">
+            <a:spAutoFit/>
+          </a:bodyPr>
+          <a:lstStyle/>
+          <a:p>
+            <a:r>
+              <a:rPr sz="2800" b="1">
+                <a:solidFill>
+                  <a:srgbClr val="0B0B0B"/>
+                </a:solidFill>
+                <a:latin typeface="Calibri"/>
+              </a:rPr>
+              <a:t>What we studied</a:t>
+            </a:r>
+          </a:p>
+        </p:txBody>
+      </p:sp>
+      <p:sp>
+        <p:nvSpPr>
+          <p:cNvPr id="5" name="TextBox 4"/>
+          <p:cNvSpPr txBox="1"/>
+          <p:nvPr/>
+        </p:nvSpPr>
+        <p:spPr>
+          <a:xfrm>
+            <a:off x="548640" y="6446520"/>
+            <a:ext cx="11094415" cy="274320"/>
+          </a:xfrm>
+          <a:prstGeom prst="rect">
+            <a:avLst/>
+          </a:prstGeom>
+          <a:noFill/>
+        </p:spPr>
+        <p:txBody>
+          <a:bodyPr wrap="square" anchor="t" lIns="45720" rIns="45720">
+            <a:spAutoFit/>
+          </a:bodyPr>
+          <a:lstStyle/>
+          <a:p>
+            <a:r>
+              <a:rPr sz="1000">
+                <a:solidFill>
+                  <a:srgbClr val="52514E"/>
+                </a:solidFill>
+                <a:latin typeface="Calibri"/>
+              </a:rPr>
+              <a:t>ELE IDSA Project 1 · GEC2B</a:t>
+            </a:r>
+          </a:p>
+        </p:txBody>
+      </p:sp>
+      <p:sp>
+        <p:nvSpPr>
+          <p:cNvPr id="6" name="TextBox 5"/>
+          <p:cNvSpPr txBox="1"/>
+          <p:nvPr/>
+        </p:nvSpPr>
+        <p:spPr>
+          <a:xfrm>
+            <a:off x="10728655" y="6446520"/>
+            <a:ext cx="914400" cy="274320"/>
+          </a:xfrm>
+          <a:prstGeom prst="rect">
+            <a:avLst/>
+          </a:prstGeom>
+          <a:noFill/>
+        </p:spPr>
+        <p:txBody>
+          <a:bodyPr wrap="square" anchor="t" lIns="45720" rIns="45720">
+            <a:spAutoFit/>
+          </a:bodyPr>
+          <a:lstStyle/>
+          <a:p>
+            <a:pPr algn="r"/>
+            <a:r>
+              <a:rPr sz="1000">
+                <a:solidFill>
+                  <a:srgbClr val="52514E"/>
+                </a:solidFill>
+                <a:latin typeface="Calibri"/>
+              </a:rPr>
+              <a:t>15</a:t>
+            </a:r>
+          </a:p>
+        </p:txBody>
+      </p:sp>
+      <p:sp>
+        <p:nvSpPr>
+          <p:cNvPr id="7" name="TextBox 6"/>
+          <p:cNvSpPr txBox="1"/>
+          <p:nvPr/>
+        </p:nvSpPr>
+        <p:spPr>
+          <a:xfrm>
+            <a:off x="548640" y="1508760"/>
+            <a:ext cx="11094415" cy="4663440"/>
+          </a:xfrm>
+          <a:prstGeom prst="rect">
+            <a:avLst/>
+          </a:prstGeom>
+          <a:noFill/>
+        </p:spPr>
+        <p:txBody>
+          <a:bodyPr wrap="square" anchor="t" lIns="45720" rIns="45720">
+            <a:spAutoFit/>
+          </a:bodyPr>
+          <a:lstStyle/>
+          <a:p>
+            <a:pPr>
+              <a:spcAft>
+                <a:spcPts val="800"/>
+              </a:spcAft>
+            </a:pPr>
+            <a:r>
+              <a:rPr sz="2000">
+                <a:solidFill>
+                  <a:srgbClr val="0B0B0B"/>
+                </a:solidFill>
+                <a:latin typeface="Calibri"/>
+              </a:rPr>
+              <a:t>•  </a:t>
+            </a:r>
+            <a:r>
+              <a:rPr sz="2000" b="1">
+                <a:solidFill>
+                  <a:srgbClr val="0B0B0B"/>
+                </a:solidFill>
+                <a:latin typeface="Calibri"/>
+              </a:rPr>
+              <a:t>Data:</a:t>
+            </a:r>
+            <a:r>
+              <a:rPr sz="2000">
+                <a:solidFill>
+                  <a:srgbClr val="0B0B0B"/>
+                </a:solidFill>
+                <a:latin typeface="Calibri"/>
+              </a:rPr>
+              <a:t> CapMetro APC records, Route 801 Rapid southbound, Jul 1 – Dec 30 2021 — </a:t>
+            </a:r>
+            <a:r>
+              <a:rPr sz="2000" b="1">
+                <a:solidFill>
+                  <a:srgbClr val="0B0B0B"/>
+                </a:solidFill>
+                <a:latin typeface="Calibri"/>
+              </a:rPr>
+              <a:t>229,421 stop events</a:t>
+            </a:r>
+            <a:r>
+              <a:rPr sz="2000">
+                <a:solidFill>
+                  <a:srgbClr val="0B0B0B"/>
+                </a:solidFill>
+                <a:latin typeface="Calibri"/>
+              </a:rPr>
+              <a:t>, 29 stops, from 9.2 million raw rows</a:t>
+            </a:r>
+          </a:p>
+          <a:p>
+            <a:pPr>
+              <a:spcAft>
+                <a:spcPts val="800"/>
+              </a:spcAft>
+            </a:pPr>
+            <a:r>
+              <a:rPr sz="2000">
+                <a:solidFill>
+                  <a:srgbClr val="0B0B0B"/>
+                </a:solidFill>
+                <a:latin typeface="Calibri"/>
+              </a:rPr>
+              <a:t>•  </a:t>
+            </a:r>
+            <a:r>
+              <a:rPr sz="2000" b="1">
+                <a:solidFill>
+                  <a:srgbClr val="0B0B0B"/>
+                </a:solidFill>
+                <a:latin typeface="Calibri"/>
+              </a:rPr>
+              <a:t>Window:</a:t>
+            </a:r>
+            <a:r>
+              <a:rPr sz="2000">
+                <a:solidFill>
+                  <a:srgbClr val="0B0B0B"/>
+                </a:solidFill>
+                <a:latin typeface="Calibri"/>
+              </a:rPr>
+              <a:t> weekdays 7:00–17:59, when buses run every 10 min (126,070 events, 131 days)</a:t>
+            </a:r>
+          </a:p>
+          <a:p>
+            <a:pPr>
+              <a:spcAft>
+                <a:spcPts val="800"/>
+              </a:spcAft>
+            </a:pPr>
+            <a:r>
+              <a:rPr sz="2000">
+                <a:solidFill>
+                  <a:srgbClr val="0B0B0B"/>
+                </a:solidFill>
+                <a:latin typeface="Calibri"/>
+              </a:rPr>
+              <a:t>•  </a:t>
+            </a:r>
+            <a:r>
+              <a:rPr sz="2000" b="1">
+                <a:solidFill>
+                  <a:srgbClr val="0B0B0B"/>
+                </a:solidFill>
+                <a:latin typeface="Calibri"/>
+              </a:rPr>
+              <a:t>Cleaning:</a:t>
+            </a:r>
+            <a:r>
+              <a:rPr sz="2000">
+                <a:solidFill>
+                  <a:srgbClr val="0B0B0B"/>
+                </a:solidFill>
+                <a:latin typeface="Calibri"/>
+              </a:rPr>
+              <a:t> six filtering rules, end-stop layovers removed, impossible values imputed (&lt;0.2%), </a:t>
+            </a:r>
+            <a:r>
+              <a:rPr sz="2000" b="1">
+                <a:solidFill>
+                  <a:srgbClr val="0B0B0B"/>
+                </a:solidFill>
+                <a:latin typeface="Calibri"/>
+              </a:rPr>
+              <a:t>51,437 verified headways</a:t>
+            </a:r>
+          </a:p>
+          <a:p>
+            <a:pPr>
+              <a:spcAft>
+                <a:spcPts val="800"/>
+              </a:spcAft>
+            </a:pPr>
+            <a:r>
+              <a:rPr sz="2000">
+                <a:solidFill>
+                  <a:srgbClr val="0B0B0B"/>
+                </a:solidFill>
+                <a:latin typeface="Calibri"/>
+              </a:rPr>
+              <a:t>•  </a:t>
+            </a:r>
+            <a:r>
+              <a:rPr sz="2000" b="1">
+                <a:solidFill>
+                  <a:srgbClr val="0B0B0B"/>
+                </a:solidFill>
+                <a:latin typeface="Calibri"/>
+              </a:rPr>
+              <a:t>Demand is concentrated:</a:t>
+            </a:r>
+            <a:r>
+              <a:rPr sz="2000">
+                <a:solidFill>
+                  <a:srgbClr val="0B0B0B"/>
+                </a:solidFill>
+                <a:latin typeface="Calibri"/>
+              </a:rPr>
+              <a:t> stop 1 ~429 boardings per weekday, stop 5 ~323 (morning), stop 19 ~201 (afternoon)</a:t>
+            </a:r>
+          </a:p>
+          <a:p>
+            <a:pPr>
+              <a:spcAft>
+                <a:spcPts val="800"/>
+              </a:spcAft>
+            </a:pPr>
+            <a:r>
+              <a:rPr sz="2000">
+                <a:solidFill>
+                  <a:srgbClr val="0B0B0B"/>
+                </a:solidFill>
+                <a:latin typeface="Calibri"/>
+              </a:rPr>
+              <a:t>•  </a:t>
+            </a:r>
+            <a:r>
+              <a:rPr sz="2000" i="1">
+                <a:solidFill>
+                  <a:srgbClr val="0B0B0B"/>
+                </a:solidFill>
+                <a:latin typeface="Calibri"/>
+              </a:rPr>
+              <a:t>[Ridership patterns: to be added from Elijah's section]</a:t>
+            </a:r>
+          </a:p>
+        </p:txBody>
+      </p:sp>
+    </p:spTree>
+  </p:cSld>
+  <p:clrMapOvr>
+    <a:masterClrMapping/>
+  </p:clrMapOvr>
+</p:sld>
+</file>
+
+<file path=ppt/slides/slide16.xml><?xml version="1.0" encoding="utf-8"?>
+<p:sld xmlns:a="http://schemas.openxmlformats.org/drawingml/2006/main" xmlns:p="http://schemas.openxmlformats.org/presentationml/2006/main" xmlns:r="http://schemas.openxmlformats.org/officeDocument/2006/relationships">
+  <p:cSld>
+    <p:spTree>
+      <p:nvGrpSpPr>
+        <p:cNvPr id="1" name=""/>
+        <p:cNvGrpSpPr/>
+        <p:nvPr/>
+      </p:nvGrpSpPr>
+      <p:grpSpPr/>
+      <p:sp>
+        <p:nvSpPr>
+          <p:cNvPr id="2" name="Rectangle 1"/>
+          <p:cNvSpPr/>
+          <p:nvPr/>
+        </p:nvSpPr>
+        <p:spPr>
+          <a:xfrm>
+            <a:off x="0" y="0"/>
+            <a:ext cx="12191695" cy="109728"/>
+          </a:xfrm>
+          <a:prstGeom prst="rect">
+            <a:avLst/>
+          </a:prstGeom>
+          <a:solidFill>
+            <a:srgbClr val="2A78D6"/>
+          </a:solidFill>
+          <a:ln>
+            <a:noFill/>
+          </a:ln>
+        </p:spPr>
+        <p:style>
+          <a:lnRef idx="1">
+            <a:schemeClr val="accent1"/>
+          </a:lnRef>
+          <a:fillRef idx="3">
+            <a:schemeClr val="accent1"/>
+          </a:fillRef>
+          <a:effectRef idx="2">
+            <a:schemeClr val="accent1"/>
+          </a:effectRef>
+          <a:fontRef idx="minor">
+            <a:schemeClr val="lt1"/>
+          </a:fontRef>
+        </p:style>
+        <p:txBody>
+          <a:bodyPr rtlCol="0" anchor="ctr"/>
+          <a:lstStyle/>
+          <a:p>
+            <a:pPr algn="ctr"/>
+          </a:p>
+        </p:txBody>
+      </p:sp>
+      <p:sp>
+        <p:nvSpPr>
+          <p:cNvPr id="3" name="TextBox 2"/>
+          <p:cNvSpPr txBox="1"/>
+          <p:nvPr/>
+        </p:nvSpPr>
+        <p:spPr>
+          <a:xfrm>
+            <a:off x="548640" y="292608"/>
+            <a:ext cx="11094415" cy="320040"/>
+          </a:xfrm>
+          <a:prstGeom prst="rect">
+            <a:avLst/>
+          </a:prstGeom>
+          <a:noFill/>
+        </p:spPr>
+        <p:txBody>
+          <a:bodyPr wrap="square" anchor="t" lIns="45720" rIns="45720">
+            <a:spAutoFit/>
+          </a:bodyPr>
+          <a:lstStyle/>
+          <a:p>
+            <a:r>
+              <a:rPr sz="1200" b="1">
+                <a:solidFill>
+                  <a:srgbClr val="2A78D6"/>
+                </a:solidFill>
+                <a:latin typeface="Calibri"/>
+              </a:rPr>
+              <a:t>CONCLUSION</a:t>
+            </a:r>
+          </a:p>
+        </p:txBody>
+      </p:sp>
+      <p:sp>
+        <p:nvSpPr>
+          <p:cNvPr id="4" name="TextBox 3"/>
+          <p:cNvSpPr txBox="1"/>
+          <p:nvPr/>
+        </p:nvSpPr>
+        <p:spPr>
+          <a:xfrm>
+            <a:off x="548640" y="566928"/>
+            <a:ext cx="11094415" cy="731520"/>
+          </a:xfrm>
+          <a:prstGeom prst="rect">
+            <a:avLst/>
+          </a:prstGeom>
+          <a:noFill/>
+        </p:spPr>
+        <p:txBody>
+          <a:bodyPr wrap="square" anchor="t" lIns="45720" rIns="45720">
+            <a:spAutoFit/>
+          </a:bodyPr>
+          <a:lstStyle/>
+          <a:p>
+            <a:r>
+              <a:rPr sz="2800" b="1">
+                <a:solidFill>
+                  <a:srgbClr val="0B0B0B"/>
+                </a:solidFill>
+                <a:latin typeface="Calibri"/>
+              </a:rPr>
+              <a:t>What we found</a:t>
+            </a:r>
+          </a:p>
+        </p:txBody>
+      </p:sp>
+      <p:sp>
+        <p:nvSpPr>
+          <p:cNvPr id="5" name="TextBox 4"/>
+          <p:cNvSpPr txBox="1"/>
+          <p:nvPr/>
+        </p:nvSpPr>
+        <p:spPr>
+          <a:xfrm>
+            <a:off x="548640" y="6446520"/>
+            <a:ext cx="11094415" cy="274320"/>
+          </a:xfrm>
+          <a:prstGeom prst="rect">
+            <a:avLst/>
+          </a:prstGeom>
+          <a:noFill/>
+        </p:spPr>
+        <p:txBody>
+          <a:bodyPr wrap="square" anchor="t" lIns="45720" rIns="45720">
+            <a:spAutoFit/>
+          </a:bodyPr>
+          <a:lstStyle/>
+          <a:p>
+            <a:r>
+              <a:rPr sz="1000">
+                <a:solidFill>
+                  <a:srgbClr val="52514E"/>
+                </a:solidFill>
+                <a:latin typeface="Calibri"/>
+              </a:rPr>
+              <a:t>ELE IDSA Project 1 · GEC2B</a:t>
+            </a:r>
+          </a:p>
+        </p:txBody>
+      </p:sp>
+      <p:sp>
+        <p:nvSpPr>
+          <p:cNvPr id="6" name="TextBox 5"/>
+          <p:cNvSpPr txBox="1"/>
+          <p:nvPr/>
+        </p:nvSpPr>
+        <p:spPr>
+          <a:xfrm>
+            <a:off x="10728655" y="6446520"/>
+            <a:ext cx="914400" cy="274320"/>
+          </a:xfrm>
+          <a:prstGeom prst="rect">
+            <a:avLst/>
+          </a:prstGeom>
+          <a:noFill/>
+        </p:spPr>
+        <p:txBody>
+          <a:bodyPr wrap="square" anchor="t" lIns="45720" rIns="45720">
+            <a:spAutoFit/>
+          </a:bodyPr>
+          <a:lstStyle/>
+          <a:p>
+            <a:pPr algn="r"/>
+            <a:r>
+              <a:rPr sz="1000">
+                <a:solidFill>
+                  <a:srgbClr val="52514E"/>
+                </a:solidFill>
+                <a:latin typeface="Calibri"/>
+              </a:rPr>
+              <a:t>16</a:t>
+            </a:r>
+          </a:p>
+        </p:txBody>
+      </p:sp>
+      <p:sp>
+        <p:nvSpPr>
+          <p:cNvPr id="7" name="TextBox 6"/>
+          <p:cNvSpPr txBox="1"/>
+          <p:nvPr/>
+        </p:nvSpPr>
+        <p:spPr>
+          <a:xfrm>
+            <a:off x="548640" y="1508760"/>
+            <a:ext cx="11094415" cy="4663440"/>
+          </a:xfrm>
+          <a:prstGeom prst="rect">
+            <a:avLst/>
+          </a:prstGeom>
+          <a:noFill/>
+        </p:spPr>
+        <p:txBody>
+          <a:bodyPr wrap="square" anchor="t" lIns="45720" rIns="45720">
+            <a:spAutoFit/>
+          </a:bodyPr>
+          <a:lstStyle/>
+          <a:p>
+            <a:pPr>
+              <a:spcAft>
+                <a:spcPts val="800"/>
+              </a:spcAft>
+            </a:pPr>
+            <a:r>
+              <a:rPr sz="2000">
+                <a:solidFill>
+                  <a:srgbClr val="0B0B0B"/>
+                </a:solidFill>
+                <a:latin typeface="Calibri"/>
+              </a:rPr>
+              <a:t>•  </a:t>
+            </a:r>
+            <a:r>
+              <a:rPr sz="2000" b="1">
+                <a:solidFill>
+                  <a:srgbClr val="0B0B0B"/>
+                </a:solidFill>
+                <a:latin typeface="Calibri"/>
+              </a:rPr>
+              <a:t>H1 — demand follows the gap:</a:t>
+            </a:r>
+            <a:r>
+              <a:rPr sz="2000">
+                <a:solidFill>
+                  <a:srgbClr val="0B0B0B"/>
+                </a:solidFill>
+                <a:latin typeface="Calibri"/>
+              </a:rPr>
+              <a:t> mean load </a:t>
+            </a:r>
+            <a:r>
+              <a:rPr sz="2000" b="1">
+                <a:solidFill>
+                  <a:srgbClr val="0B0B0B"/>
+                </a:solidFill>
+                <a:latin typeface="Calibri"/>
+              </a:rPr>
+              <a:t>9.1 → 17.9 passengers</a:t>
+            </a:r>
+            <a:r>
+              <a:rPr sz="2000">
+                <a:solidFill>
+                  <a:srgbClr val="0B0B0B"/>
+                </a:solidFill>
+                <a:latin typeface="Calibri"/>
+              </a:rPr>
+              <a:t> as headway grows (rho = 0.349, p &lt; 0.001)</a:t>
+            </a:r>
+          </a:p>
+          <a:p>
+            <a:pPr>
+              <a:spcAft>
+                <a:spcPts val="800"/>
+              </a:spcAft>
+            </a:pPr>
+            <a:r>
+              <a:rPr sz="2000">
+                <a:solidFill>
+                  <a:srgbClr val="0B0B0B"/>
+                </a:solidFill>
+                <a:latin typeface="Calibri"/>
+              </a:rPr>
+              <a:t>•  </a:t>
+            </a:r>
+            <a:r>
+              <a:rPr sz="2000" b="1">
+                <a:solidFill>
+                  <a:srgbClr val="0B0B0B"/>
+                </a:solidFill>
+                <a:latin typeface="Calibri"/>
+              </a:rPr>
+              <a:t>H2 — passengers cost time:</a:t>
+            </a:r>
+            <a:r>
+              <a:rPr sz="2000">
+                <a:solidFill>
+                  <a:srgbClr val="0B0B0B"/>
+                </a:solidFill>
+                <a:latin typeface="Calibri"/>
+              </a:rPr>
+              <a:t> </a:t>
+            </a:r>
+            <a:r>
+              <a:rPr sz="2000" b="1">
+                <a:solidFill>
+                  <a:srgbClr val="0B0B0B"/>
+                </a:solidFill>
+                <a:latin typeface="Calibri"/>
+              </a:rPr>
+              <a:t>+6.9 s per boarding</a:t>
+            </a:r>
+            <a:r>
+              <a:rPr sz="2000">
+                <a:solidFill>
+                  <a:srgbClr val="0B0B0B"/>
+                </a:solidFill>
+                <a:latin typeface="Calibri"/>
+              </a:rPr>
+              <a:t>, +3.7 s per alighting (n = 116,697, p &lt; 0.001)</a:t>
+            </a:r>
+          </a:p>
+          <a:p>
+            <a:pPr>
+              <a:spcAft>
+                <a:spcPts val="800"/>
+              </a:spcAft>
+            </a:pPr>
+            <a:r>
+              <a:rPr sz="2000">
+                <a:solidFill>
+                  <a:srgbClr val="0B0B0B"/>
+                </a:solidFill>
+                <a:latin typeface="Calibri"/>
+              </a:rPr>
+              <a:t>•  </a:t>
+            </a:r>
+            <a:r>
+              <a:rPr sz="2000" b="1">
+                <a:solidFill>
+                  <a:srgbClr val="0B0B0B"/>
+                </a:solidFill>
+                <a:latin typeface="Calibri"/>
+              </a:rPr>
+              <a:t>H3 — bunching builds up:</a:t>
+            </a:r>
+            <a:r>
+              <a:rPr sz="2000">
+                <a:solidFill>
+                  <a:srgbClr val="0B0B0B"/>
+                </a:solidFill>
+                <a:latin typeface="Calibri"/>
+              </a:rPr>
+              <a:t> headway irregularity </a:t>
+            </a:r>
+            <a:r>
+              <a:rPr sz="2000" b="1">
+                <a:solidFill>
+                  <a:srgbClr val="0B0B0B"/>
+                </a:solidFill>
+                <a:latin typeface="Calibri"/>
+              </a:rPr>
+              <a:t>CV 0.39 → 0.58</a:t>
+            </a:r>
+            <a:r>
+              <a:rPr sz="2000">
+                <a:solidFill>
+                  <a:srgbClr val="0B0B0B"/>
+                </a:solidFill>
+                <a:latin typeface="Calibri"/>
+              </a:rPr>
+              <a:t> along the route (rho = 0.955, p &lt; 0.001)</a:t>
+            </a:r>
+          </a:p>
+          <a:p>
+            <a:pPr>
+              <a:spcAft>
+                <a:spcPts val="800"/>
+              </a:spcAft>
+            </a:pPr>
+            <a:r>
+              <a:rPr sz="2000">
+                <a:solidFill>
+                  <a:srgbClr val="0B0B0B"/>
+                </a:solidFill>
+                <a:latin typeface="Calibri"/>
+              </a:rPr>
+              <a:t>•  </a:t>
+            </a:r>
+            <a:r>
+              <a:rPr sz="2000" b="1">
+                <a:solidFill>
+                  <a:srgbClr val="0B0B0B"/>
+                </a:solidFill>
+                <a:latin typeface="Calibri"/>
+              </a:rPr>
+              <a:t>All three hypotheses are supported</a:t>
+            </a:r>
+            <a:r>
+              <a:rPr sz="2000">
+                <a:solidFill>
+                  <a:srgbClr val="0B0B0B"/>
+                </a:solidFill>
+                <a:latin typeface="Calibri"/>
+              </a:rPr>
+              <a:t> at alpha = 0.05</a:t>
+            </a:r>
+          </a:p>
+        </p:txBody>
+      </p:sp>
+    </p:spTree>
+  </p:cSld>
+  <p:clrMapOvr>
+    <a:masterClrMapping/>
+  </p:clrMapOvr>
+</p:sld>
+</file>
+
+<file path=ppt/slides/slide17.xml><?xml version="1.0" encoding="utf-8"?>
+<p:sld xmlns:a="http://schemas.openxmlformats.org/drawingml/2006/main" xmlns:p="http://schemas.openxmlformats.org/presentationml/2006/main" xmlns:r="http://schemas.openxmlformats.org/officeDocument/2006/relationships">
+  <p:cSld>
+    <p:spTree>
+      <p:nvGrpSpPr>
+        <p:cNvPr id="1" name=""/>
+        <p:cNvGrpSpPr/>
+        <p:nvPr/>
+      </p:nvGrpSpPr>
+      <p:grpSpPr/>
+      <p:sp>
+        <p:nvSpPr>
+          <p:cNvPr id="2" name="Rectangle 1"/>
+          <p:cNvSpPr/>
+          <p:nvPr/>
+        </p:nvSpPr>
+        <p:spPr>
+          <a:xfrm>
+            <a:off x="0" y="0"/>
+            <a:ext cx="12191695" cy="109728"/>
+          </a:xfrm>
+          <a:prstGeom prst="rect">
+            <a:avLst/>
+          </a:prstGeom>
+          <a:solidFill>
+            <a:srgbClr val="2A78D6"/>
+          </a:solidFill>
+          <a:ln>
+            <a:noFill/>
+          </a:ln>
+        </p:spPr>
+        <p:style>
+          <a:lnRef idx="1">
+            <a:schemeClr val="accent1"/>
+          </a:lnRef>
+          <a:fillRef idx="3">
+            <a:schemeClr val="accent1"/>
+          </a:fillRef>
+          <a:effectRef idx="2">
+            <a:schemeClr val="accent1"/>
+          </a:effectRef>
+          <a:fontRef idx="minor">
+            <a:schemeClr val="lt1"/>
+          </a:fontRef>
+        </p:style>
+        <p:txBody>
+          <a:bodyPr rtlCol="0" anchor="ctr"/>
+          <a:lstStyle/>
+          <a:p>
+            <a:pPr algn="ctr"/>
+          </a:p>
+        </p:txBody>
+      </p:sp>
+      <p:sp>
+        <p:nvSpPr>
+          <p:cNvPr id="3" name="TextBox 2"/>
+          <p:cNvSpPr txBox="1"/>
+          <p:nvPr/>
+        </p:nvSpPr>
+        <p:spPr>
+          <a:xfrm>
+            <a:off x="548640" y="292608"/>
+            <a:ext cx="11094415" cy="320040"/>
+          </a:xfrm>
+          <a:prstGeom prst="rect">
+            <a:avLst/>
+          </a:prstGeom>
+          <a:noFill/>
+        </p:spPr>
+        <p:txBody>
+          <a:bodyPr wrap="square" anchor="t" lIns="45720" rIns="45720">
+            <a:spAutoFit/>
+          </a:bodyPr>
+          <a:lstStyle/>
+          <a:p>
+            <a:r>
+              <a:rPr sz="1200" b="1">
+                <a:solidFill>
+                  <a:srgbClr val="2A78D6"/>
+                </a:solidFill>
+                <a:latin typeface="Calibri"/>
+              </a:rPr>
+              <a:t>CONCLUSION</a:t>
+            </a:r>
+          </a:p>
+        </p:txBody>
+      </p:sp>
+      <p:sp>
+        <p:nvSpPr>
+          <p:cNvPr id="4" name="TextBox 3"/>
+          <p:cNvSpPr txBox="1"/>
+          <p:nvPr/>
+        </p:nvSpPr>
+        <p:spPr>
+          <a:xfrm>
+            <a:off x="548640" y="566928"/>
+            <a:ext cx="11094415" cy="731520"/>
+          </a:xfrm>
+          <a:prstGeom prst="rect">
+            <a:avLst/>
+          </a:prstGeom>
+          <a:noFill/>
+        </p:spPr>
+        <p:txBody>
+          <a:bodyPr wrap="square" anchor="t" lIns="45720" rIns="45720">
+            <a:spAutoFit/>
+          </a:bodyPr>
+          <a:lstStyle/>
+          <a:p>
+            <a:r>
+              <a:rPr sz="2800" b="1">
+                <a:solidFill>
+                  <a:srgbClr val="0B0B0B"/>
+                </a:solidFill>
+                <a:latin typeface="Calibri"/>
+              </a:rPr>
+              <a:t>Conclusion and recommendation</a:t>
+            </a:r>
+          </a:p>
+        </p:txBody>
+      </p:sp>
+      <p:sp>
+        <p:nvSpPr>
+          <p:cNvPr id="5" name="TextBox 4"/>
+          <p:cNvSpPr txBox="1"/>
+          <p:nvPr/>
+        </p:nvSpPr>
+        <p:spPr>
+          <a:xfrm>
+            <a:off x="548640" y="6446520"/>
+            <a:ext cx="11094415" cy="274320"/>
+          </a:xfrm>
+          <a:prstGeom prst="rect">
+            <a:avLst/>
+          </a:prstGeom>
+          <a:noFill/>
+        </p:spPr>
+        <p:txBody>
+          <a:bodyPr wrap="square" anchor="t" lIns="45720" rIns="45720">
+            <a:spAutoFit/>
+          </a:bodyPr>
+          <a:lstStyle/>
+          <a:p>
+            <a:r>
+              <a:rPr sz="1000">
+                <a:solidFill>
+                  <a:srgbClr val="52514E"/>
+                </a:solidFill>
+                <a:latin typeface="Calibri"/>
+              </a:rPr>
+              <a:t>ELE IDSA Project 1 · GEC2B</a:t>
+            </a:r>
+          </a:p>
+        </p:txBody>
+      </p:sp>
+      <p:sp>
+        <p:nvSpPr>
+          <p:cNvPr id="6" name="TextBox 5"/>
+          <p:cNvSpPr txBox="1"/>
+          <p:nvPr/>
+        </p:nvSpPr>
+        <p:spPr>
+          <a:xfrm>
+            <a:off x="10728655" y="6446520"/>
+            <a:ext cx="914400" cy="274320"/>
+          </a:xfrm>
+          <a:prstGeom prst="rect">
+            <a:avLst/>
+          </a:prstGeom>
+          <a:noFill/>
+        </p:spPr>
+        <p:txBody>
+          <a:bodyPr wrap="square" anchor="t" lIns="45720" rIns="45720">
+            <a:spAutoFit/>
+          </a:bodyPr>
+          <a:lstStyle/>
+          <a:p>
+            <a:pPr algn="r"/>
+            <a:r>
+              <a:rPr sz="1000">
+                <a:solidFill>
+                  <a:srgbClr val="52514E"/>
+                </a:solidFill>
+                <a:latin typeface="Calibri"/>
+              </a:rPr>
+              <a:t>17</a:t>
+            </a:r>
+          </a:p>
+        </p:txBody>
+      </p:sp>
+      <p:sp>
+        <p:nvSpPr>
+          <p:cNvPr id="7" name="TextBox 6"/>
+          <p:cNvSpPr txBox="1"/>
+          <p:nvPr/>
+        </p:nvSpPr>
+        <p:spPr>
+          <a:xfrm>
+            <a:off x="548640" y="1508760"/>
+            <a:ext cx="11094415" cy="4663440"/>
+          </a:xfrm>
+          <a:prstGeom prst="rect">
+            <a:avLst/>
+          </a:prstGeom>
+          <a:noFill/>
+        </p:spPr>
+        <p:txBody>
+          <a:bodyPr wrap="square" anchor="t" lIns="45720" rIns="45720">
+            <a:spAutoFit/>
+          </a:bodyPr>
+          <a:lstStyle/>
+          <a:p>
+            <a:pPr>
+              <a:spcAft>
+                <a:spcPts val="800"/>
+              </a:spcAft>
+            </a:pPr>
+            <a:r>
+              <a:rPr sz="2000">
+                <a:solidFill>
+                  <a:srgbClr val="0B0B0B"/>
+                </a:solidFill>
+                <a:latin typeface="Calibri"/>
+              </a:rPr>
+              <a:t>•  The three results close one loop: </a:t>
+            </a:r>
+            <a:r>
+              <a:rPr sz="2000" b="1">
+                <a:solidFill>
+                  <a:srgbClr val="0B0B0B"/>
+                </a:solidFill>
+                <a:latin typeface="Calibri"/>
+              </a:rPr>
+              <a:t>more passengers → longer stops → bigger gap → still more passengers</a:t>
+            </a:r>
+          </a:p>
+          <a:p>
+            <a:pPr>
+              <a:spcAft>
+                <a:spcPts val="800"/>
+              </a:spcAft>
+            </a:pPr>
+            <a:r>
+              <a:rPr sz="2000">
+                <a:solidFill>
+                  <a:srgbClr val="0B0B0B"/>
+                </a:solidFill>
+                <a:latin typeface="Calibri"/>
+              </a:rPr>
+              <a:t>•  Route 801 does not hold its 10-minute spacing, and the unevenness is </a:t>
+            </a:r>
+            <a:r>
+              <a:rPr sz="2000" b="1">
+                <a:solidFill>
+                  <a:srgbClr val="0B0B0B"/>
+                </a:solidFill>
+                <a:latin typeface="Calibri"/>
+              </a:rPr>
+              <a:t>worst at the end of the route</a:t>
+            </a:r>
+          </a:p>
+          <a:p>
+            <a:pPr>
+              <a:spcAft>
+                <a:spcPts val="800"/>
+              </a:spcAft>
+            </a:pPr>
+            <a:r>
+              <a:rPr sz="2000">
+                <a:solidFill>
+                  <a:srgbClr val="0B0B0B"/>
+                </a:solidFill>
+                <a:latin typeface="Calibri"/>
+              </a:rPr>
+              <a:t>•  The evidence is a strong association, </a:t>
+            </a:r>
+            <a:r>
+              <a:rPr sz="2000" b="1">
+                <a:solidFill>
+                  <a:srgbClr val="0B0B0B"/>
+                </a:solidFill>
+                <a:latin typeface="Calibri"/>
+              </a:rPr>
+              <a:t>not proof of cause</a:t>
+            </a:r>
+          </a:p>
+          <a:p>
+            <a:pPr>
+              <a:spcAft>
+                <a:spcPts val="800"/>
+              </a:spcAft>
+            </a:pPr>
+            <a:r>
+              <a:rPr sz="2000">
+                <a:solidFill>
+                  <a:srgbClr val="0B0B0B"/>
+                </a:solidFill>
+                <a:latin typeface="Calibri"/>
+              </a:rPr>
+              <a:t>•  </a:t>
+            </a:r>
+            <a:r>
+              <a:rPr sz="2000" b="1">
+                <a:solidFill>
+                  <a:srgbClr val="0B0B0B"/>
+                </a:solidFill>
+                <a:latin typeface="Calibri"/>
+              </a:rPr>
+              <a:t>Recommendation:</a:t>
+            </a:r>
+            <a:r>
+              <a:rPr sz="2000">
+                <a:solidFill>
+                  <a:srgbClr val="0B0B0B"/>
+                </a:solidFill>
+                <a:latin typeface="Calibri"/>
+              </a:rPr>
+              <a:t> break the loop early — </a:t>
+            </a:r>
+            <a:r>
+              <a:rPr sz="2000" b="1">
+                <a:solidFill>
+                  <a:srgbClr val="0B0B0B"/>
+                </a:solidFill>
+                <a:latin typeface="Calibri"/>
+              </a:rPr>
+              <a:t>holding control</a:t>
+            </a:r>
+            <a:r>
+              <a:rPr sz="2000">
+                <a:solidFill>
+                  <a:srgbClr val="0B0B0B"/>
+                </a:solidFill>
+                <a:latin typeface="Calibri"/>
+              </a:rPr>
+              <a:t> at a mid-route timing point, and </a:t>
+            </a:r>
+            <a:r>
+              <a:rPr sz="2000" b="1">
+                <a:solidFill>
+                  <a:srgbClr val="0B0B0B"/>
+                </a:solidFill>
+                <a:latin typeface="Calibri"/>
+              </a:rPr>
+              <a:t>faster boarding</a:t>
+            </a:r>
+            <a:r>
+              <a:rPr sz="2000">
+                <a:solidFill>
+                  <a:srgbClr val="0B0B0B"/>
+                </a:solidFill>
+                <a:latin typeface="Calibri"/>
+              </a:rPr>
+              <a:t> at stops 1, 5 and 19 (all-door boarding or off-board fare payment)</a:t>
             </a:r>
           </a:p>
         </p:txBody>
@@ -6939,7 +9908,25 @@
                 </a:solidFill>
                 <a:latin typeface="Calibri"/>
               </a:rPr>
-              <a:t>•  [Section pending: Khalil]</a:t>
+              <a:t>•  All tests: weekdays 7:00–17:59, 126,070 stop events, 131 service days, </a:t>
+            </a:r>
+            <a:r>
+              <a:rPr sz="2000" b="1">
+                <a:solidFill>
+                  <a:srgbClr val="0B0B0B"/>
+                </a:solidFill>
+                <a:latin typeface="Calibri"/>
+              </a:rPr>
+              <a:t>alpha = 0.05</a:t>
+            </a:r>
+            <a:r>
+              <a:rPr sz="2000">
+                <a:solidFill>
+                  <a:srgbClr val="0B0B0B"/>
+                </a:solidFill>
+                <a:latin typeface="Calibri"/>
+              </a:rPr>
+              <a:t>.</a:t>
             </a:r>
           </a:p>
         </p:txBody>

--- a/report/output/ELE_IDSA_Project1_Slides.pptx
+++ b/report/output/ELE_IDSA_Project1_Slides.pptx
@@ -22,6 +22,8 @@
     <p:sldId id="270" r:id="rId21"/>
     <p:sldId id="271" r:id="rId22"/>
     <p:sldId id="272" r:id="rId23"/>
+    <p:sldId id="273" r:id="rId24"/>
+    <p:sldId id="274" r:id="rId25"/>
   </p:sldIdLst>
   <p:sldSz cx="12191695" cy="6858000" type="screen4x3"/>
   <p:notesSz cx="6858000" cy="9144000"/>
@@ -3384,7 +3386,7 @@
                 </a:solidFill>
                 <a:latin typeface="Calibri"/>
               </a:rPr>
-              <a:t>H1: Passengers on board by headway group</a:t>
+              <a:t>Distribution of headways, weekdays 7:00–17:59</a:t>
             </a:r>
           </a:p>
         </p:txBody>
@@ -3460,7 +3462,7 @@
       </p:sp>
       <p:pic>
         <p:nvPicPr>
-          <p:cNvPr id="7" name="Picture 6" descr="fig06_h1_load_vs_headway.png"/>
+          <p:cNvPr id="7" name="Picture 6" descr="fig05_headway_distribution.png"/>
           <p:cNvPicPr>
             <a:picLocks noChangeAspect="1"/>
           </p:cNvPicPr>
@@ -3475,7 +3477,7 @@
         <p:spPr>
           <a:xfrm>
             <a:off x="548640" y="1463040"/>
-            <a:ext cx="6781838" cy="4526280"/>
+            <a:ext cx="7498079" cy="4159547"/>
           </a:xfrm>
           <a:prstGeom prst="rect">
             <a:avLst/>
@@ -3490,7 +3492,7 @@
         </p:nvSpPr>
         <p:spPr>
           <a:xfrm>
-            <a:off x="548640" y="6035040"/>
+            <a:off x="548640" y="5668307"/>
             <a:ext cx="7498079" cy="274320"/>
           </a:xfrm>
           <a:prstGeom prst="rect">
@@ -3511,7 +3513,7 @@
                 </a:solidFill>
                 <a:latin typeface="Calibri"/>
               </a:rPr>
-              <a:t>Figure 3. H1: Passengers on board by headway group</a:t>
+              <a:t>Figure 4. Distribution of headways, weekdays 7:00–17:59</a:t>
             </a:r>
           </a:p>
         </p:txBody>
@@ -3544,49 +3546,31 @@
               </a:spcAft>
             </a:pPr>
             <a:r>
-              <a:rPr sz="1400">
-                <a:solidFill>
-                  <a:srgbClr val="0B0B0B"/>
-                </a:solidFill>
-                <a:latin typeface="Calibri"/>
-              </a:rPr>
-              <a:t>•  Mean load doubles as the gap grows: </a:t>
-            </a:r>
-            <a:r>
-              <a:rPr sz="1400" b="1">
-                <a:solidFill>
-                  <a:srgbClr val="0B0B0B"/>
-                </a:solidFill>
-                <a:latin typeface="Calibri"/>
-              </a:rPr>
-              <a:t>9.1 passengers</a:t>
-            </a:r>
-            <a:r>
-              <a:rPr sz="1400">
-                <a:solidFill>
-                  <a:srgbClr val="0B0B0B"/>
-                </a:solidFill>
-                <a:latin typeface="Calibri"/>
-              </a:rPr>
-              <a:t> (0–5 min) → 11.0 → 13.4 → 15.8 → </a:t>
-            </a:r>
-            <a:r>
-              <a:rPr sz="1400" b="1">
-                <a:solidFill>
-                  <a:srgbClr val="0B0B0B"/>
-                </a:solidFill>
-                <a:latin typeface="Calibri"/>
-              </a:rPr>
-              <a:t>17.9</a:t>
-            </a:r>
-            <a:r>
-              <a:rPr sz="1400">
-                <a:solidFill>
-                  <a:srgbClr val="0B0B0B"/>
-                </a:solidFill>
-                <a:latin typeface="Calibri"/>
-              </a:rPr>
-              <a:t> (20+ min)</a:t>
+              <a:rPr sz="1600">
+                <a:solidFill>
+                  <a:srgbClr val="0B0B0B"/>
+                </a:solidFill>
+                <a:latin typeface="Calibri"/>
+              </a:rPr>
+              <a:t>•  Median headway </a:t>
+            </a:r>
+            <a:r>
+              <a:rPr sz="1600" b="1">
+                <a:solidFill>
+                  <a:srgbClr val="0B0B0B"/>
+                </a:solidFill>
+                <a:latin typeface="Calibri"/>
+              </a:rPr>
+              <a:t>11.0 min</a:t>
+            </a:r>
+            <a:r>
+              <a:rPr sz="1600">
+                <a:solidFill>
+                  <a:srgbClr val="0B0B0B"/>
+                </a:solidFill>
+                <a:latin typeface="Calibri"/>
+              </a:rPr>
+              <a:t> (scheduled 10)</a:t>
             </a:r>
           </a:p>
           <a:p>
@@ -3596,13 +3580,49 @@
               </a:spcAft>
             </a:pPr>
             <a:r>
-              <a:rPr sz="1400">
-                <a:solidFill>
-                  <a:srgbClr val="0B0B0B"/>
-                </a:solidFill>
-                <a:latin typeface="Calibri"/>
-              </a:rPr>
-              <a:t>•  Medians move the same way (8 → 17), so a few crowded buses are not driving it</a:t>
+              <a:rPr sz="1600">
+                <a:solidFill>
+                  <a:srgbClr val="0B0B0B"/>
+                </a:solidFill>
+                <a:latin typeface="Calibri"/>
+              </a:rPr>
+              <a:t>•  </a:t>
+            </a:r>
+            <a:r>
+              <a:rPr sz="1600" b="1">
+                <a:solidFill>
+                  <a:srgbClr val="0B0B0B"/>
+                </a:solidFill>
+                <a:latin typeface="Calibri"/>
+              </a:rPr>
+              <a:t>5.7%</a:t>
+            </a:r>
+            <a:r>
+              <a:rPr sz="1600">
+                <a:solidFill>
+                  <a:srgbClr val="0B0B0B"/>
+                </a:solidFill>
+                <a:latin typeface="Calibri"/>
+              </a:rPr>
+              <a:t> bunched (&lt;3 min), </a:t>
+            </a:r>
+            <a:r>
+              <a:rPr sz="1600" b="1">
+                <a:solidFill>
+                  <a:srgbClr val="0B0B0B"/>
+                </a:solidFill>
+                <a:latin typeface="Calibri"/>
+              </a:rPr>
+              <a:t>10.3%</a:t>
+            </a:r>
+            <a:r>
+              <a:rPr sz="1600">
+                <a:solidFill>
+                  <a:srgbClr val="0B0B0B"/>
+                </a:solidFill>
+                <a:latin typeface="Calibri"/>
+              </a:rPr>
+              <a:t> long gaps (&gt;20 min)</a:t>
             </a:r>
           </a:p>
           <a:p>
@@ -3612,110 +3632,31 @@
               </a:spcAft>
             </a:pPr>
             <a:r>
-              <a:rPr sz="1400">
-                <a:solidFill>
-                  <a:srgbClr val="0B0B0B"/>
-                </a:solidFill>
-                <a:latin typeface="Calibri"/>
-              </a:rPr>
-              <a:t>•  </a:t>
-            </a:r>
-            <a:r>
-              <a:rPr sz="1400" b="1">
-                <a:solidFill>
-                  <a:srgbClr val="0B0B0B"/>
-                </a:solidFill>
-                <a:latin typeface="Calibri"/>
-              </a:rPr>
-              <a:t>Spearman:</a:t>
-            </a:r>
-            <a:r>
-              <a:rPr sz="1400">
-                <a:solidFill>
-                  <a:srgbClr val="0B0B0B"/>
-                </a:solidFill>
-                <a:latin typeface="Calibri"/>
-              </a:rPr>
-              <a:t> rho = </a:t>
-            </a:r>
-            <a:r>
-              <a:rPr sz="1400" b="1">
-                <a:solidFill>
-                  <a:srgbClr val="0B0B0B"/>
-                </a:solidFill>
-                <a:latin typeface="Calibri"/>
-              </a:rPr>
-              <a:t>0.349</a:t>
-            </a:r>
-            <a:r>
-              <a:rPr sz="1400">
-                <a:solidFill>
-                  <a:srgbClr val="0B0B0B"/>
-                </a:solidFill>
-                <a:latin typeface="Calibri"/>
-              </a:rPr>
-              <a:t>, p &lt; 0.001 (n = 51,437)</a:t>
-            </a:r>
-          </a:p>
-          <a:p>
-            <a:pPr>
-              <a:spcAft>
-                <a:spcPts val="800"/>
-              </a:spcAft>
-            </a:pPr>
-            <a:r>
-              <a:rPr sz="1400">
-                <a:solidFill>
-                  <a:srgbClr val="0B0B0B"/>
-                </a:solidFill>
-                <a:latin typeface="Calibri"/>
-              </a:rPr>
-              <a:t>•  </a:t>
-            </a:r>
-            <a:r>
-              <a:rPr sz="1400" b="1">
-                <a:solidFill>
-                  <a:srgbClr val="0B0B0B"/>
-                </a:solidFill>
-                <a:latin typeface="Calibri"/>
-              </a:rPr>
-              <a:t>Kruskal-Wallis:</a:t>
-            </a:r>
-            <a:r>
-              <a:rPr sz="1400">
-                <a:solidFill>
-                  <a:srgbClr val="0B0B0B"/>
-                </a:solidFill>
-                <a:latin typeface="Calibri"/>
-              </a:rPr>
-              <a:t> H = </a:t>
-            </a:r>
-            <a:r>
-              <a:rPr sz="1400" b="1">
-                <a:solidFill>
-                  <a:srgbClr val="0B0B0B"/>
-                </a:solidFill>
-                <a:latin typeface="Calibri"/>
-              </a:rPr>
-              <a:t>5,883.4</a:t>
-            </a:r>
-            <a:r>
-              <a:rPr sz="1400">
-                <a:solidFill>
-                  <a:srgbClr val="0B0B0B"/>
-                </a:solidFill>
-                <a:latin typeface="Calibri"/>
-              </a:rPr>
-              <a:t>, df = 4, p &lt; 0.001 → </a:t>
-            </a:r>
-            <a:r>
-              <a:rPr sz="1400" b="1">
-                <a:solidFill>
-                  <a:srgbClr val="0B0B0B"/>
-                </a:solidFill>
-                <a:latin typeface="Calibri"/>
-              </a:rPr>
-              <a:t>reject H₀</a:t>
+              <a:rPr sz="1600">
+                <a:solidFill>
+                  <a:srgbClr val="0B0B0B"/>
+                </a:solidFill>
+                <a:latin typeface="Calibri"/>
+              </a:rPr>
+              <a:t>•  About </a:t>
+            </a:r>
+            <a:r>
+              <a:rPr sz="1600" b="1">
+                <a:solidFill>
+                  <a:srgbClr val="0B0B0B"/>
+                </a:solidFill>
+                <a:latin typeface="Calibri"/>
+              </a:rPr>
+              <a:t>1 in 6</a:t>
+            </a:r>
+            <a:r>
+              <a:rPr sz="1600">
+                <a:solidFill>
+                  <a:srgbClr val="0B0B0B"/>
+                </a:solidFill>
+                <a:latin typeface="Calibri"/>
+              </a:rPr>
+              <a:t> arrivals is bunched or a long gap</a:t>
             </a:r>
           </a:p>
         </p:txBody>
@@ -3844,7 +3785,7 @@
                 </a:solidFill>
                 <a:latin typeface="Calibri"/>
               </a:rPr>
-              <a:t>H2: Dwell time vs passengers boarding</a:t>
+              <a:t>Average weekday boardings by stop and hour</a:t>
             </a:r>
           </a:p>
         </p:txBody>
@@ -3920,7 +3861,7 @@
       </p:sp>
       <p:pic>
         <p:nvPicPr>
-          <p:cNvPr id="7" name="Picture 6" descr="fig07_h2_dwell_vs_boardings.png"/>
+          <p:cNvPr id="7" name="Picture 6" descr="fig02_boardings_heatmap.png"/>
           <p:cNvPicPr>
             <a:picLocks noChangeAspect="1"/>
           </p:cNvPicPr>
@@ -3935,7 +3876,7 @@
         <p:spPr>
           <a:xfrm>
             <a:off x="548640" y="1463040"/>
-            <a:ext cx="7297792" cy="4526280"/>
+            <a:ext cx="6302572" cy="4526280"/>
           </a:xfrm>
           <a:prstGeom prst="rect">
             <a:avLst/>
@@ -3971,7 +3912,7 @@
                 </a:solidFill>
                 <a:latin typeface="Calibri"/>
               </a:rPr>
-              <a:t>Figure 4. H2: Dwell time vs passengers boarding</a:t>
+              <a:t>Figure 5. Average weekday boardings by stop and hour</a:t>
             </a:r>
           </a:p>
         </p:txBody>
@@ -4004,31 +3945,31 @@
               </a:spcAft>
             </a:pPr>
             <a:r>
-              <a:rPr sz="1400">
-                <a:solidFill>
-                  <a:srgbClr val="0B0B0B"/>
-                </a:solidFill>
-                <a:latin typeface="Calibri"/>
-              </a:rPr>
-              <a:t>•  OLS (n = 116,697): </a:t>
-            </a:r>
-            <a:r>
-              <a:rPr sz="1400" b="1">
-                <a:solidFill>
-                  <a:srgbClr val="0B0B0B"/>
-                </a:solidFill>
-                <a:latin typeface="Calibri"/>
-              </a:rPr>
-              <a:t>dwell = 12.79 + 6.91 × ons + 3.65 × offs</a:t>
-            </a:r>
-            <a:r>
-              <a:rPr sz="1400">
-                <a:solidFill>
-                  <a:srgbClr val="0B0B0B"/>
-                </a:solidFill>
-                <a:latin typeface="Calibri"/>
-              </a:rPr>
-              <a:t> seconds</a:t>
+              <a:rPr sz="1600">
+                <a:solidFill>
+                  <a:srgbClr val="0B0B0B"/>
+                </a:solidFill>
+                <a:latin typeface="Calibri"/>
+              </a:rPr>
+              <a:t>•  </a:t>
+            </a:r>
+            <a:r>
+              <a:rPr sz="1600" b="1">
+                <a:solidFill>
+                  <a:srgbClr val="0B0B0B"/>
+                </a:solidFill>
+                <a:latin typeface="Calibri"/>
+              </a:rPr>
+              <a:t>Stop 1</a:t>
+            </a:r>
+            <a:r>
+              <a:rPr sz="1600">
+                <a:solidFill>
+                  <a:srgbClr val="0B0B0B"/>
+                </a:solidFill>
+                <a:latin typeface="Calibri"/>
+              </a:rPr>
+              <a:t> is busiest: about 442 boardings per weekday, peaking 7:00–10:00</a:t>
             </a:r>
           </a:p>
           <a:p>
@@ -4038,49 +3979,49 @@
               </a:spcAft>
             </a:pPr>
             <a:r>
-              <a:rPr sz="1400">
-                <a:solidFill>
-                  <a:srgbClr val="0B0B0B"/>
-                </a:solidFill>
-                <a:latin typeface="Calibri"/>
-              </a:rPr>
-              <a:t>•  Each </a:t>
-            </a:r>
-            <a:r>
-              <a:rPr sz="1400" b="1">
-                <a:solidFill>
-                  <a:srgbClr val="0B0B0B"/>
-                </a:solidFill>
-                <a:latin typeface="Calibri"/>
-              </a:rPr>
-              <a:t>boarding adds ~6.9 s</a:t>
-            </a:r>
-            <a:r>
-              <a:rPr sz="1400">
-                <a:solidFill>
-                  <a:srgbClr val="0B0B0B"/>
-                </a:solidFill>
-                <a:latin typeface="Calibri"/>
-              </a:rPr>
-              <a:t>, each alighting ~3.7 s — boarding costs </a:t>
-            </a:r>
-            <a:r>
-              <a:rPr sz="1400" b="1">
-                <a:solidFill>
-                  <a:srgbClr val="0B0B0B"/>
-                </a:solidFill>
-                <a:latin typeface="Calibri"/>
-              </a:rPr>
-              <a:t>1.9×</a:t>
-            </a:r>
-            <a:r>
-              <a:rPr sz="1400">
-                <a:solidFill>
-                  <a:srgbClr val="0B0B0B"/>
-                </a:solidFill>
-                <a:latin typeface="Calibri"/>
-              </a:rPr>
-              <a:t> more</a:t>
+              <a:rPr sz="1600">
+                <a:solidFill>
+                  <a:srgbClr val="0B0B0B"/>
+                </a:solidFill>
+                <a:latin typeface="Calibri"/>
+              </a:rPr>
+              <a:t>•  </a:t>
+            </a:r>
+            <a:r>
+              <a:rPr sz="1600" b="1">
+                <a:solidFill>
+                  <a:srgbClr val="0B0B0B"/>
+                </a:solidFill>
+                <a:latin typeface="Calibri"/>
+              </a:rPr>
+              <a:t>Stop 5</a:t>
+            </a:r>
+            <a:r>
+              <a:rPr sz="1600">
+                <a:solidFill>
+                  <a:srgbClr val="0B0B0B"/>
+                </a:solidFill>
+                <a:latin typeface="Calibri"/>
+              </a:rPr>
+              <a:t> peaks in the morning; </a:t>
+            </a:r>
+            <a:r>
+              <a:rPr sz="1600" b="1">
+                <a:solidFill>
+                  <a:srgbClr val="0B0B0B"/>
+                </a:solidFill>
+                <a:latin typeface="Calibri"/>
+              </a:rPr>
+              <a:t>stop 19</a:t>
+            </a:r>
+            <a:r>
+              <a:rPr sz="1600">
+                <a:solidFill>
+                  <a:srgbClr val="0B0B0B"/>
+                </a:solidFill>
+                <a:latin typeface="Calibri"/>
+              </a:rPr>
+              <a:t> in the afternoon (15:00–17:00)</a:t>
             </a:r>
           </a:p>
           <a:p>
@@ -4090,49 +4031,13 @@
               </a:spcAft>
             </a:pPr>
             <a:r>
-              <a:rPr sz="1400">
-                <a:solidFill>
-                  <a:srgbClr val="0B0B0B"/>
-                </a:solidFill>
-                <a:latin typeface="Calibri"/>
-              </a:rPr>
-              <a:t>•  Mean dwell climbs from </a:t>
-            </a:r>
-            <a:r>
-              <a:rPr sz="1400" b="1">
-                <a:solidFill>
-                  <a:srgbClr val="0B0B0B"/>
-                </a:solidFill>
-                <a:latin typeface="Calibri"/>
-              </a:rPr>
-              <a:t>16.9 s</a:t>
-            </a:r>
-            <a:r>
-              <a:rPr sz="1400">
-                <a:solidFill>
-                  <a:srgbClr val="0B0B0B"/>
-                </a:solidFill>
-                <a:latin typeface="Calibri"/>
-              </a:rPr>
-              <a:t> at no boardings to </a:t>
-            </a:r>
-            <a:r>
-              <a:rPr sz="1400" b="1">
-                <a:solidFill>
-                  <a:srgbClr val="0B0B0B"/>
-                </a:solidFill>
-                <a:latin typeface="Calibri"/>
-              </a:rPr>
-              <a:t>111.8 s</a:t>
-            </a:r>
-            <a:r>
-              <a:rPr sz="1400">
-                <a:solidFill>
-                  <a:srgbClr val="0B0B0B"/>
-                </a:solidFill>
-                <a:latin typeface="Calibri"/>
-              </a:rPr>
-              <a:t> at 20 boardings</a:t>
+              <a:rPr sz="1600">
+                <a:solidFill>
+                  <a:srgbClr val="0B0B0B"/>
+                </a:solidFill>
+                <a:latin typeface="Calibri"/>
+              </a:rPr>
+              <a:t>•  Most stops after stop 20 have few boardings</a:t>
             </a:r>
           </a:p>
           <a:p>
@@ -4142,31 +4047,13 @@
               </a:spcAft>
             </a:pPr>
             <a:r>
-              <a:rPr sz="1400">
-                <a:solidFill>
-                  <a:srgbClr val="0B0B0B"/>
-                </a:solidFill>
-                <a:latin typeface="Calibri"/>
-              </a:rPr>
-              <a:t>•  Both p &lt; 0.001 → </a:t>
-            </a:r>
-            <a:r>
-              <a:rPr sz="1400" b="1">
-                <a:solidFill>
-                  <a:srgbClr val="0B0B0B"/>
-                </a:solidFill>
-                <a:latin typeface="Calibri"/>
-              </a:rPr>
-              <a:t>reject H₀</a:t>
-            </a:r>
-            <a:r>
-              <a:rPr sz="1400">
-                <a:solidFill>
-                  <a:srgbClr val="0B0B0B"/>
-                </a:solidFill>
-                <a:latin typeface="Calibri"/>
-              </a:rPr>
-              <a:t>; R² = 0.180 (traffic and ramps explain the rest)</a:t>
+              <a:rPr sz="1600">
+                <a:solidFill>
+                  <a:srgbClr val="0B0B0B"/>
+                </a:solidFill>
+                <a:latin typeface="Calibri"/>
+              </a:rPr>
+              <a:t>•  Demand is very uneven across stops and hours</a:t>
             </a:r>
           </a:p>
         </p:txBody>
@@ -4295,7 +4182,7 @@
                 </a:solidFill>
                 <a:latin typeface="Calibri"/>
               </a:rPr>
-              <a:t>H3: Headway irregularity along the route</a:t>
+              <a:t>H1: Passengers on board by headway group</a:t>
             </a:r>
           </a:p>
         </p:txBody>
@@ -4369,9 +4256,61 @@
           </a:p>
         </p:txBody>
       </p:sp>
+      <p:sp>
+        <p:nvSpPr>
+          <p:cNvPr id="7" name="TextBox 6"/>
+          <p:cNvSpPr txBox="1"/>
+          <p:nvPr/>
+        </p:nvSpPr>
+        <p:spPr>
+          <a:xfrm>
+            <a:off x="548640" y="1280160"/>
+            <a:ext cx="11094415" cy="365760"/>
+          </a:xfrm>
+          <a:prstGeom prst="rect">
+            <a:avLst/>
+          </a:prstGeom>
+          <a:noFill/>
+        </p:spPr>
+        <p:txBody>
+          <a:bodyPr wrap="square" anchor="t" lIns="45720" rIns="45720">
+            <a:spAutoFit/>
+          </a:bodyPr>
+          <a:lstStyle/>
+          <a:p>
+            <a:r>
+              <a:rPr sz="1400">
+                <a:solidFill>
+                  <a:srgbClr val="52514E"/>
+                </a:solidFill>
+                <a:latin typeface="Calibri"/>
+              </a:rPr>
+              <a:t>All tests: weekdays 7:00–17:59, 126,070 stop events, 131 service days, </a:t>
+            </a:r>
+            <a:r>
+              <a:rPr sz="1400" b="1">
+                <a:solidFill>
+                  <a:srgbClr val="52514E"/>
+                </a:solidFill>
+                <a:latin typeface="Calibri"/>
+              </a:rPr>
+              <a:t>alpha = 0.05</a:t>
+            </a:r>
+            <a:r>
+              <a:rPr sz="1400">
+                <a:solidFill>
+                  <a:srgbClr val="52514E"/>
+                </a:solidFill>
+                <a:latin typeface="Calibri"/>
+              </a:rPr>
+              <a:t>.</a:t>
+            </a:r>
+          </a:p>
+        </p:txBody>
+      </p:sp>
       <p:pic>
         <p:nvPicPr>
-          <p:cNvPr id="7" name="Picture 6" descr="fig08_h3_headway_cv_by_stop.png"/>
+          <p:cNvPr id="8" name="Picture 7" descr="fig06_h1_load_vs_headway.png"/>
           <p:cNvPicPr>
             <a:picLocks noChangeAspect="1"/>
           </p:cNvPicPr>
@@ -4385,8 +4324,8 @@
         </p:blipFill>
         <p:spPr>
           <a:xfrm>
-            <a:off x="548640" y="1463040"/>
-            <a:ext cx="6705018" cy="4526280"/>
+            <a:off x="548640" y="1783080"/>
+            <a:ext cx="6302314" cy="4206240"/>
           </a:xfrm>
           <a:prstGeom prst="rect">
             <a:avLst/>
@@ -4395,7 +4334,7 @@
       </p:pic>
       <p:sp>
         <p:nvSpPr>
-          <p:cNvPr id="8" name="TextBox 7"/>
+          <p:cNvPr id="9" name="TextBox 8"/>
           <p:cNvSpPr txBox="1"/>
           <p:nvPr/>
         </p:nvSpPr>
@@ -4422,21 +4361,21 @@
                 </a:solidFill>
                 <a:latin typeface="Calibri"/>
               </a:rPr>
-              <a:t>Figure 5. H3: Headway irregularity along the route</a:t>
-            </a:r>
-          </a:p>
-        </p:txBody>
-      </p:sp>
-      <p:sp>
-        <p:nvSpPr>
-          <p:cNvPr id="9" name="TextBox 8"/>
+              <a:t>Figure 6. H1: Passengers on board by headway group</a:t>
+            </a:r>
+          </a:p>
+        </p:txBody>
+      </p:sp>
+      <p:sp>
+        <p:nvSpPr>
+          <p:cNvPr id="10" name="TextBox 9"/>
           <p:cNvSpPr txBox="1"/>
           <p:nvPr/>
         </p:nvSpPr>
         <p:spPr>
           <a:xfrm>
-            <a:off x="8366759" y="1554480"/>
-            <a:ext cx="3276295" cy="4572000"/>
+            <a:off x="8366759" y="1874519"/>
+            <a:ext cx="3276295" cy="4251959"/>
           </a:xfrm>
           <a:prstGeom prst="rect">
             <a:avLst/>
@@ -4461,7 +4400,43 @@
                 </a:solidFill>
                 <a:latin typeface="Calibri"/>
               </a:rPr>
-              <a:t>•  Irregularity = CV (std ÷ mean of headways) per day and stop; 3,382 day × stop cells</a:t>
+              <a:t>•  Mean load doubles as the gap grows: </a:t>
+            </a:r>
+            <a:r>
+              <a:rPr sz="1400" b="1">
+                <a:solidFill>
+                  <a:srgbClr val="0B0B0B"/>
+                </a:solidFill>
+                <a:latin typeface="Calibri"/>
+              </a:rPr>
+              <a:t>9.1 passengers</a:t>
+            </a:r>
+            <a:r>
+              <a:rPr sz="1400">
+                <a:solidFill>
+                  <a:srgbClr val="0B0B0B"/>
+                </a:solidFill>
+                <a:latin typeface="Calibri"/>
+              </a:rPr>
+              <a:t> (0–5 min) → 11.0 → 13.4 → 15.8 → </a:t>
+            </a:r>
+            <a:r>
+              <a:rPr sz="1400" b="1">
+                <a:solidFill>
+                  <a:srgbClr val="0B0B0B"/>
+                </a:solidFill>
+                <a:latin typeface="Calibri"/>
+              </a:rPr>
+              <a:t>17.9</a:t>
+            </a:r>
+            <a:r>
+              <a:rPr sz="1400">
+                <a:solidFill>
+                  <a:srgbClr val="0B0B0B"/>
+                </a:solidFill>
+                <a:latin typeface="Calibri"/>
+              </a:rPr>
+              <a:t> (20+ min)</a:t>
             </a:r>
           </a:p>
           <a:p>
@@ -4477,25 +4452,7 @@
                 </a:solidFill>
                 <a:latin typeface="Calibri"/>
               </a:rPr>
-              <a:t>•  Mean CV rises from </a:t>
-            </a:r>
-            <a:r>
-              <a:rPr sz="1400" b="1">
-                <a:solidFill>
-                  <a:srgbClr val="0B0B0B"/>
-                </a:solidFill>
-                <a:latin typeface="Calibri"/>
-              </a:rPr>
-              <a:t>0.39 at stop 2 to 0.58 at stop 28 (+51%)</a:t>
-            </a:r>
-            <a:r>
-              <a:rPr sz="1400">
-                <a:solidFill>
-                  <a:srgbClr val="0B0B0B"/>
-                </a:solidFill>
-                <a:latin typeface="Calibri"/>
-              </a:rPr>
-              <a:t>, peak 0.62 at stop 27</a:t>
+              <a:t>•  Medians move the same way (8 → 17), so a few crowded buses are not driving it</a:t>
             </a:r>
           </a:p>
           <a:p>
@@ -4538,7 +4495,7 @@
                 </a:solidFill>
                 <a:latin typeface="Calibri"/>
               </a:rPr>
-              <a:t>0.955</a:t>
+              <a:t>0.349</a:t>
             </a:r>
             <a:r>
               <a:rPr sz="1400">
@@ -4547,16 +4504,7 @@
                 </a:solidFill>
                 <a:latin typeface="Calibri"/>
               </a:rPr>
-              <a:t>, p &lt; 0.001 (n = 27 stops) → </a:t>
-            </a:r>
-            <a:r>
-              <a:rPr sz="1400" b="1">
-                <a:solidFill>
-                  <a:srgbClr val="0B0B0B"/>
-                </a:solidFill>
-                <a:latin typeface="Calibri"/>
-              </a:rPr>
-              <a:t>reject H₀</a:t>
+              <a:t>, p &lt; 0.001 (n = 51,437)</a:t>
             </a:r>
           </a:p>
           <a:p>
@@ -4572,7 +4520,52 @@
                 </a:solidFill>
                 <a:latin typeface="Calibri"/>
               </a:rPr>
-              <a:t>•  The 25th–75th band widens too: bad days get worse further down the line</a:t>
+              <a:t>•  </a:t>
+            </a:r>
+            <a:r>
+              <a:rPr sz="1400" b="1">
+                <a:solidFill>
+                  <a:srgbClr val="0B0B0B"/>
+                </a:solidFill>
+                <a:latin typeface="Calibri"/>
+              </a:rPr>
+              <a:t>Kruskal-Wallis:</a:t>
+            </a:r>
+            <a:r>
+              <a:rPr sz="1400">
+                <a:solidFill>
+                  <a:srgbClr val="0B0B0B"/>
+                </a:solidFill>
+                <a:latin typeface="Calibri"/>
+              </a:rPr>
+              <a:t> H = </a:t>
+            </a:r>
+            <a:r>
+              <a:rPr sz="1400" b="1">
+                <a:solidFill>
+                  <a:srgbClr val="0B0B0B"/>
+                </a:solidFill>
+                <a:latin typeface="Calibri"/>
+              </a:rPr>
+              <a:t>5,883.4</a:t>
+            </a:r>
+            <a:r>
+              <a:rPr sz="1400">
+                <a:solidFill>
+                  <a:srgbClr val="0B0B0B"/>
+                </a:solidFill>
+                <a:latin typeface="Calibri"/>
+              </a:rPr>
+              <a:t>, df = 4, p &lt; 0.001 → </a:t>
+            </a:r>
+            <a:r>
+              <a:rPr sz="1400" b="1">
+                <a:solidFill>
+                  <a:srgbClr val="0B0B0B"/>
+                </a:solidFill>
+                <a:latin typeface="Calibri"/>
+              </a:rPr>
+              <a:t>reject H₀</a:t>
             </a:r>
           </a:p>
         </p:txBody>
@@ -4701,7 +4694,7 @@
                 </a:solidFill>
                 <a:latin typeface="Calibri"/>
               </a:rPr>
-              <a:t>Discussion: one self-reinforcing cycle</a:t>
+              <a:t>H2: Dwell time vs passengers boarding</a:t>
             </a:r>
           </a:p>
         </p:txBody>
@@ -4775,16 +4768,74 @@
           </a:p>
         </p:txBody>
       </p:sp>
-      <p:sp>
-        <p:nvSpPr>
-          <p:cNvPr id="7" name="TextBox 6"/>
+      <p:pic>
+        <p:nvPicPr>
+          <p:cNvPr id="7" name="Picture 6" descr="fig07_h2_dwell_vs_boardings.png"/>
+          <p:cNvPicPr>
+            <a:picLocks noChangeAspect="1"/>
+          </p:cNvPicPr>
+          <p:nvPr/>
+        </p:nvPicPr>
+        <p:blipFill>
+          <a:blip r:embed="rId2"/>
+          <a:stretch>
+            <a:fillRect/>
+          </a:stretch>
+        </p:blipFill>
+        <p:spPr>
+          <a:xfrm>
+            <a:off x="548640" y="1463040"/>
+            <a:ext cx="7297792" cy="4526280"/>
+          </a:xfrm>
+          <a:prstGeom prst="rect">
+            <a:avLst/>
+          </a:prstGeom>
+        </p:spPr>
+      </p:pic>
+      <p:sp>
+        <p:nvSpPr>
+          <p:cNvPr id="8" name="TextBox 7"/>
           <p:cNvSpPr txBox="1"/>
           <p:nvPr/>
         </p:nvSpPr>
         <p:spPr>
           <a:xfrm>
-            <a:off x="548640" y="1508760"/>
-            <a:ext cx="11094415" cy="4663440"/>
+            <a:off x="548640" y="6035040"/>
+            <a:ext cx="7498079" cy="274320"/>
+          </a:xfrm>
+          <a:prstGeom prst="rect">
+            <a:avLst/>
+          </a:prstGeom>
+          <a:noFill/>
+        </p:spPr>
+        <p:txBody>
+          <a:bodyPr wrap="square" anchor="t" lIns="45720" rIns="45720">
+            <a:spAutoFit/>
+          </a:bodyPr>
+          <a:lstStyle/>
+          <a:p>
+            <a:r>
+              <a:rPr sz="1100">
+                <a:solidFill>
+                  <a:srgbClr val="52514E"/>
+                </a:solidFill>
+                <a:latin typeface="Calibri"/>
+              </a:rPr>
+              <a:t>Figure 7. H2: Dwell time vs passengers boarding</a:t>
+            </a:r>
+          </a:p>
+        </p:txBody>
+      </p:sp>
+      <p:sp>
+        <p:nvSpPr>
+          <p:cNvPr id="9" name="TextBox 8"/>
+          <p:cNvSpPr txBox="1"/>
+          <p:nvPr/>
+        </p:nvSpPr>
+        <p:spPr>
+          <a:xfrm>
+            <a:off x="8366759" y="1554480"/>
+            <a:ext cx="3276295" cy="4572000"/>
           </a:xfrm>
           <a:prstGeom prst="rect">
             <a:avLst/>
@@ -4803,31 +4854,31 @@
               </a:spcAft>
             </a:pPr>
             <a:r>
-              <a:rPr sz="2000">
-                <a:solidFill>
-                  <a:srgbClr val="0B0B0B"/>
-                </a:solidFill>
-                <a:latin typeface="Calibri"/>
-              </a:rPr>
-              <a:t>•  </a:t>
-            </a:r>
-            <a:r>
-              <a:rPr sz="2000" b="1">
-                <a:solidFill>
-                  <a:srgbClr val="0B0B0B"/>
-                </a:solidFill>
-                <a:latin typeface="Calibri"/>
-              </a:rPr>
-              <a:t>H2 → H1:</a:t>
-            </a:r>
-            <a:r>
-              <a:rPr sz="2000">
-                <a:solidFill>
-                  <a:srgbClr val="0B0B0B"/>
-                </a:solidFill>
-                <a:latin typeface="Calibri"/>
-              </a:rPr>
-              <a:t> more passengers → longer stops (+6.9 s each) → the bus falls behind</a:t>
+              <a:rPr sz="1400">
+                <a:solidFill>
+                  <a:srgbClr val="0B0B0B"/>
+                </a:solidFill>
+                <a:latin typeface="Calibri"/>
+              </a:rPr>
+              <a:t>•  OLS (n = 116,697): </a:t>
+            </a:r>
+            <a:r>
+              <a:rPr sz="1400" b="1">
+                <a:solidFill>
+                  <a:srgbClr val="0B0B0B"/>
+                </a:solidFill>
+                <a:latin typeface="Calibri"/>
+              </a:rPr>
+              <a:t>dwell = 12.79 + 6.91 × ons + 3.65 × offs</a:t>
+            </a:r>
+            <a:r>
+              <a:rPr sz="1400">
+                <a:solidFill>
+                  <a:srgbClr val="0B0B0B"/>
+                </a:solidFill>
+                <a:latin typeface="Calibri"/>
+              </a:rPr>
+              <a:t> seconds</a:t>
             </a:r>
           </a:p>
           <a:p>
@@ -4837,31 +4888,49 @@
               </a:spcAft>
             </a:pPr>
             <a:r>
-              <a:rPr sz="2000">
-                <a:solidFill>
-                  <a:srgbClr val="0B0B0B"/>
-                </a:solidFill>
-                <a:latin typeface="Calibri"/>
-              </a:rPr>
-              <a:t>•  </a:t>
-            </a:r>
-            <a:r>
-              <a:rPr sz="2000" b="1">
-                <a:solidFill>
-                  <a:srgbClr val="0B0B0B"/>
-                </a:solidFill>
-                <a:latin typeface="Calibri"/>
-              </a:rPr>
-              <a:t>H1 → H2:</a:t>
-            </a:r>
-            <a:r>
-              <a:rPr sz="2000">
-                <a:solidFill>
-                  <a:srgbClr val="0B0B0B"/>
-                </a:solidFill>
-                <a:latin typeface="Calibri"/>
-              </a:rPr>
-              <a:t> a bigger gap → more passengers waiting (9.1 → 17.9) → longer stops again</a:t>
+              <a:rPr sz="1400">
+                <a:solidFill>
+                  <a:srgbClr val="0B0B0B"/>
+                </a:solidFill>
+                <a:latin typeface="Calibri"/>
+              </a:rPr>
+              <a:t>•  Each </a:t>
+            </a:r>
+            <a:r>
+              <a:rPr sz="1400" b="1">
+                <a:solidFill>
+                  <a:srgbClr val="0B0B0B"/>
+                </a:solidFill>
+                <a:latin typeface="Calibri"/>
+              </a:rPr>
+              <a:t>boarding adds ~6.9 s</a:t>
+            </a:r>
+            <a:r>
+              <a:rPr sz="1400">
+                <a:solidFill>
+                  <a:srgbClr val="0B0B0B"/>
+                </a:solidFill>
+                <a:latin typeface="Calibri"/>
+              </a:rPr>
+              <a:t>, each alighting ~3.7 s — boarding costs </a:t>
+            </a:r>
+            <a:r>
+              <a:rPr sz="1400" b="1">
+                <a:solidFill>
+                  <a:srgbClr val="0B0B0B"/>
+                </a:solidFill>
+                <a:latin typeface="Calibri"/>
+              </a:rPr>
+              <a:t>1.9×</a:t>
+            </a:r>
+            <a:r>
+              <a:rPr sz="1400">
+                <a:solidFill>
+                  <a:srgbClr val="0B0B0B"/>
+                </a:solidFill>
+                <a:latin typeface="Calibri"/>
+              </a:rPr>
+              <a:t> more</a:t>
             </a:r>
           </a:p>
           <a:p>
@@ -4871,31 +4940,49 @@
               </a:spcAft>
             </a:pPr>
             <a:r>
-              <a:rPr sz="2000">
-                <a:solidFill>
-                  <a:srgbClr val="0B0B0B"/>
-                </a:solidFill>
-                <a:latin typeface="Calibri"/>
-              </a:rPr>
-              <a:t>•  </a:t>
-            </a:r>
-            <a:r>
-              <a:rPr sz="2000" b="1">
-                <a:solidFill>
-                  <a:srgbClr val="0B0B0B"/>
-                </a:solidFill>
-                <a:latin typeface="Calibri"/>
-              </a:rPr>
-              <a:t>→ H3:</a:t>
-            </a:r>
-            <a:r>
-              <a:rPr sz="2000">
-                <a:solidFill>
-                  <a:srgbClr val="0B0B0B"/>
-                </a:solidFill>
-                <a:latin typeface="Calibri"/>
-              </a:rPr>
-              <a:t> each turn amplifies the last, so spacing gets more uneven downstream (CV 0.39 → 0.58)</a:t>
+              <a:rPr sz="1400">
+                <a:solidFill>
+                  <a:srgbClr val="0B0B0B"/>
+                </a:solidFill>
+                <a:latin typeface="Calibri"/>
+              </a:rPr>
+              <a:t>•  Mean dwell climbs from </a:t>
+            </a:r>
+            <a:r>
+              <a:rPr sz="1400" b="1">
+                <a:solidFill>
+                  <a:srgbClr val="0B0B0B"/>
+                </a:solidFill>
+                <a:latin typeface="Calibri"/>
+              </a:rPr>
+              <a:t>16.9 s</a:t>
+            </a:r>
+            <a:r>
+              <a:rPr sz="1400">
+                <a:solidFill>
+                  <a:srgbClr val="0B0B0B"/>
+                </a:solidFill>
+                <a:latin typeface="Calibri"/>
+              </a:rPr>
+              <a:t> at no boardings to </a:t>
+            </a:r>
+            <a:r>
+              <a:rPr sz="1400" b="1">
+                <a:solidFill>
+                  <a:srgbClr val="0B0B0B"/>
+                </a:solidFill>
+                <a:latin typeface="Calibri"/>
+              </a:rPr>
+              <a:t>111.8 s</a:t>
+            </a:r>
+            <a:r>
+              <a:rPr sz="1400">
+                <a:solidFill>
+                  <a:srgbClr val="0B0B0B"/>
+                </a:solidFill>
+                <a:latin typeface="Calibri"/>
+              </a:rPr>
+              <a:t> at 20 boardings</a:t>
             </a:r>
           </a:p>
           <a:p>
@@ -4905,22 +4992,31 @@
               </a:spcAft>
             </a:pPr>
             <a:r>
-              <a:rPr sz="2000">
-                <a:solidFill>
-                  <a:srgbClr val="0B0B0B"/>
-                </a:solidFill>
-                <a:latin typeface="Calibri"/>
-              </a:rPr>
-              <a:t>•  Meanwhile the bus behind finds empty stops and catches up — </a:t>
-            </a:r>
-            <a:r>
-              <a:rPr sz="2000" b="1">
-                <a:solidFill>
-                  <a:srgbClr val="0B0B0B"/>
-                </a:solidFill>
-                <a:latin typeface="Calibri"/>
-              </a:rPr>
-              <a:t>that is bunching</a:t>
+              <a:rPr sz="1400">
+                <a:solidFill>
+                  <a:srgbClr val="0B0B0B"/>
+                </a:solidFill>
+                <a:latin typeface="Calibri"/>
+              </a:rPr>
+              <a:t>•  Both p &lt; 0.001 → </a:t>
+            </a:r>
+            <a:r>
+              <a:rPr sz="1400" b="1">
+                <a:solidFill>
+                  <a:srgbClr val="0B0B0B"/>
+                </a:solidFill>
+                <a:latin typeface="Calibri"/>
+              </a:rPr>
+              <a:t>reject H₀</a:t>
+            </a:r>
+            <a:r>
+              <a:rPr sz="1400">
+                <a:solidFill>
+                  <a:srgbClr val="0B0B0B"/>
+                </a:solidFill>
+                <a:latin typeface="Calibri"/>
+              </a:rPr>
+              <a:t>; R² = 0.180 (traffic and ramps explain the rest)</a:t>
             </a:r>
           </a:p>
         </p:txBody>
@@ -5049,7 +5145,7 @@
                 </a:solidFill>
                 <a:latin typeface="Calibri"/>
               </a:rPr>
-              <a:t>Limitations</a:t>
+              <a:t>H3: Headway irregularity along the route</a:t>
             </a:r>
           </a:p>
         </p:txBody>
@@ -5123,16 +5219,74 @@
           </a:p>
         </p:txBody>
       </p:sp>
-      <p:sp>
-        <p:nvSpPr>
-          <p:cNvPr id="7" name="TextBox 6"/>
+      <p:pic>
+        <p:nvPicPr>
+          <p:cNvPr id="7" name="Picture 6" descr="fig08_h3_headway_cv_by_stop.png"/>
+          <p:cNvPicPr>
+            <a:picLocks noChangeAspect="1"/>
+          </p:cNvPicPr>
+          <p:nvPr/>
+        </p:nvPicPr>
+        <p:blipFill>
+          <a:blip r:embed="rId2"/>
+          <a:stretch>
+            <a:fillRect/>
+          </a:stretch>
+        </p:blipFill>
+        <p:spPr>
+          <a:xfrm>
+            <a:off x="548640" y="1463040"/>
+            <a:ext cx="6705018" cy="4526280"/>
+          </a:xfrm>
+          <a:prstGeom prst="rect">
+            <a:avLst/>
+          </a:prstGeom>
+        </p:spPr>
+      </p:pic>
+      <p:sp>
+        <p:nvSpPr>
+          <p:cNvPr id="8" name="TextBox 7"/>
           <p:cNvSpPr txBox="1"/>
           <p:nvPr/>
         </p:nvSpPr>
         <p:spPr>
           <a:xfrm>
-            <a:off x="548640" y="1508760"/>
-            <a:ext cx="11094415" cy="4663440"/>
+            <a:off x="548640" y="6035040"/>
+            <a:ext cx="7498079" cy="274320"/>
+          </a:xfrm>
+          <a:prstGeom prst="rect">
+            <a:avLst/>
+          </a:prstGeom>
+          <a:noFill/>
+        </p:spPr>
+        <p:txBody>
+          <a:bodyPr wrap="square" anchor="t" lIns="45720" rIns="45720">
+            <a:spAutoFit/>
+          </a:bodyPr>
+          <a:lstStyle/>
+          <a:p>
+            <a:r>
+              <a:rPr sz="1100">
+                <a:solidFill>
+                  <a:srgbClr val="52514E"/>
+                </a:solidFill>
+                <a:latin typeface="Calibri"/>
+              </a:rPr>
+              <a:t>Figure 8. H3: Headway irregularity along the route</a:t>
+            </a:r>
+          </a:p>
+        </p:txBody>
+      </p:sp>
+      <p:sp>
+        <p:nvSpPr>
+          <p:cNvPr id="9" name="TextBox 8"/>
+          <p:cNvSpPr txBox="1"/>
+          <p:nvPr/>
+        </p:nvSpPr>
+        <p:spPr>
+          <a:xfrm>
+            <a:off x="8366759" y="1554480"/>
+            <a:ext cx="3276295" cy="4572000"/>
           </a:xfrm>
           <a:prstGeom prst="rect">
             <a:avLst/>
@@ -5151,22 +5305,13 @@
               </a:spcAft>
             </a:pPr>
             <a:r>
-              <a:rPr sz="2000">
-                <a:solidFill>
-                  <a:srgbClr val="0B0B0B"/>
-                </a:solidFill>
-                <a:latin typeface="Calibri"/>
-              </a:rPr>
-              <a:t>•  </a:t>
-            </a:r>
-            <a:r>
-              <a:rPr sz="2000" b="1">
-                <a:solidFill>
-                  <a:srgbClr val="0B0B0B"/>
-                </a:solidFill>
-                <a:latin typeface="Calibri"/>
-              </a:rPr>
-              <a:t>Association, not proof of cause</a:t>
+              <a:rPr sz="1400">
+                <a:solidFill>
+                  <a:srgbClr val="0B0B0B"/>
+                </a:solidFill>
+                <a:latin typeface="Calibri"/>
+              </a:rPr>
+              <a:t>•  Irregularity = CV (std ÷ mean of headways) per day and stop; 3,382 day × stop cells</a:t>
             </a:r>
           </a:p>
           <a:p>
@@ -5176,31 +5321,31 @@
               </a:spcAft>
             </a:pPr>
             <a:r>
-              <a:rPr sz="2000">
-                <a:solidFill>
-                  <a:srgbClr val="0B0B0B"/>
-                </a:solidFill>
-                <a:latin typeface="Calibri"/>
-              </a:rPr>
-              <a:t>•  </a:t>
-            </a:r>
-            <a:r>
-              <a:rPr sz="2000" b="1">
-                <a:solidFill>
-                  <a:srgbClr val="0B0B0B"/>
-                </a:solidFill>
-                <a:latin typeface="Calibri"/>
-              </a:rPr>
-              <a:t>One route, one direction:</a:t>
-            </a:r>
-            <a:r>
-              <a:rPr sz="2000">
-                <a:solidFill>
-                  <a:srgbClr val="0B0B0B"/>
-                </a:solidFill>
-                <a:latin typeface="Calibri"/>
-              </a:rPr>
-              <a:t> 801 southbound, weekdays 7:00–17:59, Jul–Dec 2021</a:t>
+              <a:rPr sz="1400">
+                <a:solidFill>
+                  <a:srgbClr val="0B0B0B"/>
+                </a:solidFill>
+                <a:latin typeface="Calibri"/>
+              </a:rPr>
+              <a:t>•  Mean CV rises from </a:t>
+            </a:r>
+            <a:r>
+              <a:rPr sz="1400" b="1">
+                <a:solidFill>
+                  <a:srgbClr val="0B0B0B"/>
+                </a:solidFill>
+                <a:latin typeface="Calibri"/>
+              </a:rPr>
+              <a:t>0.39 at stop 2 to 0.58 at stop 28 (+51%)</a:t>
+            </a:r>
+            <a:r>
+              <a:rPr sz="1400">
+                <a:solidFill>
+                  <a:srgbClr val="0B0B0B"/>
+                </a:solidFill>
+                <a:latin typeface="Calibri"/>
+              </a:rPr>
+              <a:t>, peak 0.62 at stop 27</a:t>
             </a:r>
           </a:p>
           <a:p>
@@ -5210,7 +5355,7 @@
               </a:spcAft>
             </a:pPr>
             <a:r>
-              <a:rPr sz="2000">
+              <a:rPr sz="1400">
                 <a:solidFill>
                   <a:srgbClr val="0B0B0B"/>
                 </a:solidFill>
@@ -5219,22 +5364,49 @@
               <a:t>•  </a:t>
             </a:r>
             <a:r>
-              <a:rPr sz="2000" b="1">
-                <a:solidFill>
-                  <a:srgbClr val="0B0B0B"/>
-                </a:solidFill>
-                <a:latin typeface="Calibri"/>
-              </a:rPr>
-              <a:t>APC counting errors:</a:t>
-            </a:r>
-            <a:r>
-              <a:rPr sz="2000">
-                <a:solidFill>
-                  <a:srgbClr val="0B0B0B"/>
-                </a:solidFill>
-                <a:latin typeface="Calibri"/>
-              </a:rPr>
-              <a:t> sensors miscount at crowded doors</a:t>
+              <a:rPr sz="1400" b="1">
+                <a:solidFill>
+                  <a:srgbClr val="0B0B0B"/>
+                </a:solidFill>
+                <a:latin typeface="Calibri"/>
+              </a:rPr>
+              <a:t>Spearman:</a:t>
+            </a:r>
+            <a:r>
+              <a:rPr sz="1400">
+                <a:solidFill>
+                  <a:srgbClr val="0B0B0B"/>
+                </a:solidFill>
+                <a:latin typeface="Calibri"/>
+              </a:rPr>
+              <a:t> rho = </a:t>
+            </a:r>
+            <a:r>
+              <a:rPr sz="1400" b="1">
+                <a:solidFill>
+                  <a:srgbClr val="0B0B0B"/>
+                </a:solidFill>
+                <a:latin typeface="Calibri"/>
+              </a:rPr>
+              <a:t>0.955</a:t>
+            </a:r>
+            <a:r>
+              <a:rPr sz="1400">
+                <a:solidFill>
+                  <a:srgbClr val="0B0B0B"/>
+                </a:solidFill>
+                <a:latin typeface="Calibri"/>
+              </a:rPr>
+              <a:t>, p &lt; 0.001 (n = 27 stops) → </a:t>
+            </a:r>
+            <a:r>
+              <a:rPr sz="1400" b="1">
+                <a:solidFill>
+                  <a:srgbClr val="0B0B0B"/>
+                </a:solidFill>
+                <a:latin typeface="Calibri"/>
+              </a:rPr>
+              <a:t>reject H₀</a:t>
             </a:r>
           </a:p>
           <a:p>
@@ -5244,31 +5416,13 @@
               </a:spcAft>
             </a:pPr>
             <a:r>
-              <a:rPr sz="2000">
-                <a:solidFill>
-                  <a:srgbClr val="0B0B0B"/>
-                </a:solidFill>
-                <a:latin typeface="Calibri"/>
-              </a:rPr>
-              <a:t>•  </a:t>
-            </a:r>
-            <a:r>
-              <a:rPr sz="2000" b="1">
-                <a:solidFill>
-                  <a:srgbClr val="0B0B0B"/>
-                </a:solidFill>
-                <a:latin typeface="Calibri"/>
-              </a:rPr>
-              <a:t>Missing trips:</a:t>
-            </a:r>
-            <a:r>
-              <a:rPr sz="2000">
-                <a:solidFill>
-                  <a:srgbClr val="0B0B0B"/>
-                </a:solidFill>
-                <a:latin typeface="Calibri"/>
-              </a:rPr>
-              <a:t> only headways between buses scheduled 10 min apart were kept (51,437)</a:t>
+              <a:rPr sz="1400">
+                <a:solidFill>
+                  <a:srgbClr val="0B0B0B"/>
+                </a:solidFill>
+                <a:latin typeface="Calibri"/>
+              </a:rPr>
+              <a:t>•  The 25th–75th band widens too: bad days get worse further down the line</a:t>
             </a:r>
           </a:p>
         </p:txBody>
@@ -5363,7 +5517,7 @@
                 </a:solidFill>
                 <a:latin typeface="Calibri"/>
               </a:rPr>
-              <a:t>CONCLUSION</a:t>
+              <a:t>RESULTS AND DISCUSSION</a:t>
             </a:r>
           </a:p>
         </p:txBody>
@@ -5397,7 +5551,7 @@
                 </a:solidFill>
                 <a:latin typeface="Calibri"/>
               </a:rPr>
-              <a:t>What we studied</a:t>
+              <a:t>Discussion: one self-reinforcing cycle</a:t>
             </a:r>
           </a:p>
         </p:txBody>
@@ -5514,7 +5668,7 @@
                 </a:solidFill>
                 <a:latin typeface="Calibri"/>
               </a:rPr>
-              <a:t>Data:</a:t>
+              <a:t>H2 → H1:</a:t>
             </a:r>
             <a:r>
               <a:rPr sz="2000">
@@ -5523,25 +5677,7 @@
                 </a:solidFill>
                 <a:latin typeface="Calibri"/>
               </a:rPr>
-              <a:t> CapMetro APC records, Route 801 Rapid southbound, Jul 1 – Dec 30 2021 — </a:t>
-            </a:r>
-            <a:r>
-              <a:rPr sz="2000" b="1">
-                <a:solidFill>
-                  <a:srgbClr val="0B0B0B"/>
-                </a:solidFill>
-                <a:latin typeface="Calibri"/>
-              </a:rPr>
-              <a:t>229,421 stop events</a:t>
-            </a:r>
-            <a:r>
-              <a:rPr sz="2000">
-                <a:solidFill>
-                  <a:srgbClr val="0B0B0B"/>
-                </a:solidFill>
-                <a:latin typeface="Calibri"/>
-              </a:rPr>
-              <a:t>, 29 stops, from 9.2 million raw rows</a:t>
+              <a:t> more passengers → longer stops (+6.9 s each) → the bus falls behind</a:t>
             </a:r>
           </a:p>
           <a:p>
@@ -5566,7 +5702,7 @@
                 </a:solidFill>
                 <a:latin typeface="Calibri"/>
               </a:rPr>
-              <a:t>Window:</a:t>
+              <a:t>H1 → H2:</a:t>
             </a:r>
             <a:r>
               <a:rPr sz="2000">
@@ -5575,7 +5711,7 @@
                 </a:solidFill>
                 <a:latin typeface="Calibri"/>
               </a:rPr>
-              <a:t> weekdays 7:00–17:59, when buses run every 10 min (126,070 events, 131 days)</a:t>
+              <a:t> a bigger gap → more passengers waiting (9.1 → 17.9) → longer stops again</a:t>
             </a:r>
           </a:p>
           <a:p>
@@ -5600,7 +5736,7 @@
                 </a:solidFill>
                 <a:latin typeface="Calibri"/>
               </a:rPr>
-              <a:t>Cleaning:</a:t>
+              <a:t>→ H3:</a:t>
             </a:r>
             <a:r>
               <a:rPr sz="2000">
@@ -5609,16 +5745,7 @@
                 </a:solidFill>
                 <a:latin typeface="Calibri"/>
               </a:rPr>
-              <a:t> six filtering rules, end-stop layovers removed, impossible values imputed (&lt;0.2%), </a:t>
-            </a:r>
-            <a:r>
-              <a:rPr sz="2000" b="1">
-                <a:solidFill>
-                  <a:srgbClr val="0B0B0B"/>
-                </a:solidFill>
-                <a:latin typeface="Calibri"/>
-              </a:rPr>
-              <a:t>51,437 verified headways</a:t>
+              <a:t> each turn amplifies the last, so spacing gets more uneven downstream (CV 0.39 → 0.58)</a:t>
             </a:r>
           </a:p>
           <a:p>
@@ -5634,7 +5761,7 @@
                 </a:solidFill>
                 <a:latin typeface="Calibri"/>
               </a:rPr>
-              <a:t>•  </a:t>
+              <a:t>•  Meanwhile the bus behind finds empty stops and catches up — </a:t>
             </a:r>
             <a:r>
               <a:rPr sz="2000" b="1">
@@ -5643,41 +5770,7 @@
                 </a:solidFill>
                 <a:latin typeface="Calibri"/>
               </a:rPr>
-              <a:t>Demand is concentrated:</a:t>
-            </a:r>
-            <a:r>
-              <a:rPr sz="2000">
-                <a:solidFill>
-                  <a:srgbClr val="0B0B0B"/>
-                </a:solidFill>
-                <a:latin typeface="Calibri"/>
-              </a:rPr>
-              <a:t> stop 1 ~429 boardings per weekday, stop 5 ~323 (morning), stop 19 ~201 (afternoon)</a:t>
-            </a:r>
-          </a:p>
-          <a:p>
-            <a:pPr>
-              <a:spcAft>
-                <a:spcPts val="800"/>
-              </a:spcAft>
-            </a:pPr>
-            <a:r>
-              <a:rPr sz="2000">
-                <a:solidFill>
-                  <a:srgbClr val="0B0B0B"/>
-                </a:solidFill>
-                <a:latin typeface="Calibri"/>
-              </a:rPr>
-              <a:t>•  </a:t>
-            </a:r>
-            <a:r>
-              <a:rPr sz="2000" i="1">
-                <a:solidFill>
-                  <a:srgbClr val="0B0B0B"/>
-                </a:solidFill>
-                <a:latin typeface="Calibri"/>
-              </a:rPr>
-              <a:t>[Ridership patterns: to be added from Elijah's section]</a:t>
+              <a:t>that is bunching</a:t>
             </a:r>
           </a:p>
         </p:txBody>
@@ -5772,7 +5865,7 @@
                 </a:solidFill>
                 <a:latin typeface="Calibri"/>
               </a:rPr>
-              <a:t>CONCLUSION</a:t>
+              <a:t>RESULTS AND DISCUSSION</a:t>
             </a:r>
           </a:p>
         </p:txBody>
@@ -5806,7 +5899,7 @@
                 </a:solidFill>
                 <a:latin typeface="Calibri"/>
               </a:rPr>
-              <a:t>What we found</a:t>
+              <a:t>Limitations</a:t>
             </a:r>
           </a:p>
         </p:txBody>
@@ -5923,34 +6016,7 @@
                 </a:solidFill>
                 <a:latin typeface="Calibri"/>
               </a:rPr>
-              <a:t>H1 — demand follows the gap:</a:t>
-            </a:r>
-            <a:r>
-              <a:rPr sz="2000">
-                <a:solidFill>
-                  <a:srgbClr val="0B0B0B"/>
-                </a:solidFill>
-                <a:latin typeface="Calibri"/>
-              </a:rPr>
-              <a:t> mean load </a:t>
-            </a:r>
-            <a:r>
-              <a:rPr sz="2000" b="1">
-                <a:solidFill>
-                  <a:srgbClr val="0B0B0B"/>
-                </a:solidFill>
-                <a:latin typeface="Calibri"/>
-              </a:rPr>
-              <a:t>9.1 → 17.9 passengers</a:t>
-            </a:r>
-            <a:r>
-              <a:rPr sz="2000">
-                <a:solidFill>
-                  <a:srgbClr val="0B0B0B"/>
-                </a:solidFill>
-                <a:latin typeface="Calibri"/>
-              </a:rPr>
-              <a:t> as headway grows (rho = 0.349, p &lt; 0.001)</a:t>
+              <a:t>Association, not proof of cause</a:t>
             </a:r>
           </a:p>
           <a:p>
@@ -5975,7 +6041,7 @@
                 </a:solidFill>
                 <a:latin typeface="Calibri"/>
               </a:rPr>
-              <a:t>H2 — passengers cost time:</a:t>
+              <a:t>One route, one direction:</a:t>
             </a:r>
             <a:r>
               <a:rPr sz="2000">
@@ -5984,25 +6050,7 @@
                 </a:solidFill>
                 <a:latin typeface="Calibri"/>
               </a:rPr>
-              <a:t> </a:t>
-            </a:r>
-            <a:r>
-              <a:rPr sz="2000" b="1">
-                <a:solidFill>
-                  <a:srgbClr val="0B0B0B"/>
-                </a:solidFill>
-                <a:latin typeface="Calibri"/>
-              </a:rPr>
-              <a:t>+6.9 s per boarding</a:t>
-            </a:r>
-            <a:r>
-              <a:rPr sz="2000">
-                <a:solidFill>
-                  <a:srgbClr val="0B0B0B"/>
-                </a:solidFill>
-                <a:latin typeface="Calibri"/>
-              </a:rPr>
-              <a:t>, +3.7 s per alighting (n = 116,697, p &lt; 0.001)</a:t>
+              <a:t> 801 southbound, weekdays 7:00–17:59, Jul–Dec 2021</a:t>
             </a:r>
           </a:p>
           <a:p>
@@ -6027,7 +6075,7 @@
                 </a:solidFill>
                 <a:latin typeface="Calibri"/>
               </a:rPr>
-              <a:t>H3 — bunching builds up:</a:t>
+              <a:t>APC counting errors:</a:t>
             </a:r>
             <a:r>
               <a:rPr sz="2000">
@@ -6036,25 +6084,7 @@
                 </a:solidFill>
                 <a:latin typeface="Calibri"/>
               </a:rPr>
-              <a:t> headway irregularity </a:t>
-            </a:r>
-            <a:r>
-              <a:rPr sz="2000" b="1">
-                <a:solidFill>
-                  <a:srgbClr val="0B0B0B"/>
-                </a:solidFill>
-                <a:latin typeface="Calibri"/>
-              </a:rPr>
-              <a:t>CV 0.39 → 0.58</a:t>
-            </a:r>
-            <a:r>
-              <a:rPr sz="2000">
-                <a:solidFill>
-                  <a:srgbClr val="0B0B0B"/>
-                </a:solidFill>
-                <a:latin typeface="Calibri"/>
-              </a:rPr>
-              <a:t> along the route (rho = 0.955, p &lt; 0.001)</a:t>
+              <a:t> sensors miscount at crowded doors</a:t>
             </a:r>
           </a:p>
           <a:p>
@@ -6079,7 +6109,7 @@
                 </a:solidFill>
                 <a:latin typeface="Calibri"/>
               </a:rPr>
-              <a:t>All three hypotheses are supported</a:t>
+              <a:t>Missing trips:</a:t>
             </a:r>
             <a:r>
               <a:rPr sz="2000">
@@ -6088,7 +6118,7 @@
                 </a:solidFill>
                 <a:latin typeface="Calibri"/>
               </a:rPr>
-              <a:t> at alpha = 0.05</a:t>
+              <a:t> only headways between buses scheduled 10 min apart were kept (51,437)</a:t>
             </a:r>
           </a:p>
         </p:txBody>
@@ -6217,7 +6247,7 @@
                 </a:solidFill>
                 <a:latin typeface="Calibri"/>
               </a:rPr>
-              <a:t>Conclusion and recommendation</a:t>
+              <a:t>What we studied</a:t>
             </a:r>
           </a:p>
         </p:txBody>
@@ -6287,6 +6317,835 @@
                 <a:latin typeface="Calibri"/>
               </a:rPr>
               <a:t>17</a:t>
+            </a:r>
+          </a:p>
+        </p:txBody>
+      </p:sp>
+      <p:sp>
+        <p:nvSpPr>
+          <p:cNvPr id="7" name="TextBox 6"/>
+          <p:cNvSpPr txBox="1"/>
+          <p:nvPr/>
+        </p:nvSpPr>
+        <p:spPr>
+          <a:xfrm>
+            <a:off x="548640" y="1508760"/>
+            <a:ext cx="11094415" cy="4663440"/>
+          </a:xfrm>
+          <a:prstGeom prst="rect">
+            <a:avLst/>
+          </a:prstGeom>
+          <a:noFill/>
+        </p:spPr>
+        <p:txBody>
+          <a:bodyPr wrap="square" anchor="t" lIns="45720" rIns="45720">
+            <a:spAutoFit/>
+          </a:bodyPr>
+          <a:lstStyle/>
+          <a:p>
+            <a:pPr>
+              <a:spcAft>
+                <a:spcPts val="800"/>
+              </a:spcAft>
+            </a:pPr>
+            <a:r>
+              <a:rPr sz="2000">
+                <a:solidFill>
+                  <a:srgbClr val="0B0B0B"/>
+                </a:solidFill>
+                <a:latin typeface="Calibri"/>
+              </a:rPr>
+              <a:t>•  </a:t>
+            </a:r>
+            <a:r>
+              <a:rPr sz="2000" b="1">
+                <a:solidFill>
+                  <a:srgbClr val="0B0B0B"/>
+                </a:solidFill>
+                <a:latin typeface="Calibri"/>
+              </a:rPr>
+              <a:t>Data:</a:t>
+            </a:r>
+            <a:r>
+              <a:rPr sz="2000">
+                <a:solidFill>
+                  <a:srgbClr val="0B0B0B"/>
+                </a:solidFill>
+                <a:latin typeface="Calibri"/>
+              </a:rPr>
+              <a:t> CapMetro APC records, Route 801 Rapid southbound, Jul 1 – Dec 30 2021 — </a:t>
+            </a:r>
+            <a:r>
+              <a:rPr sz="2000" b="1">
+                <a:solidFill>
+                  <a:srgbClr val="0B0B0B"/>
+                </a:solidFill>
+                <a:latin typeface="Calibri"/>
+              </a:rPr>
+              <a:t>229,421 stop events</a:t>
+            </a:r>
+            <a:r>
+              <a:rPr sz="2000">
+                <a:solidFill>
+                  <a:srgbClr val="0B0B0B"/>
+                </a:solidFill>
+                <a:latin typeface="Calibri"/>
+              </a:rPr>
+              <a:t>, 29 stops, from 9.2 million raw rows</a:t>
+            </a:r>
+          </a:p>
+          <a:p>
+            <a:pPr>
+              <a:spcAft>
+                <a:spcPts val="800"/>
+              </a:spcAft>
+            </a:pPr>
+            <a:r>
+              <a:rPr sz="2000">
+                <a:solidFill>
+                  <a:srgbClr val="0B0B0B"/>
+                </a:solidFill>
+                <a:latin typeface="Calibri"/>
+              </a:rPr>
+              <a:t>•  </a:t>
+            </a:r>
+            <a:r>
+              <a:rPr sz="2000" b="1">
+                <a:solidFill>
+                  <a:srgbClr val="0B0B0B"/>
+                </a:solidFill>
+                <a:latin typeface="Calibri"/>
+              </a:rPr>
+              <a:t>Window:</a:t>
+            </a:r>
+            <a:r>
+              <a:rPr sz="2000">
+                <a:solidFill>
+                  <a:srgbClr val="0B0B0B"/>
+                </a:solidFill>
+                <a:latin typeface="Calibri"/>
+              </a:rPr>
+              <a:t> weekdays 7:00–17:59, when buses run every 10 min (126,070 events, 131 days)</a:t>
+            </a:r>
+          </a:p>
+          <a:p>
+            <a:pPr>
+              <a:spcAft>
+                <a:spcPts val="800"/>
+              </a:spcAft>
+            </a:pPr>
+            <a:r>
+              <a:rPr sz="2000">
+                <a:solidFill>
+                  <a:srgbClr val="0B0B0B"/>
+                </a:solidFill>
+                <a:latin typeface="Calibri"/>
+              </a:rPr>
+              <a:t>•  </a:t>
+            </a:r>
+            <a:r>
+              <a:rPr sz="2000" b="1">
+                <a:solidFill>
+                  <a:srgbClr val="0B0B0B"/>
+                </a:solidFill>
+                <a:latin typeface="Calibri"/>
+              </a:rPr>
+              <a:t>Cleaning:</a:t>
+            </a:r>
+            <a:r>
+              <a:rPr sz="2000">
+                <a:solidFill>
+                  <a:srgbClr val="0B0B0B"/>
+                </a:solidFill>
+                <a:latin typeface="Calibri"/>
+              </a:rPr>
+              <a:t> six filtering rules, end-stop layovers removed, impossible values imputed (&lt;0.2%), </a:t>
+            </a:r>
+            <a:r>
+              <a:rPr sz="2000" b="1">
+                <a:solidFill>
+                  <a:srgbClr val="0B0B0B"/>
+                </a:solidFill>
+                <a:latin typeface="Calibri"/>
+              </a:rPr>
+              <a:t>51,437 verified headways</a:t>
+            </a:r>
+          </a:p>
+          <a:p>
+            <a:pPr>
+              <a:spcAft>
+                <a:spcPts val="800"/>
+              </a:spcAft>
+            </a:pPr>
+            <a:r>
+              <a:rPr sz="2000">
+                <a:solidFill>
+                  <a:srgbClr val="0B0B0B"/>
+                </a:solidFill>
+                <a:latin typeface="Calibri"/>
+              </a:rPr>
+              <a:t>•  </a:t>
+            </a:r>
+            <a:r>
+              <a:rPr sz="2000" b="1">
+                <a:solidFill>
+                  <a:srgbClr val="0B0B0B"/>
+                </a:solidFill>
+                <a:latin typeface="Calibri"/>
+              </a:rPr>
+              <a:t>Demand is concentrated:</a:t>
+            </a:r>
+            <a:r>
+              <a:rPr sz="2000">
+                <a:solidFill>
+                  <a:srgbClr val="0B0B0B"/>
+                </a:solidFill>
+                <a:latin typeface="Calibri"/>
+              </a:rPr>
+              <a:t> stop 1 ~442 boardings per weekday, stop 5 ~329 (morning), stop 19 ~204 (afternoon)</a:t>
+            </a:r>
+          </a:p>
+          <a:p>
+            <a:pPr>
+              <a:spcAft>
+                <a:spcPts val="800"/>
+              </a:spcAft>
+            </a:pPr>
+            <a:r>
+              <a:rPr sz="2000">
+                <a:solidFill>
+                  <a:srgbClr val="0B0B0B"/>
+                </a:solidFill>
+                <a:latin typeface="Calibri"/>
+              </a:rPr>
+              <a:t>•  </a:t>
+            </a:r>
+            <a:r>
+              <a:rPr sz="2000" b="1">
+                <a:solidFill>
+                  <a:srgbClr val="0B0B0B"/>
+                </a:solidFill>
+                <a:latin typeface="Calibri"/>
+              </a:rPr>
+              <a:t>Commuter pattern:</a:t>
+            </a:r>
+            <a:r>
+              <a:rPr sz="2000">
+                <a:solidFill>
+                  <a:srgbClr val="0B0B0B"/>
+                </a:solidFill>
+                <a:latin typeface="Calibri"/>
+              </a:rPr>
+              <a:t> 2,514 boardings per weekday vs 1,728 per weekend day; peaks at 9:00 and 16:00; 5.7% of arrivals bunched, 10.3% long gaps</a:t>
+            </a:r>
+          </a:p>
+        </p:txBody>
+      </p:sp>
+    </p:spTree>
+  </p:cSld>
+  <p:clrMapOvr>
+    <a:masterClrMapping/>
+  </p:clrMapOvr>
+</p:sld>
+</file>
+
+<file path=ppt/slides/slide18.xml><?xml version="1.0" encoding="utf-8"?>
+<p:sld xmlns:a="http://schemas.openxmlformats.org/drawingml/2006/main" xmlns:p="http://schemas.openxmlformats.org/presentationml/2006/main" xmlns:r="http://schemas.openxmlformats.org/officeDocument/2006/relationships">
+  <p:cSld>
+    <p:spTree>
+      <p:nvGrpSpPr>
+        <p:cNvPr id="1" name=""/>
+        <p:cNvGrpSpPr/>
+        <p:nvPr/>
+      </p:nvGrpSpPr>
+      <p:grpSpPr/>
+      <p:sp>
+        <p:nvSpPr>
+          <p:cNvPr id="2" name="Rectangle 1"/>
+          <p:cNvSpPr/>
+          <p:nvPr/>
+        </p:nvSpPr>
+        <p:spPr>
+          <a:xfrm>
+            <a:off x="0" y="0"/>
+            <a:ext cx="12191695" cy="109728"/>
+          </a:xfrm>
+          <a:prstGeom prst="rect">
+            <a:avLst/>
+          </a:prstGeom>
+          <a:solidFill>
+            <a:srgbClr val="2A78D6"/>
+          </a:solidFill>
+          <a:ln>
+            <a:noFill/>
+          </a:ln>
+        </p:spPr>
+        <p:style>
+          <a:lnRef idx="1">
+            <a:schemeClr val="accent1"/>
+          </a:lnRef>
+          <a:fillRef idx="3">
+            <a:schemeClr val="accent1"/>
+          </a:fillRef>
+          <a:effectRef idx="2">
+            <a:schemeClr val="accent1"/>
+          </a:effectRef>
+          <a:fontRef idx="minor">
+            <a:schemeClr val="lt1"/>
+          </a:fontRef>
+        </p:style>
+        <p:txBody>
+          <a:bodyPr rtlCol="0" anchor="ctr"/>
+          <a:lstStyle/>
+          <a:p>
+            <a:pPr algn="ctr"/>
+          </a:p>
+        </p:txBody>
+      </p:sp>
+      <p:sp>
+        <p:nvSpPr>
+          <p:cNvPr id="3" name="TextBox 2"/>
+          <p:cNvSpPr txBox="1"/>
+          <p:nvPr/>
+        </p:nvSpPr>
+        <p:spPr>
+          <a:xfrm>
+            <a:off x="548640" y="292608"/>
+            <a:ext cx="11094415" cy="320040"/>
+          </a:xfrm>
+          <a:prstGeom prst="rect">
+            <a:avLst/>
+          </a:prstGeom>
+          <a:noFill/>
+        </p:spPr>
+        <p:txBody>
+          <a:bodyPr wrap="square" anchor="t" lIns="45720" rIns="45720">
+            <a:spAutoFit/>
+          </a:bodyPr>
+          <a:lstStyle/>
+          <a:p>
+            <a:r>
+              <a:rPr sz="1200" b="1">
+                <a:solidFill>
+                  <a:srgbClr val="2A78D6"/>
+                </a:solidFill>
+                <a:latin typeface="Calibri"/>
+              </a:rPr>
+              <a:t>CONCLUSION</a:t>
+            </a:r>
+          </a:p>
+        </p:txBody>
+      </p:sp>
+      <p:sp>
+        <p:nvSpPr>
+          <p:cNvPr id="4" name="TextBox 3"/>
+          <p:cNvSpPr txBox="1"/>
+          <p:nvPr/>
+        </p:nvSpPr>
+        <p:spPr>
+          <a:xfrm>
+            <a:off x="548640" y="566928"/>
+            <a:ext cx="11094415" cy="731520"/>
+          </a:xfrm>
+          <a:prstGeom prst="rect">
+            <a:avLst/>
+          </a:prstGeom>
+          <a:noFill/>
+        </p:spPr>
+        <p:txBody>
+          <a:bodyPr wrap="square" anchor="t" lIns="45720" rIns="45720">
+            <a:spAutoFit/>
+          </a:bodyPr>
+          <a:lstStyle/>
+          <a:p>
+            <a:r>
+              <a:rPr sz="2800" b="1">
+                <a:solidFill>
+                  <a:srgbClr val="0B0B0B"/>
+                </a:solidFill>
+                <a:latin typeface="Calibri"/>
+              </a:rPr>
+              <a:t>What we found</a:t>
+            </a:r>
+          </a:p>
+        </p:txBody>
+      </p:sp>
+      <p:sp>
+        <p:nvSpPr>
+          <p:cNvPr id="5" name="TextBox 4"/>
+          <p:cNvSpPr txBox="1"/>
+          <p:nvPr/>
+        </p:nvSpPr>
+        <p:spPr>
+          <a:xfrm>
+            <a:off x="548640" y="6446520"/>
+            <a:ext cx="11094415" cy="274320"/>
+          </a:xfrm>
+          <a:prstGeom prst="rect">
+            <a:avLst/>
+          </a:prstGeom>
+          <a:noFill/>
+        </p:spPr>
+        <p:txBody>
+          <a:bodyPr wrap="square" anchor="t" lIns="45720" rIns="45720">
+            <a:spAutoFit/>
+          </a:bodyPr>
+          <a:lstStyle/>
+          <a:p>
+            <a:r>
+              <a:rPr sz="1000">
+                <a:solidFill>
+                  <a:srgbClr val="52514E"/>
+                </a:solidFill>
+                <a:latin typeface="Calibri"/>
+              </a:rPr>
+              <a:t>ELE IDSA Project 1 · GEC2B</a:t>
+            </a:r>
+          </a:p>
+        </p:txBody>
+      </p:sp>
+      <p:sp>
+        <p:nvSpPr>
+          <p:cNvPr id="6" name="TextBox 5"/>
+          <p:cNvSpPr txBox="1"/>
+          <p:nvPr/>
+        </p:nvSpPr>
+        <p:spPr>
+          <a:xfrm>
+            <a:off x="10728655" y="6446520"/>
+            <a:ext cx="914400" cy="274320"/>
+          </a:xfrm>
+          <a:prstGeom prst="rect">
+            <a:avLst/>
+          </a:prstGeom>
+          <a:noFill/>
+        </p:spPr>
+        <p:txBody>
+          <a:bodyPr wrap="square" anchor="t" lIns="45720" rIns="45720">
+            <a:spAutoFit/>
+          </a:bodyPr>
+          <a:lstStyle/>
+          <a:p>
+            <a:pPr algn="r"/>
+            <a:r>
+              <a:rPr sz="1000">
+                <a:solidFill>
+                  <a:srgbClr val="52514E"/>
+                </a:solidFill>
+                <a:latin typeface="Calibri"/>
+              </a:rPr>
+              <a:t>18</a:t>
+            </a:r>
+          </a:p>
+        </p:txBody>
+      </p:sp>
+      <p:sp>
+        <p:nvSpPr>
+          <p:cNvPr id="7" name="TextBox 6"/>
+          <p:cNvSpPr txBox="1"/>
+          <p:nvPr/>
+        </p:nvSpPr>
+        <p:spPr>
+          <a:xfrm>
+            <a:off x="548640" y="1508760"/>
+            <a:ext cx="11094415" cy="4663440"/>
+          </a:xfrm>
+          <a:prstGeom prst="rect">
+            <a:avLst/>
+          </a:prstGeom>
+          <a:noFill/>
+        </p:spPr>
+        <p:txBody>
+          <a:bodyPr wrap="square" anchor="t" lIns="45720" rIns="45720">
+            <a:spAutoFit/>
+          </a:bodyPr>
+          <a:lstStyle/>
+          <a:p>
+            <a:pPr>
+              <a:spcAft>
+                <a:spcPts val="800"/>
+              </a:spcAft>
+            </a:pPr>
+            <a:r>
+              <a:rPr sz="2000">
+                <a:solidFill>
+                  <a:srgbClr val="0B0B0B"/>
+                </a:solidFill>
+                <a:latin typeface="Calibri"/>
+              </a:rPr>
+              <a:t>•  </a:t>
+            </a:r>
+            <a:r>
+              <a:rPr sz="2000" b="1">
+                <a:solidFill>
+                  <a:srgbClr val="0B0B0B"/>
+                </a:solidFill>
+                <a:latin typeface="Calibri"/>
+              </a:rPr>
+              <a:t>H1 — demand follows the gap:</a:t>
+            </a:r>
+            <a:r>
+              <a:rPr sz="2000">
+                <a:solidFill>
+                  <a:srgbClr val="0B0B0B"/>
+                </a:solidFill>
+                <a:latin typeface="Calibri"/>
+              </a:rPr>
+              <a:t> mean load </a:t>
+            </a:r>
+            <a:r>
+              <a:rPr sz="2000" b="1">
+                <a:solidFill>
+                  <a:srgbClr val="0B0B0B"/>
+                </a:solidFill>
+                <a:latin typeface="Calibri"/>
+              </a:rPr>
+              <a:t>9.1 → 17.9 passengers</a:t>
+            </a:r>
+            <a:r>
+              <a:rPr sz="2000">
+                <a:solidFill>
+                  <a:srgbClr val="0B0B0B"/>
+                </a:solidFill>
+                <a:latin typeface="Calibri"/>
+              </a:rPr>
+              <a:t> as headway grows (rho = 0.349, p &lt; 0.001)</a:t>
+            </a:r>
+          </a:p>
+          <a:p>
+            <a:pPr>
+              <a:spcAft>
+                <a:spcPts val="800"/>
+              </a:spcAft>
+            </a:pPr>
+            <a:r>
+              <a:rPr sz="2000">
+                <a:solidFill>
+                  <a:srgbClr val="0B0B0B"/>
+                </a:solidFill>
+                <a:latin typeface="Calibri"/>
+              </a:rPr>
+              <a:t>•  </a:t>
+            </a:r>
+            <a:r>
+              <a:rPr sz="2000" b="1">
+                <a:solidFill>
+                  <a:srgbClr val="0B0B0B"/>
+                </a:solidFill>
+                <a:latin typeface="Calibri"/>
+              </a:rPr>
+              <a:t>H2 — passengers cost time:</a:t>
+            </a:r>
+            <a:r>
+              <a:rPr sz="2000">
+                <a:solidFill>
+                  <a:srgbClr val="0B0B0B"/>
+                </a:solidFill>
+                <a:latin typeface="Calibri"/>
+              </a:rPr>
+              <a:t> </a:t>
+            </a:r>
+            <a:r>
+              <a:rPr sz="2000" b="1">
+                <a:solidFill>
+                  <a:srgbClr val="0B0B0B"/>
+                </a:solidFill>
+                <a:latin typeface="Calibri"/>
+              </a:rPr>
+              <a:t>+6.9 s per boarding</a:t>
+            </a:r>
+            <a:r>
+              <a:rPr sz="2000">
+                <a:solidFill>
+                  <a:srgbClr val="0B0B0B"/>
+                </a:solidFill>
+                <a:latin typeface="Calibri"/>
+              </a:rPr>
+              <a:t>, +3.7 s per alighting (n = 116,697, p &lt; 0.001)</a:t>
+            </a:r>
+          </a:p>
+          <a:p>
+            <a:pPr>
+              <a:spcAft>
+                <a:spcPts val="800"/>
+              </a:spcAft>
+            </a:pPr>
+            <a:r>
+              <a:rPr sz="2000">
+                <a:solidFill>
+                  <a:srgbClr val="0B0B0B"/>
+                </a:solidFill>
+                <a:latin typeface="Calibri"/>
+              </a:rPr>
+              <a:t>•  </a:t>
+            </a:r>
+            <a:r>
+              <a:rPr sz="2000" b="1">
+                <a:solidFill>
+                  <a:srgbClr val="0B0B0B"/>
+                </a:solidFill>
+                <a:latin typeface="Calibri"/>
+              </a:rPr>
+              <a:t>H3 — bunching builds up:</a:t>
+            </a:r>
+            <a:r>
+              <a:rPr sz="2000">
+                <a:solidFill>
+                  <a:srgbClr val="0B0B0B"/>
+                </a:solidFill>
+                <a:latin typeface="Calibri"/>
+              </a:rPr>
+              <a:t> headway irregularity </a:t>
+            </a:r>
+            <a:r>
+              <a:rPr sz="2000" b="1">
+                <a:solidFill>
+                  <a:srgbClr val="0B0B0B"/>
+                </a:solidFill>
+                <a:latin typeface="Calibri"/>
+              </a:rPr>
+              <a:t>CV 0.39 → 0.58</a:t>
+            </a:r>
+            <a:r>
+              <a:rPr sz="2000">
+                <a:solidFill>
+                  <a:srgbClr val="0B0B0B"/>
+                </a:solidFill>
+                <a:latin typeface="Calibri"/>
+              </a:rPr>
+              <a:t> along the route (rho = 0.955, p &lt; 0.001)</a:t>
+            </a:r>
+          </a:p>
+          <a:p>
+            <a:pPr>
+              <a:spcAft>
+                <a:spcPts val="800"/>
+              </a:spcAft>
+            </a:pPr>
+            <a:r>
+              <a:rPr sz="2000">
+                <a:solidFill>
+                  <a:srgbClr val="0B0B0B"/>
+                </a:solidFill>
+                <a:latin typeface="Calibri"/>
+              </a:rPr>
+              <a:t>•  </a:t>
+            </a:r>
+            <a:r>
+              <a:rPr sz="2000" b="1">
+                <a:solidFill>
+                  <a:srgbClr val="0B0B0B"/>
+                </a:solidFill>
+                <a:latin typeface="Calibri"/>
+              </a:rPr>
+              <a:t>All three hypotheses are supported</a:t>
+            </a:r>
+            <a:r>
+              <a:rPr sz="2000">
+                <a:solidFill>
+                  <a:srgbClr val="0B0B0B"/>
+                </a:solidFill>
+                <a:latin typeface="Calibri"/>
+              </a:rPr>
+              <a:t> at alpha = 0.05</a:t>
+            </a:r>
+          </a:p>
+        </p:txBody>
+      </p:sp>
+    </p:spTree>
+  </p:cSld>
+  <p:clrMapOvr>
+    <a:masterClrMapping/>
+  </p:clrMapOvr>
+</p:sld>
+</file>
+
+<file path=ppt/slides/slide19.xml><?xml version="1.0" encoding="utf-8"?>
+<p:sld xmlns:a="http://schemas.openxmlformats.org/drawingml/2006/main" xmlns:p="http://schemas.openxmlformats.org/presentationml/2006/main" xmlns:r="http://schemas.openxmlformats.org/officeDocument/2006/relationships">
+  <p:cSld>
+    <p:spTree>
+      <p:nvGrpSpPr>
+        <p:cNvPr id="1" name=""/>
+        <p:cNvGrpSpPr/>
+        <p:nvPr/>
+      </p:nvGrpSpPr>
+      <p:grpSpPr/>
+      <p:sp>
+        <p:nvSpPr>
+          <p:cNvPr id="2" name="Rectangle 1"/>
+          <p:cNvSpPr/>
+          <p:nvPr/>
+        </p:nvSpPr>
+        <p:spPr>
+          <a:xfrm>
+            <a:off x="0" y="0"/>
+            <a:ext cx="12191695" cy="109728"/>
+          </a:xfrm>
+          <a:prstGeom prst="rect">
+            <a:avLst/>
+          </a:prstGeom>
+          <a:solidFill>
+            <a:srgbClr val="2A78D6"/>
+          </a:solidFill>
+          <a:ln>
+            <a:noFill/>
+          </a:ln>
+        </p:spPr>
+        <p:style>
+          <a:lnRef idx="1">
+            <a:schemeClr val="accent1"/>
+          </a:lnRef>
+          <a:fillRef idx="3">
+            <a:schemeClr val="accent1"/>
+          </a:fillRef>
+          <a:effectRef idx="2">
+            <a:schemeClr val="accent1"/>
+          </a:effectRef>
+          <a:fontRef idx="minor">
+            <a:schemeClr val="lt1"/>
+          </a:fontRef>
+        </p:style>
+        <p:txBody>
+          <a:bodyPr rtlCol="0" anchor="ctr"/>
+          <a:lstStyle/>
+          <a:p>
+            <a:pPr algn="ctr"/>
+          </a:p>
+        </p:txBody>
+      </p:sp>
+      <p:sp>
+        <p:nvSpPr>
+          <p:cNvPr id="3" name="TextBox 2"/>
+          <p:cNvSpPr txBox="1"/>
+          <p:nvPr/>
+        </p:nvSpPr>
+        <p:spPr>
+          <a:xfrm>
+            <a:off x="548640" y="292608"/>
+            <a:ext cx="11094415" cy="320040"/>
+          </a:xfrm>
+          <a:prstGeom prst="rect">
+            <a:avLst/>
+          </a:prstGeom>
+          <a:noFill/>
+        </p:spPr>
+        <p:txBody>
+          <a:bodyPr wrap="square" anchor="t" lIns="45720" rIns="45720">
+            <a:spAutoFit/>
+          </a:bodyPr>
+          <a:lstStyle/>
+          <a:p>
+            <a:r>
+              <a:rPr sz="1200" b="1">
+                <a:solidFill>
+                  <a:srgbClr val="2A78D6"/>
+                </a:solidFill>
+                <a:latin typeface="Calibri"/>
+              </a:rPr>
+              <a:t>CONCLUSION</a:t>
+            </a:r>
+          </a:p>
+        </p:txBody>
+      </p:sp>
+      <p:sp>
+        <p:nvSpPr>
+          <p:cNvPr id="4" name="TextBox 3"/>
+          <p:cNvSpPr txBox="1"/>
+          <p:nvPr/>
+        </p:nvSpPr>
+        <p:spPr>
+          <a:xfrm>
+            <a:off x="548640" y="566928"/>
+            <a:ext cx="11094415" cy="731520"/>
+          </a:xfrm>
+          <a:prstGeom prst="rect">
+            <a:avLst/>
+          </a:prstGeom>
+          <a:noFill/>
+        </p:spPr>
+        <p:txBody>
+          <a:bodyPr wrap="square" anchor="t" lIns="45720" rIns="45720">
+            <a:spAutoFit/>
+          </a:bodyPr>
+          <a:lstStyle/>
+          <a:p>
+            <a:r>
+              <a:rPr sz="2800" b="1">
+                <a:solidFill>
+                  <a:srgbClr val="0B0B0B"/>
+                </a:solidFill>
+                <a:latin typeface="Calibri"/>
+              </a:rPr>
+              <a:t>Conclusion and recommendation</a:t>
+            </a:r>
+          </a:p>
+        </p:txBody>
+      </p:sp>
+      <p:sp>
+        <p:nvSpPr>
+          <p:cNvPr id="5" name="TextBox 4"/>
+          <p:cNvSpPr txBox="1"/>
+          <p:nvPr/>
+        </p:nvSpPr>
+        <p:spPr>
+          <a:xfrm>
+            <a:off x="548640" y="6446520"/>
+            <a:ext cx="11094415" cy="274320"/>
+          </a:xfrm>
+          <a:prstGeom prst="rect">
+            <a:avLst/>
+          </a:prstGeom>
+          <a:noFill/>
+        </p:spPr>
+        <p:txBody>
+          <a:bodyPr wrap="square" anchor="t" lIns="45720" rIns="45720">
+            <a:spAutoFit/>
+          </a:bodyPr>
+          <a:lstStyle/>
+          <a:p>
+            <a:r>
+              <a:rPr sz="1000">
+                <a:solidFill>
+                  <a:srgbClr val="52514E"/>
+                </a:solidFill>
+                <a:latin typeface="Calibri"/>
+              </a:rPr>
+              <a:t>ELE IDSA Project 1 · GEC2B</a:t>
+            </a:r>
+          </a:p>
+        </p:txBody>
+      </p:sp>
+      <p:sp>
+        <p:nvSpPr>
+          <p:cNvPr id="6" name="TextBox 5"/>
+          <p:cNvSpPr txBox="1"/>
+          <p:nvPr/>
+        </p:nvSpPr>
+        <p:spPr>
+          <a:xfrm>
+            <a:off x="10728655" y="6446520"/>
+            <a:ext cx="914400" cy="274320"/>
+          </a:xfrm>
+          <a:prstGeom prst="rect">
+            <a:avLst/>
+          </a:prstGeom>
+          <a:noFill/>
+        </p:spPr>
+        <p:txBody>
+          <a:bodyPr wrap="square" anchor="t" lIns="45720" rIns="45720">
+            <a:spAutoFit/>
+          </a:bodyPr>
+          <a:lstStyle/>
+          <a:p>
+            <a:pPr algn="r"/>
+            <a:r>
+              <a:rPr sz="1000">
+                <a:solidFill>
+                  <a:srgbClr val="52514E"/>
+                </a:solidFill>
+                <a:latin typeface="Calibri"/>
+              </a:rPr>
+              <a:t>19</a:t>
             </a:r>
           </a:p>
         </p:txBody>
@@ -6583,7 +7442,7 @@
                 </a:solidFill>
                 <a:latin typeface="Calibri"/>
               </a:rPr>
-              <a:t>Introduction</a:t>
+              <a:t>Background</a:t>
             </a:r>
           </a:p>
         </p:txBody>
@@ -6691,7 +7550,127 @@
                 </a:solidFill>
                 <a:latin typeface="Calibri"/>
               </a:rPr>
-              <a:t>•  [Section pending: Elijah]</a:t>
+              <a:t>•  </a:t>
+            </a:r>
+            <a:r>
+              <a:rPr sz="2000" b="1">
+                <a:solidFill>
+                  <a:srgbClr val="0B0B0B"/>
+                </a:solidFill>
+                <a:latin typeface="Calibri"/>
+              </a:rPr>
+              <a:t>Data:</a:t>
+            </a:r>
+            <a:r>
+              <a:rPr sz="2000">
+                <a:solidFill>
+                  <a:srgbClr val="0B0B0B"/>
+                </a:solidFill>
+                <a:latin typeface="Calibri"/>
+              </a:rPr>
+              <a:t> CapMetro (Austin, Texas) automatic passenger counter (APC) records, Texas Open Data Portal, free and public</a:t>
+            </a:r>
+          </a:p>
+          <a:p>
+            <a:pPr>
+              <a:spcAft>
+                <a:spcPts val="800"/>
+              </a:spcAft>
+            </a:pPr>
+            <a:r>
+              <a:rPr sz="2000">
+                <a:solidFill>
+                  <a:srgbClr val="0B0B0B"/>
+                </a:solidFill>
+                <a:latin typeface="Calibri"/>
+              </a:rPr>
+              <a:t>•  </a:t>
+            </a:r>
+            <a:r>
+              <a:rPr sz="2000" b="1">
+                <a:solidFill>
+                  <a:srgbClr val="0B0B0B"/>
+                </a:solidFill>
+                <a:latin typeface="Calibri"/>
+              </a:rPr>
+              <a:t>Route 801 (CapMetro Rapid):</a:t>
+            </a:r>
+            <a:r>
+              <a:rPr sz="2000">
+                <a:solidFill>
+                  <a:srgbClr val="0B0B0B"/>
+                </a:solidFill>
+                <a:latin typeface="Calibri"/>
+              </a:rPr>
+              <a:t> scheduled every </a:t>
+            </a:r>
+            <a:r>
+              <a:rPr sz="2000" b="1">
+                <a:solidFill>
+                  <a:srgbClr val="0B0B0B"/>
+                </a:solidFill>
+                <a:latin typeface="Calibri"/>
+              </a:rPr>
+              <a:t>10 minutes</a:t>
+            </a:r>
+            <a:r>
+              <a:rPr sz="2000">
+                <a:solidFill>
+                  <a:srgbClr val="0B0B0B"/>
+                </a:solidFill>
+                <a:latin typeface="Calibri"/>
+              </a:rPr>
+              <a:t> on weekdays 7:00–18:00</a:t>
+            </a:r>
+          </a:p>
+          <a:p>
+            <a:pPr>
+              <a:spcAft>
+                <a:spcPts val="800"/>
+              </a:spcAft>
+            </a:pPr>
+            <a:r>
+              <a:rPr sz="2000">
+                <a:solidFill>
+                  <a:srgbClr val="0B0B0B"/>
+                </a:solidFill>
+                <a:latin typeface="Calibri"/>
+              </a:rPr>
+              <a:t>•  </a:t>
+            </a:r>
+            <a:r>
+              <a:rPr sz="2000" b="1">
+                <a:solidFill>
+                  <a:srgbClr val="0B0B0B"/>
+                </a:solidFill>
+                <a:latin typeface="Calibri"/>
+              </a:rPr>
+              <a:t>Bus bunching:</a:t>
+            </a:r>
+            <a:r>
+              <a:rPr sz="2000">
+                <a:solidFill>
+                  <a:srgbClr val="0B0B0B"/>
+                </a:solidFill>
+                <a:latin typeface="Calibri"/>
+              </a:rPr>
+              <a:t> buses lose their even spacing and arrive in pairs, then a long gap</a:t>
+            </a:r>
+          </a:p>
+          <a:p>
+            <a:pPr>
+              <a:spcAft>
+                <a:spcPts val="800"/>
+              </a:spcAft>
+            </a:pPr>
+            <a:r>
+              <a:rPr sz="2000">
+                <a:solidFill>
+                  <a:srgbClr val="0B0B0B"/>
+                </a:solidFill>
+                <a:latin typeface="Calibri"/>
+              </a:rPr>
+              <a:t>•  A late bus finds more riders, dwells longer and falls further behind, while the bus behind catches up</a:t>
             </a:r>
           </a:p>
         </p:txBody>
@@ -6786,7 +7765,7 @@
                 </a:solidFill>
                 <a:latin typeface="Calibri"/>
               </a:rPr>
-              <a:t>METHODOLOGY</a:t>
+              <a:t>INTRODUCTION</a:t>
             </a:r>
           </a:p>
         </p:txBody>
@@ -6820,7 +7799,7 @@
                 </a:solidFill>
                 <a:latin typeface="Calibri"/>
               </a:rPr>
-              <a:t>Data source</a:t>
+              <a:t>Motivation and hypotheses</a:t>
             </a:r>
           </a:p>
         </p:txBody>
@@ -6928,61 +7907,7 @@
                 </a:solidFill>
                 <a:latin typeface="Calibri"/>
               </a:rPr>
-              <a:t>•  </a:t>
-            </a:r>
-            <a:r>
-              <a:rPr sz="2000" b="1">
-                <a:solidFill>
-                  <a:srgbClr val="0B0B0B"/>
-                </a:solidFill>
-                <a:latin typeface="Calibri"/>
-              </a:rPr>
-              <a:t>CapMetro</a:t>
-            </a:r>
-            <a:r>
-              <a:rPr sz="2000">
-                <a:solidFill>
-                  <a:srgbClr val="0B0B0B"/>
-                </a:solidFill>
-                <a:latin typeface="Calibri"/>
-              </a:rPr>
-              <a:t> (Austin, Texas) </a:t>
-            </a:r>
-            <a:r>
-              <a:rPr sz="2000" i="1">
-                <a:solidFill>
-                  <a:srgbClr val="0B0B0B"/>
-                </a:solidFill>
-                <a:latin typeface="Calibri"/>
-              </a:rPr>
-              <a:t>APC Raw July–December 2021</a:t>
-            </a:r>
-            <a:r>
-              <a:rPr sz="2000">
-                <a:solidFill>
-                  <a:srgbClr val="0B0B0B"/>
-                </a:solidFill>
-                <a:latin typeface="Calibri"/>
-              </a:rPr>
-              <a:t>, Texas Open Data Portal (</a:t>
-            </a:r>
-            <a:r>
-              <a:rPr sz="2000">
-                <a:solidFill>
-                  <a:srgbClr val="0B0B0B"/>
-                </a:solidFill>
-                <a:latin typeface="Calibri"/>
-              </a:rPr>
-              <a:t>im6q-3pc9</a:t>
-            </a:r>
-            <a:r>
-              <a:rPr sz="2000">
-                <a:solidFill>
-                  <a:srgbClr val="0B0B0B"/>
-                </a:solidFill>
-                <a:latin typeface="Calibri"/>
-              </a:rPr>
-              <a:t>), free to download</a:t>
+              <a:t>•  Bunching makes riders wait longer and crowds some buses while others run nearly empty</a:t>
             </a:r>
           </a:p>
           <a:p>
@@ -6998,25 +7923,7 @@
                 </a:solidFill>
                 <a:latin typeface="Calibri"/>
               </a:rPr>
-              <a:t>•  </a:t>
-            </a:r>
-            <a:r>
-              <a:rPr sz="2000" b="1">
-                <a:solidFill>
-                  <a:srgbClr val="0B0B0B"/>
-                </a:solidFill>
-                <a:latin typeface="Calibri"/>
-              </a:rPr>
-              <a:t>APC</a:t>
-            </a:r>
-            <a:r>
-              <a:rPr sz="2000">
-                <a:solidFill>
-                  <a:srgbClr val="0B0B0B"/>
-                </a:solidFill>
-                <a:latin typeface="Calibri"/>
-              </a:rPr>
-              <a:t> = automatic passenger counters: door sensors count boardings and alightings; GPS and clock record each stop</a:t>
+              <a:t>•  The dataset is large (229,421 stop records), real and stop-level, so bunching can be measured directly</a:t>
             </a:r>
           </a:p>
           <a:p>
@@ -7041,7 +7948,7 @@
                 </a:solidFill>
                 <a:latin typeface="Calibri"/>
               </a:rPr>
-              <a:t>One row = one bus at one stop</a:t>
+              <a:t>H1:</a:t>
             </a:r>
             <a:r>
               <a:rPr sz="2000">
@@ -7050,7 +7957,7 @@
                 </a:solidFill>
                 <a:latin typeface="Calibri"/>
               </a:rPr>
-              <a:t>; raw file: 9,197,694 rows × 47 columns, all routes</a:t>
+              <a:t> Buses with a longer gap behind the bus ahead (headway) carry more passengers.</a:t>
             </a:r>
           </a:p>
           <a:p>
@@ -7075,7 +7982,7 @@
                 </a:solidFill>
                 <a:latin typeface="Calibri"/>
               </a:rPr>
-              <a:t>Study subset:</a:t>
+              <a:t>H2:</a:t>
             </a:r>
             <a:r>
               <a:rPr sz="2000">
@@ -7084,7 +7991,7 @@
                 </a:solidFill>
                 <a:latin typeface="Calibri"/>
               </a:rPr>
-              <a:t> Route 801 southbound, Jul 1 – Dec 30, 2021: 229,421 records, 29 stops, 143 buses</a:t>
+              <a:t> The more people board and alight, the longer the bus stays at the stop (dwell time).</a:t>
             </a:r>
           </a:p>
           <a:p>
@@ -7109,7 +8016,7 @@
                 </a:solidFill>
                 <a:latin typeface="Calibri"/>
               </a:rPr>
-              <a:t>Tools:</a:t>
+              <a:t>H3:</a:t>
             </a:r>
             <a:r>
               <a:rPr sz="2000">
@@ -7118,7 +8025,7 @@
                 </a:solidFill>
                 <a:latin typeface="Calibri"/>
               </a:rPr>
-              <a:t> Python (pandas, Matplotlib, SciPy, statsmodels)</a:t>
+              <a:t> Headways become more irregular further along the route (bunching builds up).</a:t>
             </a:r>
           </a:p>
         </p:txBody>
@@ -7247,7 +8154,7 @@
                 </a:solidFill>
                 <a:latin typeface="Calibri"/>
               </a:rPr>
-              <a:t>Parameters used to segregate the data</a:t>
+              <a:t>Data source</a:t>
             </a:r>
           </a:p>
         </p:txBody>
@@ -7317,6 +8224,433 @@
                 <a:latin typeface="Calibri"/>
               </a:rPr>
               <a:t>4</a:t>
+            </a:r>
+          </a:p>
+        </p:txBody>
+      </p:sp>
+      <p:sp>
+        <p:nvSpPr>
+          <p:cNvPr id="7" name="TextBox 6"/>
+          <p:cNvSpPr txBox="1"/>
+          <p:nvPr/>
+        </p:nvSpPr>
+        <p:spPr>
+          <a:xfrm>
+            <a:off x="548640" y="1508760"/>
+            <a:ext cx="11094415" cy="4663440"/>
+          </a:xfrm>
+          <a:prstGeom prst="rect">
+            <a:avLst/>
+          </a:prstGeom>
+          <a:noFill/>
+        </p:spPr>
+        <p:txBody>
+          <a:bodyPr wrap="square" anchor="t" lIns="45720" rIns="45720">
+            <a:spAutoFit/>
+          </a:bodyPr>
+          <a:lstStyle/>
+          <a:p>
+            <a:pPr>
+              <a:spcAft>
+                <a:spcPts val="800"/>
+              </a:spcAft>
+            </a:pPr>
+            <a:r>
+              <a:rPr sz="2000">
+                <a:solidFill>
+                  <a:srgbClr val="0B0B0B"/>
+                </a:solidFill>
+                <a:latin typeface="Calibri"/>
+              </a:rPr>
+              <a:t>•  </a:t>
+            </a:r>
+            <a:r>
+              <a:rPr sz="2000" b="1">
+                <a:solidFill>
+                  <a:srgbClr val="0B0B0B"/>
+                </a:solidFill>
+                <a:latin typeface="Calibri"/>
+              </a:rPr>
+              <a:t>CapMetro</a:t>
+            </a:r>
+            <a:r>
+              <a:rPr sz="2000">
+                <a:solidFill>
+                  <a:srgbClr val="0B0B0B"/>
+                </a:solidFill>
+                <a:latin typeface="Calibri"/>
+              </a:rPr>
+              <a:t> (Austin, Texas) </a:t>
+            </a:r>
+            <a:r>
+              <a:rPr sz="2000" i="1">
+                <a:solidFill>
+                  <a:srgbClr val="0B0B0B"/>
+                </a:solidFill>
+                <a:latin typeface="Calibri"/>
+              </a:rPr>
+              <a:t>APC Raw July–December 2021</a:t>
+            </a:r>
+            <a:r>
+              <a:rPr sz="2000">
+                <a:solidFill>
+                  <a:srgbClr val="0B0B0B"/>
+                </a:solidFill>
+                <a:latin typeface="Calibri"/>
+              </a:rPr>
+              <a:t>, Texas Open Data Portal (</a:t>
+            </a:r>
+            <a:r>
+              <a:rPr sz="2000">
+                <a:solidFill>
+                  <a:srgbClr val="0B0B0B"/>
+                </a:solidFill>
+                <a:latin typeface="Calibri"/>
+              </a:rPr>
+              <a:t>im6q-3pc9</a:t>
+            </a:r>
+            <a:r>
+              <a:rPr sz="2000">
+                <a:solidFill>
+                  <a:srgbClr val="0B0B0B"/>
+                </a:solidFill>
+                <a:latin typeface="Calibri"/>
+              </a:rPr>
+              <a:t>), free to download</a:t>
+            </a:r>
+          </a:p>
+          <a:p>
+            <a:pPr>
+              <a:spcAft>
+                <a:spcPts val="800"/>
+              </a:spcAft>
+            </a:pPr>
+            <a:r>
+              <a:rPr sz="2000">
+                <a:solidFill>
+                  <a:srgbClr val="0B0B0B"/>
+                </a:solidFill>
+                <a:latin typeface="Calibri"/>
+              </a:rPr>
+              <a:t>•  </a:t>
+            </a:r>
+            <a:r>
+              <a:rPr sz="2000" b="1">
+                <a:solidFill>
+                  <a:srgbClr val="0B0B0B"/>
+                </a:solidFill>
+                <a:latin typeface="Calibri"/>
+              </a:rPr>
+              <a:t>APC</a:t>
+            </a:r>
+            <a:r>
+              <a:rPr sz="2000">
+                <a:solidFill>
+                  <a:srgbClr val="0B0B0B"/>
+                </a:solidFill>
+                <a:latin typeface="Calibri"/>
+              </a:rPr>
+              <a:t> = automatic passenger counters: door sensors count boardings and alightings; GPS and clock record each stop</a:t>
+            </a:r>
+          </a:p>
+          <a:p>
+            <a:pPr>
+              <a:spcAft>
+                <a:spcPts val="800"/>
+              </a:spcAft>
+            </a:pPr>
+            <a:r>
+              <a:rPr sz="2000">
+                <a:solidFill>
+                  <a:srgbClr val="0B0B0B"/>
+                </a:solidFill>
+                <a:latin typeface="Calibri"/>
+              </a:rPr>
+              <a:t>•  </a:t>
+            </a:r>
+            <a:r>
+              <a:rPr sz="2000" b="1">
+                <a:solidFill>
+                  <a:srgbClr val="0B0B0B"/>
+                </a:solidFill>
+                <a:latin typeface="Calibri"/>
+              </a:rPr>
+              <a:t>One row = one bus at one stop</a:t>
+            </a:r>
+            <a:r>
+              <a:rPr sz="2000">
+                <a:solidFill>
+                  <a:srgbClr val="0B0B0B"/>
+                </a:solidFill>
+                <a:latin typeface="Calibri"/>
+              </a:rPr>
+              <a:t>; raw file: 9,197,694 rows × 47 columns, all routes</a:t>
+            </a:r>
+          </a:p>
+          <a:p>
+            <a:pPr>
+              <a:spcAft>
+                <a:spcPts val="800"/>
+              </a:spcAft>
+            </a:pPr>
+            <a:r>
+              <a:rPr sz="2000">
+                <a:solidFill>
+                  <a:srgbClr val="0B0B0B"/>
+                </a:solidFill>
+                <a:latin typeface="Calibri"/>
+              </a:rPr>
+              <a:t>•  </a:t>
+            </a:r>
+            <a:r>
+              <a:rPr sz="2000" b="1">
+                <a:solidFill>
+                  <a:srgbClr val="0B0B0B"/>
+                </a:solidFill>
+                <a:latin typeface="Calibri"/>
+              </a:rPr>
+              <a:t>Study subset:</a:t>
+            </a:r>
+            <a:r>
+              <a:rPr sz="2000">
+                <a:solidFill>
+                  <a:srgbClr val="0B0B0B"/>
+                </a:solidFill>
+                <a:latin typeface="Calibri"/>
+              </a:rPr>
+              <a:t> Route 801 southbound, Jul 1 – Dec 30, 2021: 229,421 records, 29 stops, 143 buses</a:t>
+            </a:r>
+          </a:p>
+          <a:p>
+            <a:pPr>
+              <a:spcAft>
+                <a:spcPts val="800"/>
+              </a:spcAft>
+            </a:pPr>
+            <a:r>
+              <a:rPr sz="2000">
+                <a:solidFill>
+                  <a:srgbClr val="0B0B0B"/>
+                </a:solidFill>
+                <a:latin typeface="Calibri"/>
+              </a:rPr>
+              <a:t>•  </a:t>
+            </a:r>
+            <a:r>
+              <a:rPr sz="2000" b="1">
+                <a:solidFill>
+                  <a:srgbClr val="0B0B0B"/>
+                </a:solidFill>
+                <a:latin typeface="Calibri"/>
+              </a:rPr>
+              <a:t>Tools:</a:t>
+            </a:r>
+            <a:r>
+              <a:rPr sz="2000">
+                <a:solidFill>
+                  <a:srgbClr val="0B0B0B"/>
+                </a:solidFill>
+                <a:latin typeface="Calibri"/>
+              </a:rPr>
+              <a:t> Python (pandas, Matplotlib, SciPy, statsmodels)</a:t>
+            </a:r>
+          </a:p>
+        </p:txBody>
+      </p:sp>
+    </p:spTree>
+  </p:cSld>
+  <p:clrMapOvr>
+    <a:masterClrMapping/>
+  </p:clrMapOvr>
+</p:sld>
+</file>
+
+<file path=ppt/slides/slide5.xml><?xml version="1.0" encoding="utf-8"?>
+<p:sld xmlns:a="http://schemas.openxmlformats.org/drawingml/2006/main" xmlns:p="http://schemas.openxmlformats.org/presentationml/2006/main" xmlns:r="http://schemas.openxmlformats.org/officeDocument/2006/relationships">
+  <p:cSld>
+    <p:spTree>
+      <p:nvGrpSpPr>
+        <p:cNvPr id="1" name=""/>
+        <p:cNvGrpSpPr/>
+        <p:nvPr/>
+      </p:nvGrpSpPr>
+      <p:grpSpPr/>
+      <p:sp>
+        <p:nvSpPr>
+          <p:cNvPr id="2" name="Rectangle 1"/>
+          <p:cNvSpPr/>
+          <p:nvPr/>
+        </p:nvSpPr>
+        <p:spPr>
+          <a:xfrm>
+            <a:off x="0" y="0"/>
+            <a:ext cx="12191695" cy="109728"/>
+          </a:xfrm>
+          <a:prstGeom prst="rect">
+            <a:avLst/>
+          </a:prstGeom>
+          <a:solidFill>
+            <a:srgbClr val="2A78D6"/>
+          </a:solidFill>
+          <a:ln>
+            <a:noFill/>
+          </a:ln>
+        </p:spPr>
+        <p:style>
+          <a:lnRef idx="1">
+            <a:schemeClr val="accent1"/>
+          </a:lnRef>
+          <a:fillRef idx="3">
+            <a:schemeClr val="accent1"/>
+          </a:fillRef>
+          <a:effectRef idx="2">
+            <a:schemeClr val="accent1"/>
+          </a:effectRef>
+          <a:fontRef idx="minor">
+            <a:schemeClr val="lt1"/>
+          </a:fontRef>
+        </p:style>
+        <p:txBody>
+          <a:bodyPr rtlCol="0" anchor="ctr"/>
+          <a:lstStyle/>
+          <a:p>
+            <a:pPr algn="ctr"/>
+          </a:p>
+        </p:txBody>
+      </p:sp>
+      <p:sp>
+        <p:nvSpPr>
+          <p:cNvPr id="3" name="TextBox 2"/>
+          <p:cNvSpPr txBox="1"/>
+          <p:nvPr/>
+        </p:nvSpPr>
+        <p:spPr>
+          <a:xfrm>
+            <a:off x="548640" y="292608"/>
+            <a:ext cx="11094415" cy="320040"/>
+          </a:xfrm>
+          <a:prstGeom prst="rect">
+            <a:avLst/>
+          </a:prstGeom>
+          <a:noFill/>
+        </p:spPr>
+        <p:txBody>
+          <a:bodyPr wrap="square" anchor="t" lIns="45720" rIns="45720">
+            <a:spAutoFit/>
+          </a:bodyPr>
+          <a:lstStyle/>
+          <a:p>
+            <a:r>
+              <a:rPr sz="1200" b="1">
+                <a:solidFill>
+                  <a:srgbClr val="2A78D6"/>
+                </a:solidFill>
+                <a:latin typeface="Calibri"/>
+              </a:rPr>
+              <a:t>METHODOLOGY</a:t>
+            </a:r>
+          </a:p>
+        </p:txBody>
+      </p:sp>
+      <p:sp>
+        <p:nvSpPr>
+          <p:cNvPr id="4" name="TextBox 3"/>
+          <p:cNvSpPr txBox="1"/>
+          <p:nvPr/>
+        </p:nvSpPr>
+        <p:spPr>
+          <a:xfrm>
+            <a:off x="548640" y="566928"/>
+            <a:ext cx="11094415" cy="731520"/>
+          </a:xfrm>
+          <a:prstGeom prst="rect">
+            <a:avLst/>
+          </a:prstGeom>
+          <a:noFill/>
+        </p:spPr>
+        <p:txBody>
+          <a:bodyPr wrap="square" anchor="t" lIns="45720" rIns="45720">
+            <a:spAutoFit/>
+          </a:bodyPr>
+          <a:lstStyle/>
+          <a:p>
+            <a:r>
+              <a:rPr sz="2800" b="1">
+                <a:solidFill>
+                  <a:srgbClr val="0B0B0B"/>
+                </a:solidFill>
+                <a:latin typeface="Calibri"/>
+              </a:rPr>
+              <a:t>Parameters used to segregate the data</a:t>
+            </a:r>
+          </a:p>
+        </p:txBody>
+      </p:sp>
+      <p:sp>
+        <p:nvSpPr>
+          <p:cNvPr id="5" name="TextBox 4"/>
+          <p:cNvSpPr txBox="1"/>
+          <p:nvPr/>
+        </p:nvSpPr>
+        <p:spPr>
+          <a:xfrm>
+            <a:off x="548640" y="6446520"/>
+            <a:ext cx="11094415" cy="274320"/>
+          </a:xfrm>
+          <a:prstGeom prst="rect">
+            <a:avLst/>
+          </a:prstGeom>
+          <a:noFill/>
+        </p:spPr>
+        <p:txBody>
+          <a:bodyPr wrap="square" anchor="t" lIns="45720" rIns="45720">
+            <a:spAutoFit/>
+          </a:bodyPr>
+          <a:lstStyle/>
+          <a:p>
+            <a:r>
+              <a:rPr sz="1000">
+                <a:solidFill>
+                  <a:srgbClr val="52514E"/>
+                </a:solidFill>
+                <a:latin typeface="Calibri"/>
+              </a:rPr>
+              <a:t>ELE IDSA Project 1 · GEC2B</a:t>
+            </a:r>
+          </a:p>
+        </p:txBody>
+      </p:sp>
+      <p:sp>
+        <p:nvSpPr>
+          <p:cNvPr id="6" name="TextBox 5"/>
+          <p:cNvSpPr txBox="1"/>
+          <p:nvPr/>
+        </p:nvSpPr>
+        <p:spPr>
+          <a:xfrm>
+            <a:off x="10728655" y="6446520"/>
+            <a:ext cx="914400" cy="274320"/>
+          </a:xfrm>
+          <a:prstGeom prst="rect">
+            <a:avLst/>
+          </a:prstGeom>
+          <a:noFill/>
+        </p:spPr>
+        <p:txBody>
+          <a:bodyPr wrap="square" anchor="t" lIns="45720" rIns="45720">
+            <a:spAutoFit/>
+          </a:bodyPr>
+          <a:lstStyle/>
+          <a:p>
+            <a:pPr algn="r"/>
+            <a:r>
+              <a:rPr sz="1000">
+                <a:solidFill>
+                  <a:srgbClr val="52514E"/>
+                </a:solidFill>
+                <a:latin typeface="Calibri"/>
+              </a:rPr>
+              <a:t>5</a:t>
             </a:r>
           </a:p>
         </p:txBody>
@@ -7900,7 +9234,7 @@
 </p:sld>
 </file>
 
-<file path=ppt/slides/slide5.xml><?xml version="1.0" encoding="utf-8"?>
+<file path=ppt/slides/slide6.xml><?xml version="1.0" encoding="utf-8"?>
 <p:sld xmlns:a="http://schemas.openxmlformats.org/drawingml/2006/main" xmlns:p="http://schemas.openxmlformats.org/presentationml/2006/main" xmlns:r="http://schemas.openxmlformats.org/officeDocument/2006/relationships">
   <p:cSld>
     <p:spTree>
@@ -8085,7 +9419,7 @@
                 </a:solidFill>
                 <a:latin typeface="Calibri"/>
               </a:rPr>
-              <a:t>5</a:t>
+              <a:t>6</a:t>
             </a:r>
           </a:p>
         </p:txBody>
@@ -8635,7 +9969,7 @@
 </p:sld>
 </file>
 
-<file path=ppt/slides/slide6.xml><?xml version="1.0" encoding="utf-8"?>
+<file path=ppt/slides/slide7.xml><?xml version="1.0" encoding="utf-8"?>
 <p:sld xmlns:a="http://schemas.openxmlformats.org/drawingml/2006/main" xmlns:p="http://schemas.openxmlformats.org/presentationml/2006/main" xmlns:r="http://schemas.openxmlformats.org/officeDocument/2006/relationships">
   <p:cSld>
     <p:spTree>
@@ -8820,7 +10154,7 @@
                 </a:solidFill>
                 <a:latin typeface="Calibri"/>
               </a:rPr>
-              <a:t>6</a:t>
+              <a:t>7</a:t>
             </a:r>
           </a:p>
         </p:txBody>
@@ -9038,243 +10372,6 @@
                 <a:latin typeface="Calibri"/>
               </a:rPr>
               <a:t> kept only between buses scheduled 10 min apart, so unrecorded trips don't create fake gaps (51,437 valid)</a:t>
-            </a:r>
-          </a:p>
-        </p:txBody>
-      </p:sp>
-    </p:spTree>
-  </p:cSld>
-  <p:clrMapOvr>
-    <a:masterClrMapping/>
-  </p:clrMapOvr>
-</p:sld>
-</file>
-
-<file path=ppt/slides/slide7.xml><?xml version="1.0" encoding="utf-8"?>
-<p:sld xmlns:a="http://schemas.openxmlformats.org/drawingml/2006/main" xmlns:p="http://schemas.openxmlformats.org/presentationml/2006/main" xmlns:r="http://schemas.openxmlformats.org/officeDocument/2006/relationships">
-  <p:cSld>
-    <p:spTree>
-      <p:nvGrpSpPr>
-        <p:cNvPr id="1" name=""/>
-        <p:cNvGrpSpPr/>
-        <p:nvPr/>
-      </p:nvGrpSpPr>
-      <p:grpSpPr/>
-      <p:sp>
-        <p:nvSpPr>
-          <p:cNvPr id="2" name="Rectangle 1"/>
-          <p:cNvSpPr/>
-          <p:nvPr/>
-        </p:nvSpPr>
-        <p:spPr>
-          <a:xfrm>
-            <a:off x="0" y="0"/>
-            <a:ext cx="12191695" cy="109728"/>
-          </a:xfrm>
-          <a:prstGeom prst="rect">
-            <a:avLst/>
-          </a:prstGeom>
-          <a:solidFill>
-            <a:srgbClr val="2A78D6"/>
-          </a:solidFill>
-          <a:ln>
-            <a:noFill/>
-          </a:ln>
-        </p:spPr>
-        <p:style>
-          <a:lnRef idx="1">
-            <a:schemeClr val="accent1"/>
-          </a:lnRef>
-          <a:fillRef idx="3">
-            <a:schemeClr val="accent1"/>
-          </a:fillRef>
-          <a:effectRef idx="2">
-            <a:schemeClr val="accent1"/>
-          </a:effectRef>
-          <a:fontRef idx="minor">
-            <a:schemeClr val="lt1"/>
-          </a:fontRef>
-        </p:style>
-        <p:txBody>
-          <a:bodyPr rtlCol="0" anchor="ctr"/>
-          <a:lstStyle/>
-          <a:p>
-            <a:pPr algn="ctr"/>
-          </a:p>
-        </p:txBody>
-      </p:sp>
-      <p:sp>
-        <p:nvSpPr>
-          <p:cNvPr id="3" name="TextBox 2"/>
-          <p:cNvSpPr txBox="1"/>
-          <p:nvPr/>
-        </p:nvSpPr>
-        <p:spPr>
-          <a:xfrm>
-            <a:off x="548640" y="292608"/>
-            <a:ext cx="11094415" cy="320040"/>
-          </a:xfrm>
-          <a:prstGeom prst="rect">
-            <a:avLst/>
-          </a:prstGeom>
-          <a:noFill/>
-        </p:spPr>
-        <p:txBody>
-          <a:bodyPr wrap="square" anchor="t" lIns="45720" rIns="45720">
-            <a:spAutoFit/>
-          </a:bodyPr>
-          <a:lstStyle/>
-          <a:p>
-            <a:r>
-              <a:rPr sz="1200" b="1">
-                <a:solidFill>
-                  <a:srgbClr val="2A78D6"/>
-                </a:solidFill>
-                <a:latin typeface="Calibri"/>
-              </a:rPr>
-              <a:t>RESULTS AND DISCUSSION</a:t>
-            </a:r>
-          </a:p>
-        </p:txBody>
-      </p:sp>
-      <p:sp>
-        <p:nvSpPr>
-          <p:cNvPr id="4" name="TextBox 3"/>
-          <p:cNvSpPr txBox="1"/>
-          <p:nvPr/>
-        </p:nvSpPr>
-        <p:spPr>
-          <a:xfrm>
-            <a:off x="548640" y="566928"/>
-            <a:ext cx="11094415" cy="731520"/>
-          </a:xfrm>
-          <a:prstGeom prst="rect">
-            <a:avLst/>
-          </a:prstGeom>
-          <a:noFill/>
-        </p:spPr>
-        <p:txBody>
-          <a:bodyPr wrap="square" anchor="t" lIns="45720" rIns="45720">
-            <a:spAutoFit/>
-          </a:bodyPr>
-          <a:lstStyle/>
-          <a:p>
-            <a:r>
-              <a:rPr sz="2800" b="1">
-                <a:solidFill>
-                  <a:srgbClr val="0B0B0B"/>
-                </a:solidFill>
-                <a:latin typeface="Calibri"/>
-              </a:rPr>
-              <a:t>Ridership Patterns</a:t>
-            </a:r>
-          </a:p>
-        </p:txBody>
-      </p:sp>
-      <p:sp>
-        <p:nvSpPr>
-          <p:cNvPr id="5" name="TextBox 4"/>
-          <p:cNvSpPr txBox="1"/>
-          <p:nvPr/>
-        </p:nvSpPr>
-        <p:spPr>
-          <a:xfrm>
-            <a:off x="548640" y="6446520"/>
-            <a:ext cx="11094415" cy="274320"/>
-          </a:xfrm>
-          <a:prstGeom prst="rect">
-            <a:avLst/>
-          </a:prstGeom>
-          <a:noFill/>
-        </p:spPr>
-        <p:txBody>
-          <a:bodyPr wrap="square" anchor="t" lIns="45720" rIns="45720">
-            <a:spAutoFit/>
-          </a:bodyPr>
-          <a:lstStyle/>
-          <a:p>
-            <a:r>
-              <a:rPr sz="1000">
-                <a:solidFill>
-                  <a:srgbClr val="52514E"/>
-                </a:solidFill>
-                <a:latin typeface="Calibri"/>
-              </a:rPr>
-              <a:t>ELE IDSA Project 1 · GEC2B</a:t>
-            </a:r>
-          </a:p>
-        </p:txBody>
-      </p:sp>
-      <p:sp>
-        <p:nvSpPr>
-          <p:cNvPr id="6" name="TextBox 5"/>
-          <p:cNvSpPr txBox="1"/>
-          <p:nvPr/>
-        </p:nvSpPr>
-        <p:spPr>
-          <a:xfrm>
-            <a:off x="10728655" y="6446520"/>
-            <a:ext cx="914400" cy="274320"/>
-          </a:xfrm>
-          <a:prstGeom prst="rect">
-            <a:avLst/>
-          </a:prstGeom>
-          <a:noFill/>
-        </p:spPr>
-        <p:txBody>
-          <a:bodyPr wrap="square" anchor="t" lIns="45720" rIns="45720">
-            <a:spAutoFit/>
-          </a:bodyPr>
-          <a:lstStyle/>
-          <a:p>
-            <a:pPr algn="r"/>
-            <a:r>
-              <a:rPr sz="1000">
-                <a:solidFill>
-                  <a:srgbClr val="52514E"/>
-                </a:solidFill>
-                <a:latin typeface="Calibri"/>
-              </a:rPr>
-              <a:t>7</a:t>
-            </a:r>
-          </a:p>
-        </p:txBody>
-      </p:sp>
-      <p:sp>
-        <p:nvSpPr>
-          <p:cNvPr id="7" name="TextBox 6"/>
-          <p:cNvSpPr txBox="1"/>
-          <p:nvPr/>
-        </p:nvSpPr>
-        <p:spPr>
-          <a:xfrm>
-            <a:off x="548640" y="1508760"/>
-            <a:ext cx="11094415" cy="4663440"/>
-          </a:xfrm>
-          <a:prstGeom prst="rect">
-            <a:avLst/>
-          </a:prstGeom>
-          <a:noFill/>
-        </p:spPr>
-        <p:txBody>
-          <a:bodyPr wrap="square" anchor="t" lIns="45720" rIns="45720">
-            <a:spAutoFit/>
-          </a:bodyPr>
-          <a:lstStyle/>
-          <a:p>
-            <a:pPr>
-              <a:spcAft>
-                <a:spcPts val="800"/>
-              </a:spcAft>
-            </a:pPr>
-            <a:r>
-              <a:rPr sz="2000">
-                <a:solidFill>
-                  <a:srgbClr val="0B0B0B"/>
-                </a:solidFill>
-                <a:latin typeface="Calibri"/>
-              </a:rPr>
-              <a:t>•  [Section pending: Elijah]</a:t>
             </a:r>
           </a:p>
         </p:txBody>
@@ -9403,7 +10500,7 @@
                 </a:solidFill>
                 <a:latin typeface="Calibri"/>
               </a:rPr>
-              <a:t>Average weekday boardings by stop and hour</a:t>
+              <a:t>Boardings by hour of day, weekdays vs weekends</a:t>
             </a:r>
           </a:p>
         </p:txBody>
@@ -9479,7 +10576,7 @@
       </p:sp>
       <p:pic>
         <p:nvPicPr>
-          <p:cNvPr id="7" name="Picture 6" descr="fig02_boardings_heatmap.png"/>
+          <p:cNvPr id="7" name="Picture 6" descr="fig03_boardings_by_hour.png"/>
           <p:cNvPicPr>
             <a:picLocks noChangeAspect="1"/>
           </p:cNvPicPr>
@@ -9494,7 +10591,7 @@
         <p:spPr>
           <a:xfrm>
             <a:off x="548640" y="1463040"/>
-            <a:ext cx="6302572" cy="4526280"/>
+            <a:ext cx="7498079" cy="4112594"/>
           </a:xfrm>
           <a:prstGeom prst="rect">
             <a:avLst/>
@@ -9509,7 +10606,7 @@
         </p:nvSpPr>
         <p:spPr>
           <a:xfrm>
-            <a:off x="548640" y="6035040"/>
+            <a:off x="548640" y="5621354"/>
             <a:ext cx="7498079" cy="274320"/>
           </a:xfrm>
           <a:prstGeom prst="rect">
@@ -9530,7 +10627,7 @@
                 </a:solidFill>
                 <a:latin typeface="Calibri"/>
               </a:rPr>
-              <a:t>Figure 2. Average weekday boardings by stop and hour</a:t>
+              <a:t>Figure 2. Boardings by hour of day, weekdays vs weekends</a:t>
             </a:r>
           </a:p>
         </p:txBody>
@@ -9569,7 +10666,7 @@
                 </a:solidFill>
                 <a:latin typeface="Calibri"/>
               </a:rPr>
-              <a:t>•  </a:t>
+              <a:t>•  Weekday peaks: </a:t>
             </a:r>
             <a:r>
               <a:rPr sz="1600" b="1">
@@ -9578,7 +10675,7 @@
                 </a:solidFill>
                 <a:latin typeface="Calibri"/>
               </a:rPr>
-              <a:t>Stop 1</a:t>
+              <a:t>9:00 (195.9)</a:t>
             </a:r>
             <a:r>
               <a:rPr sz="1600">
@@ -9587,7 +10684,25 @@
                 </a:solidFill>
                 <a:latin typeface="Calibri"/>
               </a:rPr>
-              <a:t> is busiest: about 429 boardings per weekday, peaking 7:00–10:00</a:t>
+              <a:t> and </a:t>
+            </a:r>
+            <a:r>
+              <a:rPr sz="1600" b="1">
+                <a:solidFill>
+                  <a:srgbClr val="0B0B0B"/>
+                </a:solidFill>
+                <a:latin typeface="Calibri"/>
+              </a:rPr>
+              <a:t>16:00 (175.9)</a:t>
+            </a:r>
+            <a:r>
+              <a:rPr sz="1600">
+                <a:solidFill>
+                  <a:srgbClr val="0B0B0B"/>
+                </a:solidFill>
+                <a:latin typeface="Calibri"/>
+              </a:rPr>
+              <a:t>, matching the commute</a:t>
             </a:r>
           </a:p>
           <a:p>
@@ -9603,7 +10718,7 @@
                 </a:solidFill>
                 <a:latin typeface="Calibri"/>
               </a:rPr>
-              <a:t>•  </a:t>
+              <a:t>•  Weekend peak: </a:t>
             </a:r>
             <a:r>
               <a:rPr sz="1600" b="1">
@@ -9612,7 +10727,7 @@
                 </a:solidFill>
                 <a:latin typeface="Calibri"/>
               </a:rPr>
-              <a:t>Stop 5</a:t>
+              <a:t>15:00 (124.6)</a:t>
             </a:r>
             <a:r>
               <a:rPr sz="1600">
@@ -9621,25 +10736,7 @@
                 </a:solidFill>
                 <a:latin typeface="Calibri"/>
               </a:rPr>
-              <a:t> peaks in the morning; </a:t>
-            </a:r>
-            <a:r>
-              <a:rPr sz="1600" b="1">
-                <a:solidFill>
-                  <a:srgbClr val="0B0B0B"/>
-                </a:solidFill>
-                <a:latin typeface="Calibri"/>
-              </a:rPr>
-              <a:t>stop 19</a:t>
-            </a:r>
-            <a:r>
-              <a:rPr sz="1600">
-                <a:solidFill>
-                  <a:srgbClr val="0B0B0B"/>
-                </a:solidFill>
-                <a:latin typeface="Calibri"/>
-              </a:rPr>
-              <a:t> in the afternoon (15:00–17:00)</a:t>
+              <a:t>, 36% lower</a:t>
             </a:r>
           </a:p>
           <a:p>
@@ -9655,15 +10752,17 @@
                 </a:solidFill>
                 <a:latin typeface="Calibri"/>
               </a:rPr>
-              <a:t>•  Most stops after stop 20 have few boardings</a:t>
-            </a:r>
-          </a:p>
-          <a:p>
-            <a:pPr>
-              <a:spcAft>
-                <a:spcPts val="800"/>
-              </a:spcAft>
-            </a:pPr>
+              <a:t>•  </a:t>
+            </a:r>
+            <a:r>
+              <a:rPr sz="1600" b="1">
+                <a:solidFill>
+                  <a:srgbClr val="0B0B0B"/>
+                </a:solidFill>
+                <a:latin typeface="Calibri"/>
+              </a:rPr>
+              <a:t>2,514</a:t>
+            </a:r>
             <a:r>
               <a:rPr sz="1600">
                 <a:solidFill>
@@ -9671,7 +10770,25 @@
                 </a:solidFill>
                 <a:latin typeface="Calibri"/>
               </a:rPr>
-              <a:t>•  Demand is very uneven across stops and hours</a:t>
+              <a:t> boardings per weekday vs </a:t>
+            </a:r>
+            <a:r>
+              <a:rPr sz="1600" b="1">
+                <a:solidFill>
+                  <a:srgbClr val="0B0B0B"/>
+                </a:solidFill>
+                <a:latin typeface="Calibri"/>
+              </a:rPr>
+              <a:t>1,728</a:t>
+            </a:r>
+            <a:r>
+              <a:rPr sz="1600">
+                <a:solidFill>
+                  <a:srgbClr val="0B0B0B"/>
+                </a:solidFill>
+                <a:latin typeface="Calibri"/>
+              </a:rPr>
+              <a:t> per weekend day (+45%)</a:t>
             </a:r>
           </a:p>
         </p:txBody>
@@ -9800,7 +10917,7 @@
                 </a:solidFill>
                 <a:latin typeface="Calibri"/>
               </a:rPr>
-              <a:t>Hypothesis Results</a:t>
+              <a:t>Total boardings per day, July–December 2021</a:t>
             </a:r>
           </a:p>
         </p:txBody>
@@ -9874,16 +10991,74 @@
           </a:p>
         </p:txBody>
       </p:sp>
-      <p:sp>
-        <p:nvSpPr>
-          <p:cNvPr id="7" name="TextBox 6"/>
+      <p:pic>
+        <p:nvPicPr>
+          <p:cNvPr id="7" name="Picture 6" descr="fig04_daily_boardings.png"/>
+          <p:cNvPicPr>
+            <a:picLocks noChangeAspect="1"/>
+          </p:cNvPicPr>
+          <p:nvPr/>
+        </p:nvPicPr>
+        <p:blipFill>
+          <a:blip r:embed="rId2"/>
+          <a:stretch>
+            <a:fillRect/>
+          </a:stretch>
+        </p:blipFill>
+        <p:spPr>
+          <a:xfrm>
+            <a:off x="548640" y="1463040"/>
+            <a:ext cx="7498079" cy="3394937"/>
+          </a:xfrm>
+          <a:prstGeom prst="rect">
+            <a:avLst/>
+          </a:prstGeom>
+        </p:spPr>
+      </p:pic>
+      <p:sp>
+        <p:nvSpPr>
+          <p:cNvPr id="8" name="TextBox 7"/>
           <p:cNvSpPr txBox="1"/>
           <p:nvPr/>
         </p:nvSpPr>
         <p:spPr>
           <a:xfrm>
-            <a:off x="548640" y="1508760"/>
-            <a:ext cx="11094415" cy="4663440"/>
+            <a:off x="548640" y="4903697"/>
+            <a:ext cx="7498079" cy="274320"/>
+          </a:xfrm>
+          <a:prstGeom prst="rect">
+            <a:avLst/>
+          </a:prstGeom>
+          <a:noFill/>
+        </p:spPr>
+        <p:txBody>
+          <a:bodyPr wrap="square" anchor="t" lIns="45720" rIns="45720">
+            <a:spAutoFit/>
+          </a:bodyPr>
+          <a:lstStyle/>
+          <a:p>
+            <a:r>
+              <a:rPr sz="1100">
+                <a:solidFill>
+                  <a:srgbClr val="52514E"/>
+                </a:solidFill>
+                <a:latin typeface="Calibri"/>
+              </a:rPr>
+              <a:t>Figure 3. Total boardings per day, July–December 2021</a:t>
+            </a:r>
+          </a:p>
+        </p:txBody>
+      </p:sp>
+      <p:sp>
+        <p:nvSpPr>
+          <p:cNvPr id="9" name="TextBox 8"/>
+          <p:cNvSpPr txBox="1"/>
+          <p:nvPr/>
+        </p:nvSpPr>
+        <p:spPr>
+          <a:xfrm>
+            <a:off x="8366759" y="1554480"/>
+            <a:ext cx="3276295" cy="4572000"/>
           </a:xfrm>
           <a:prstGeom prst="rect">
             <a:avLst/>
@@ -9902,31 +11077,99 @@
               </a:spcAft>
             </a:pPr>
             <a:r>
-              <a:rPr sz="2000">
-                <a:solidFill>
-                  <a:srgbClr val="0B0B0B"/>
-                </a:solidFill>
-                <a:latin typeface="Calibri"/>
-              </a:rPr>
-              <a:t>•  All tests: weekdays 7:00–17:59, 126,070 stop events, 131 service days, </a:t>
-            </a:r>
-            <a:r>
-              <a:rPr sz="2000" b="1">
-                <a:solidFill>
-                  <a:srgbClr val="0B0B0B"/>
-                </a:solidFill>
-                <a:latin typeface="Calibri"/>
-              </a:rPr>
-              <a:t>alpha = 0.05</a:t>
-            </a:r>
-            <a:r>
-              <a:rPr sz="2000">
-                <a:solidFill>
-                  <a:srgbClr val="0B0B0B"/>
-                </a:solidFill>
-                <a:latin typeface="Calibri"/>
-              </a:rPr>
-              <a:t>.</a:t>
+              <a:rPr sz="1600">
+                <a:solidFill>
+                  <a:srgbClr val="0B0B0B"/>
+                </a:solidFill>
+                <a:latin typeface="Calibri"/>
+              </a:rPr>
+              <a:t>•  Busiest month: </a:t>
+            </a:r>
+            <a:r>
+              <a:rPr sz="1600" b="1">
+                <a:solidFill>
+                  <a:srgbClr val="0B0B0B"/>
+                </a:solidFill>
+                <a:latin typeface="Calibri"/>
+              </a:rPr>
+              <a:t>October</a:t>
+            </a:r>
+            <a:r>
+              <a:rPr sz="1600">
+                <a:solidFill>
+                  <a:srgbClr val="0B0B0B"/>
+                </a:solidFill>
+                <a:latin typeface="Calibri"/>
+              </a:rPr>
+              <a:t> (3,025 per weekday)</a:t>
+            </a:r>
+          </a:p>
+          <a:p>
+            <a:pPr>
+              <a:spcAft>
+                <a:spcPts val="800"/>
+              </a:spcAft>
+            </a:pPr>
+            <a:r>
+              <a:rPr sz="1600">
+                <a:solidFill>
+                  <a:srgbClr val="0B0B0B"/>
+                </a:solidFill>
+                <a:latin typeface="Calibri"/>
+              </a:rPr>
+              <a:t>•  </a:t>
+            </a:r>
+            <a:r>
+              <a:rPr sz="1600" b="1">
+                <a:solidFill>
+                  <a:srgbClr val="0B0B0B"/>
+                </a:solidFill>
+                <a:latin typeface="Calibri"/>
+              </a:rPr>
+              <a:t>Thanksgiving:</a:t>
+            </a:r>
+            <a:r>
+              <a:rPr sz="1600">
+                <a:solidFill>
+                  <a:srgbClr val="0B0B0B"/>
+                </a:solidFill>
+                <a:latin typeface="Calibri"/>
+              </a:rPr>
+              <a:t> 1,146 boardings, less than half a normal weekday</a:t>
+            </a:r>
+          </a:p>
+          <a:p>
+            <a:pPr>
+              <a:spcAft>
+                <a:spcPts val="800"/>
+              </a:spcAft>
+            </a:pPr>
+            <a:r>
+              <a:rPr sz="1600">
+                <a:solidFill>
+                  <a:srgbClr val="0B0B0B"/>
+                </a:solidFill>
+                <a:latin typeface="Calibri"/>
+              </a:rPr>
+              <a:t>•  </a:t>
+            </a:r>
+            <a:r>
+              <a:rPr sz="1600" b="1">
+                <a:solidFill>
+                  <a:srgbClr val="0B0B0B"/>
+                </a:solidFill>
+                <a:latin typeface="Calibri"/>
+              </a:rPr>
+              <a:t>Christmas Day:</a:t>
+            </a:r>
+            <a:r>
+              <a:rPr sz="1600">
+                <a:solidFill>
+                  <a:srgbClr val="0B0B0B"/>
+                </a:solidFill>
+                <a:latin typeface="Calibri"/>
+              </a:rPr>
+              <a:t> 871, the lowest day overall</a:t>
             </a:r>
           </a:p>
         </p:txBody>

--- a/report/output/ELE_IDSA_Project1_Slides.pptx
+++ b/report/output/ELE_IDSA_Project1_Slides.pptx
@@ -3246,7 +3246,7 @@
                 </a:solidFill>
                 <a:latin typeface="Calibri"/>
               </a:rPr>
-              <a:t>ELE IDSA Project 1 · GEC2B  ·  Instructor: Ezron John D. Cabrera</a:t>
+              <a:t>ELE IDSA Project 1 · GEC2B · Group 10  ·  Instructor: Ezron John D. Cabrera</a:t>
             </a:r>
           </a:p>
           <a:p>
@@ -3257,7 +3257,7 @@
                 </a:solidFill>
                 <a:latin typeface="Calibri"/>
               </a:rPr>
-              <a:t>Rence Marquez, Khalil Badal, Elijah</a:t>
+              <a:t>Badal, Khalil, Lopez, Elijah David, Marquez, Rence Joseph</a:t>
             </a:r>
           </a:p>
         </p:txBody>
@@ -3420,7 +3420,7 @@
                 </a:solidFill>
                 <a:latin typeface="Calibri"/>
               </a:rPr>
-              <a:t>ELE IDSA Project 1 · GEC2B</a:t>
+              <a:t>ELE IDSA Project 1 · GEC2B · Group 10</a:t>
             </a:r>
           </a:p>
         </p:txBody>
@@ -3819,7 +3819,7 @@
                 </a:solidFill>
                 <a:latin typeface="Calibri"/>
               </a:rPr>
-              <a:t>ELE IDSA Project 1 · GEC2B</a:t>
+              <a:t>ELE IDSA Project 1 · GEC2B · Group 10</a:t>
             </a:r>
           </a:p>
         </p:txBody>
@@ -4216,7 +4216,7 @@
                 </a:solidFill>
                 <a:latin typeface="Calibri"/>
               </a:rPr>
-              <a:t>ELE IDSA Project 1 · GEC2B</a:t>
+              <a:t>ELE IDSA Project 1 · GEC2B · Group 10</a:t>
             </a:r>
           </a:p>
         </p:txBody>
@@ -4728,7 +4728,7 @@
                 </a:solidFill>
                 <a:latin typeface="Calibri"/>
               </a:rPr>
-              <a:t>ELE IDSA Project 1 · GEC2B</a:t>
+              <a:t>ELE IDSA Project 1 · GEC2B · Group 10</a:t>
             </a:r>
           </a:p>
         </p:txBody>
@@ -5179,7 +5179,7 @@
                 </a:solidFill>
                 <a:latin typeface="Calibri"/>
               </a:rPr>
-              <a:t>ELE IDSA Project 1 · GEC2B</a:t>
+              <a:t>ELE IDSA Project 1 · GEC2B · Group 10</a:t>
             </a:r>
           </a:p>
         </p:txBody>
@@ -5585,7 +5585,7 @@
                 </a:solidFill>
                 <a:latin typeface="Calibri"/>
               </a:rPr>
-              <a:t>ELE IDSA Project 1 · GEC2B</a:t>
+              <a:t>ELE IDSA Project 1 · GEC2B · Group 10</a:t>
             </a:r>
           </a:p>
         </p:txBody>
@@ -5933,7 +5933,7 @@
                 </a:solidFill>
                 <a:latin typeface="Calibri"/>
               </a:rPr>
-              <a:t>ELE IDSA Project 1 · GEC2B</a:t>
+              <a:t>ELE IDSA Project 1 · GEC2B · Group 10</a:t>
             </a:r>
           </a:p>
         </p:txBody>
@@ -6281,7 +6281,7 @@
                 </a:solidFill>
                 <a:latin typeface="Calibri"/>
               </a:rPr>
-              <a:t>ELE IDSA Project 1 · GEC2B</a:t>
+              <a:t>ELE IDSA Project 1 · GEC2B · Group 10</a:t>
             </a:r>
           </a:p>
         </p:txBody>
@@ -6699,7 +6699,7 @@
                 </a:solidFill>
                 <a:latin typeface="Calibri"/>
               </a:rPr>
-              <a:t>ELE IDSA Project 1 · GEC2B</a:t>
+              <a:t>ELE IDSA Project 1 · GEC2B · Group 10</a:t>
             </a:r>
           </a:p>
         </p:txBody>
@@ -7110,7 +7110,7 @@
                 </a:solidFill>
                 <a:latin typeface="Calibri"/>
               </a:rPr>
-              <a:t>ELE IDSA Project 1 · GEC2B</a:t>
+              <a:t>ELE IDSA Project 1 · GEC2B · Group 10</a:t>
             </a:r>
           </a:p>
         </p:txBody>
@@ -7476,7 +7476,7 @@
                 </a:solidFill>
                 <a:latin typeface="Calibri"/>
               </a:rPr>
-              <a:t>ELE IDSA Project 1 · GEC2B</a:t>
+              <a:t>ELE IDSA Project 1 · GEC2B · Group 10</a:t>
             </a:r>
           </a:p>
         </p:txBody>
@@ -7833,7 +7833,7 @@
                 </a:solidFill>
                 <a:latin typeface="Calibri"/>
               </a:rPr>
-              <a:t>ELE IDSA Project 1 · GEC2B</a:t>
+              <a:t>ELE IDSA Project 1 · GEC2B · Group 10</a:t>
             </a:r>
           </a:p>
         </p:txBody>
@@ -8188,7 +8188,7 @@
                 </a:solidFill>
                 <a:latin typeface="Calibri"/>
               </a:rPr>
-              <a:t>ELE IDSA Project 1 · GEC2B</a:t>
+              <a:t>ELE IDSA Project 1 · GEC2B · Group 10</a:t>
             </a:r>
           </a:p>
         </p:txBody>
@@ -8615,7 +8615,7 @@
                 </a:solidFill>
                 <a:latin typeface="Calibri"/>
               </a:rPr>
-              <a:t>ELE IDSA Project 1 · GEC2B</a:t>
+              <a:t>ELE IDSA Project 1 · GEC2B · Group 10</a:t>
             </a:r>
           </a:p>
         </p:txBody>
@@ -9384,7 +9384,7 @@
                 </a:solidFill>
                 <a:latin typeface="Calibri"/>
               </a:rPr>
-              <a:t>ELE IDSA Project 1 · GEC2B</a:t>
+              <a:t>ELE IDSA Project 1 · GEC2B · Group 10</a:t>
             </a:r>
           </a:p>
         </p:txBody>
@@ -10119,7 +10119,7 @@
                 </a:solidFill>
                 <a:latin typeface="Calibri"/>
               </a:rPr>
-              <a:t>ELE IDSA Project 1 · GEC2B</a:t>
+              <a:t>ELE IDSA Project 1 · GEC2B · Group 10</a:t>
             </a:r>
           </a:p>
         </p:txBody>
@@ -10534,7 +10534,7 @@
                 </a:solidFill>
                 <a:latin typeface="Calibri"/>
               </a:rPr>
-              <a:t>ELE IDSA Project 1 · GEC2B</a:t>
+              <a:t>ELE IDSA Project 1 · GEC2B · Group 10</a:t>
             </a:r>
           </a:p>
         </p:txBody>
@@ -10951,7 +10951,7 @@
                 </a:solidFill>
                 <a:latin typeface="Calibri"/>
               </a:rPr>
-              <a:t>ELE IDSA Project 1 · GEC2B</a:t>
+              <a:t>ELE IDSA Project 1 · GEC2B · Group 10</a:t>
             </a:r>
           </a:p>
         </p:txBody>
